--- a/lecons/F3/11_FORM4_LESSON08_Rocks.pptx
+++ b/lecons/F3/11_FORM4_LESSON08_Rocks.pptx
@@ -3627,7 +3627,7 @@
           <a:p>
             <a:r>
               <a:rPr lang="en-US" dirty="0"/>
-              <a:t>Our next lesson will be on Lesson 9: The Theory of Continental Drift. Thank you for your attention, and see you next time.</a:t>
+              <a:t>Our next lesson will be on Lesson 9: The Theories of the Earth's Structure: Continental Drift. Thank you for your attention, and see you next time.</a:t>
             </a:r>
             <a:endParaRPr lang="en-US" dirty="0"/>
           </a:p>
@@ -14928,7 +14928,7 @@
                 <a:ea typeface="Times New Roman" pitchFamily="34" charset="-122"/>
                 <a:cs typeface="Times New Roman" pitchFamily="34" charset="-120"/>
               </a:rPr>
-              <a:t>Lesson 9: The Theory of Continental Drift</a:t>
+              <a:t>Lesson 9: The Theories of the Earth's Structure: Continental Drift</a:t>
             </a:r>
             <a:endParaRPr lang="en-US" sz="4000" dirty="0"/>
           </a:p>

--- a/lecons/F3/11_FORM4_LESSON08_Rocks.pptx
+++ b/lecons/F3/11_FORM4_LESSON08_Rocks.pptx
@@ -51,9 +51,18 @@
     <p:sldId id="299" r:id="rId45"/>
     <p:sldId id="300" r:id="rId46"/>
     <p:sldId id="301" r:id="rId47"/>
+    <p:sldId id="302" r:id="rId48"/>
+    <p:sldId id="303" r:id="rId49"/>
+    <p:sldId id="304" r:id="rId50"/>
+    <p:sldId id="305" r:id="rId51"/>
+    <p:sldId id="306" r:id="rId52"/>
+    <p:sldId id="307" r:id="rId53"/>
+    <p:sldId id="308" r:id="rId54"/>
+    <p:sldId id="309" r:id="rId55"/>
+    <p:sldId id="310" r:id="rId56"/>
   </p:sldIdLst>
   <p:notesMasterIdLst>
-    <p:notesMasterId r:id="rId48"/>
+    <p:notesMasterId r:id="rId57"/>
   </p:notesMasterIdLst>
   <p:sldSz cx="12192000" cy="6858000"/>
   <p:notesSz cx="6858000" cy="12192000"/>
@@ -635,7 +644,7 @@
           <a:p>
             <a:r>
               <a:rPr lang="en-US" dirty="0"/>
-              <a:t>Listen carefully to this situation from real life. In Garoua, a new mosque is built on hard grey stones with small crystals. Some walls are made of blocks with thin layers. Kadidja wonders why the stones are different. Think about it, because I am going to ask you some questions.</a:t>
+              <a:t>Listen carefully to this situation from real life. In Garoua, a new mosque is built on hard grey stones with small crystals, while some walls are made of blocks with thin layers, and the floor is covered with shiny marble. Kadidja asks: "Why are these stones so different, and how were they formed?" Think about it, because I am going to ask you some questions.</a:t>
             </a:r>
             <a:endParaRPr lang="en-US" dirty="0"/>
           </a:p>
@@ -811,7 +820,7 @@
           <a:p>
             <a:r>
               <a:rPr lang="en-US" dirty="0"/>
-              <a:t>Good. Kadidja does not know why rocks are different.</a:t>
+              <a:t>Good. Kadidja does not know why rocks are different and how they were formed.</a:t>
             </a:r>
             <a:endParaRPr lang="en-US" dirty="0"/>
           </a:p>
@@ -899,7 +908,7 @@
           <a:p>
             <a:r>
               <a:rPr lang="en-US" dirty="0"/>
-              <a:t>Question 2: Describe the two kinds of stones. Think for a moment, then raise your hand to answer.</a:t>
+              <a:t>Question 2: Describe two kinds of stones in the situation. Think for a moment, then raise your hand to answer.</a:t>
             </a:r>
             <a:endParaRPr lang="en-US" dirty="0"/>
           </a:p>
@@ -987,7 +996,7 @@
           <a:p>
             <a:r>
               <a:rPr lang="en-US" dirty="0"/>
-              <a:t>Good. Hard grey stones with crystals, and stones with layers.</a:t>
+              <a:t>Good. Hard grey stones with crystals, and blocks with thin layers.</a:t>
             </a:r>
             <a:endParaRPr lang="en-US" dirty="0"/>
           </a:p>
@@ -1163,7 +1172,7 @@
           <a:p>
             <a:r>
               <a:rPr lang="en-US" dirty="0"/>
-              <a:t>Good. By the way they were formed: igneous, sedimentary, metamorphic.</a:t>
+              <a:t>Good. By their origin: igneous, sedimentary and metamorphic rocks.</a:t>
             </a:r>
             <a:endParaRPr lang="en-US" dirty="0"/>
           </a:p>
@@ -1691,7 +1700,7 @@
           <a:p>
             <a:r>
               <a:rPr lang="en-US" dirty="0"/>
-              <a:t>Let us check the answer together. Hot magma cooled and became hard. It is an igneous rock.</a:t>
+              <a:t>Let us check the answer together. Hot magma cooled slowly and became hard: it is an igneous rock.</a:t>
             </a:r>
             <a:endParaRPr lang="en-US" dirty="0"/>
           </a:p>
@@ -1955,7 +1964,7 @@
           <a:p>
             <a:r>
               <a:rPr lang="en-US" dirty="0"/>
-              <a:t>Let us check the answer together. Layers of sand and mud were pressed together. It is a sedimentary rock.</a:t>
+              <a:t>Let us check the answer together. Layers of sand and mud were pressed together: it is a sedimentary rock.</a:t>
             </a:r>
             <a:endParaRPr lang="en-US" dirty="0"/>
           </a:p>
@@ -2131,7 +2140,7 @@
           <a:p>
             <a:r>
               <a:rPr lang="en-US" dirty="0"/>
-              <a:t>Here is the question for Activity 3: Marble was limestone. What changed it? Take one minute to think and write your answer in your rough notebook.</a:t>
+              <a:t>Here is the question for Activity 3: Marble was once limestone. What changed it? Take one minute to think and write your answer in your rough notebook.</a:t>
             </a:r>
             <a:endParaRPr lang="en-US" dirty="0"/>
           </a:p>
@@ -2219,7 +2228,7 @@
           <a:p>
             <a:r>
               <a:rPr lang="en-US" dirty="0"/>
-              <a:t>Let us check the answer together. Great heat and pressure. It is a metamorphic rock.</a:t>
+              <a:t>Let us check the answer together. Great heat and pressure: it is a metamorphic rock.</a:t>
             </a:r>
             <a:endParaRPr lang="en-US" dirty="0"/>
           </a:p>
@@ -2395,7 +2404,7 @@
           <a:p>
             <a:r>
               <a:rPr lang="en-US" dirty="0"/>
-              <a:t>Let us copy the definitions. The key terms of this lesson are defined as follows. On this slide we have Rock and Magma. Write each point on a new line, with the key term first, and explain it in your own words when we revise.</a:t>
+              <a:t>Let us copy the definitions. The key terms of this lesson are defined as follows. On this slide we have Rock and Magma. Write each point on a new line, with the key term first, and explain it in your own words when we revise. When you finish, we go to the next slide.</a:t>
             </a:r>
             <a:endParaRPr lang="en-US" dirty="0"/>
           </a:p>
@@ -2571,7 +2580,7 @@
           <a:p>
             <a:r>
               <a:rPr lang="en-US" dirty="0"/>
-              <a:t>Let us copy Classification of Rocks. Rocks are classified according to their origin as follows. On this slide we have Igneous rocks. Write each point on a new line, with the key term first, and explain it in your own words when we revise. When you finish, we go to the next slide.</a:t>
+              <a:t>We continue with the definitions. On this slide we have Sediments. Write each point on a new line, with the key term first, and explain it in your own words when we revise.</a:t>
             </a:r>
             <a:endParaRPr lang="en-US" dirty="0"/>
           </a:p>
@@ -2659,7 +2668,7 @@
           <a:p>
             <a:r>
               <a:rPr lang="en-US" dirty="0"/>
-              <a:t>We continue with Classification of Rocks. On this slide we have Sedimentary rocks and Metamorphic rocks. Write each point on a new line, with the key term first, and explain it in your own words when we revise. When you finish, we go to the next slide.</a:t>
+              <a:t>Let us copy Igneous Rocks. Igneous rocks have the following characteristics and examples. Copy the point on Formation on the left, then draw the diagram on the right: granite, an igneous rock. Give it a title and label it clearly.</a:t>
             </a:r>
             <a:endParaRPr lang="en-US" dirty="0"/>
           </a:p>
@@ -2747,7 +2756,7 @@
           <a:p>
             <a:r>
               <a:rPr lang="en-US" dirty="0"/>
-              <a:t>We continue with Classification of Rocks. On this slide we have Fossils. Write each point on a new line, with the key term first, and explain it in your own words when we revise.</a:t>
+              <a:t>We continue with Igneous Rocks. On this slide we have Crystals and Hardness. Write each point on a new line, with the key term first, and explain it in your own words when we revise. When you finish, we go to the next slide.</a:t>
             </a:r>
             <a:endParaRPr lang="en-US" dirty="0"/>
           </a:p>
@@ -2835,7 +2844,7 @@
           <a:p>
             <a:r>
               <a:rPr lang="en-US" dirty="0"/>
-              <a:t>Let us copy The Rock Cycle. The rock cycle is explained as follows. On this slide we have Rock cycle. Write each point on a new line, with the key term first, and explain it in your own words when we revise.</a:t>
+              <a:t>We continue with Igneous Rocks. On this slide we have Intrusive examples. Write each point on a new line, with the key term first, and explain it in your own words when we revise.</a:t>
             </a:r>
             <a:endParaRPr lang="en-US" dirty="0"/>
           </a:p>
@@ -2923,7 +2932,7 @@
           <a:p>
             <a:r>
               <a:rPr lang="en-US" dirty="0"/>
-              <a:t>Now draw this illustration in your notebook: the rock cycle. Give it a title and label it clearly.</a:t>
+              <a:t>Copy the point on Extrusive examples on the left, then draw the diagram on the right: basalt. Give it a title and label it clearly.</a:t>
             </a:r>
             <a:endParaRPr lang="en-US" dirty="0"/>
           </a:p>
@@ -3011,7 +3020,7 @@
           <a:p>
             <a:r>
               <a:rPr lang="en-US" dirty="0"/>
-              <a:t>Now let us check what you have understood. Question 1: How are igneous rocks formed? Answer in your exercise book.</a:t>
+              <a:t>Let us copy Sedimentary Rocks. Sedimentary rocks have the following characteristics and examples. Copy the point on Formation on the left, then draw the diagram on the right: sandstone, a sedimentary rock. Give it a title and label it clearly.</a:t>
             </a:r>
             <a:endParaRPr lang="en-US" dirty="0"/>
           </a:p>
@@ -3099,7 +3108,7 @@
           <a:p>
             <a:r>
               <a:rPr lang="en-US" dirty="0"/>
-              <a:t>The expected answer is: when magma or lava cools and becomes hard. If you got it right, well done.</a:t>
+              <a:t>We continue with Sedimentary Rocks. On this slide we have Layers. Write each point on a new line, with the key term first, and explain it in your own words when we revise.</a:t>
             </a:r>
             <a:endParaRPr lang="en-US" dirty="0"/>
           </a:p>
@@ -3187,7 +3196,7 @@
           <a:p>
             <a:r>
               <a:rPr lang="en-US" dirty="0"/>
-              <a:t>Now let us check what you have understood. Question 2: Give one example of a metamorphic rock. Answer in your exercise book.</a:t>
+              <a:t>Copy the point on Fossils on the left, then draw the diagram on the right: a fossil in rock. Give it a title and label it clearly.</a:t>
             </a:r>
             <a:endParaRPr lang="en-US" dirty="0"/>
           </a:p>
@@ -3275,7 +3284,7 @@
           <a:p>
             <a:r>
               <a:rPr lang="en-US" dirty="0"/>
-              <a:t>The expected answer is: marble (or slate, gneiss). If you got it right, well done.</a:t>
+              <a:t>We continue with Sedimentary Rocks. On this slide we have Mechanically formed examples and Organically and chemically formed examples. Write each point on a new line, with the key term first, and explain it in your own words when we revise.</a:t>
             </a:r>
             <a:endParaRPr lang="en-US" dirty="0"/>
           </a:p>
@@ -3363,7 +3372,7 @@
           <a:p>
             <a:r>
               <a:rPr lang="en-US" dirty="0"/>
-              <a:t>For those who need more practice, fill in the blanks in your exercise book. The answers are: number 1, igneous; number 2, sedimentary; number 3, metamorphic.</a:t>
+              <a:t>Let us copy Metamorphic Rocks. Metamorphic rocks have the following characteristics and examples. Copy the point on Formation on the left, then draw the diagram on the right: marble, a metamorphic rock. Give it a title and label it clearly.</a:t>
             </a:r>
             <a:endParaRPr lang="en-US" dirty="0"/>
           </a:p>
@@ -3539,7 +3548,7 @@
           <a:p>
             <a:r>
               <a:rPr lang="en-US" dirty="0"/>
-              <a:t>For your homework: Look at a map of the world. Cut out, or trace, Africa and South America and try to fit their coasts together. Write what you notice. We shall correct it at the beginning of our next lesson.</a:t>
+              <a:t>We continue with Metamorphic Rocks. On this slide we have Hardness and Bands. Write each point on a new line, with the key term first, and explain it in your own words when we revise. When you finish, we go to the next slide.</a:t>
             </a:r>
             <a:endParaRPr lang="en-US" dirty="0"/>
           </a:p>
@@ -3627,7 +3636,7 @@
           <a:p>
             <a:r>
               <a:rPr lang="en-US" dirty="0"/>
-              <a:t>Our next lesson will be on Lesson 9: The Theories of the Earth's Structure: Continental Drift. Thank you for your attention, and see you next time.</a:t>
+              <a:t>We continue with Metamorphic Rocks. On this slide we have Examples. Write each point on a new line, with the key term first, and explain it in your own words when we revise.</a:t>
             </a:r>
             <a:endParaRPr lang="en-US" dirty="0"/>
           </a:p>
@@ -3715,7 +3724,7 @@
           <a:p>
             <a:r>
               <a:rPr lang="en-US" dirty="0"/>
-              <a:t>Let us play the bilingual game. I say a word in English, and you give me the French word. Then we do the reverse.</a:t>
+              <a:t>Let us copy The Rock Cycle. The rock cycle is illustrated as follows. Copy the point on Rock cycle on the left, then draw the diagram on the right: the rock cycle. Give it a title and label it clearly.</a:t>
             </a:r>
             <a:endParaRPr lang="en-US" dirty="0"/>
           </a:p>
@@ -3803,7 +3812,7 @@
           <a:p>
             <a:r>
               <a:rPr lang="en-US" dirty="0"/>
-              <a:t>I record this information in the official logbook of the class after the lesson.</a:t>
+              <a:t>Now let us check what you have understood. Question 1: How are igneous rocks formed? Answer in your exercise book.</a:t>
             </a:r>
             <a:endParaRPr lang="en-US" dirty="0"/>
           </a:p>
@@ -3891,7 +3900,7 @@
           <a:p>
             <a:r>
               <a:rPr lang="en-US" dirty="0"/>
-              <a:t>I complete the second page of the logbook: the matter taught, the evaluation, the homework and the attendance.</a:t>
+              <a:t>The expected answer is: when magma or lava cools and becomes hard. If you got it right, well done.</a:t>
             </a:r>
             <a:endParaRPr lang="en-US" dirty="0"/>
           </a:p>
@@ -3979,7 +3988,7 @@
           <a:p>
             <a:r>
               <a:rPr lang="en-US" dirty="0"/>
-              <a:t>This slide is for me, the teacher: it gives the timing of the lesson and what to do if the projector is not available.</a:t>
+              <a:t>Now let us check what you have understood. Question 2: Give one example of a metamorphic rock. Answer in your exercise book.</a:t>
             </a:r>
             <a:endParaRPr lang="en-US" dirty="0"/>
           </a:p>
@@ -4067,7 +4076,7 @@
           <a:p>
             <a:r>
               <a:rPr lang="en-US" dirty="0"/>
-              <a:t>These are the references and picture credits used to prepare this lesson.</a:t>
+              <a:t>The expected answer is: marble (or slate, gneiss). If you got it right, well done.</a:t>
             </a:r>
             <a:endParaRPr lang="en-US" dirty="0"/>
           </a:p>
@@ -4091,6 +4100,270 @@
             <a:fld id="{F7021451-1387-4CA6-816F-3879F97B5CBC}" type="slidenum">
               <a:rPr lang="en-US"/>
               <a:t>46</a:t>
+            </a:fld>
+            <a:endParaRPr lang="en-US"/>
+          </a:p>
+        </p:txBody>
+      </p:sp>
+    </p:spTree>
+    <p:extLst>
+      <p:ext uri="{BB962C8B-B14F-4D97-AF65-F5344CB8AC3E}">
+        <p14:creationId xmlns:p14="http://schemas.microsoft.com/office/powerpoint/2010/main" val="1024086991"/>
+      </p:ext>
+    </p:extLst>
+  </p:cSld>
+  <p:clrMapOvr>
+    <a:masterClrMapping/>
+  </p:clrMapOvr>
+</p:notes>
+</file>
+
+<file path=ppt/notesSlides/notesSlide47.xml><?xml version="1.0" encoding="utf-8"?>
+<p:notes xmlns:a="http://schemas.openxmlformats.org/drawingml/2006/main" xmlns:r="http://schemas.openxmlformats.org/officeDocument/2006/relationships" xmlns:p="http://schemas.openxmlformats.org/presentationml/2006/main">
+  <p:cSld>
+    <p:spTree>
+      <p:nvGrpSpPr>
+        <p:cNvPr id="1" name=""/>
+        <p:cNvGrpSpPr/>
+        <p:nvPr/>
+      </p:nvGrpSpPr>
+      <p:grpSpPr>
+        <a:xfrm>
+          <a:off x="0" y="0"/>
+          <a:ext cx="0" cy="0"/>
+          <a:chOff x="0" y="0"/>
+          <a:chExt cx="0" cy="0"/>
+        </a:xfrm>
+      </p:grpSpPr>
+      <p:sp>
+        <p:nvSpPr>
+          <p:cNvPr id="2" name="Slide Image Placeholder 1"/>
+          <p:cNvSpPr>
+            <a:spLocks noGrp="1" noRot="1" noChangeAspect="1"/>
+          </p:cNvSpPr>
+          <p:nvPr>
+            <p:ph type="sldImg"/>
+          </p:nvPr>
+        </p:nvSpPr>
+        <p:spPr/>
+      </p:sp>
+      <p:sp>
+        <p:nvSpPr>
+          <p:cNvPr id="3" name="Notes Placeholder 2"/>
+          <p:cNvSpPr>
+            <a:spLocks noGrp="1"/>
+          </p:cNvSpPr>
+          <p:nvPr>
+            <p:ph type="body" idx="1"/>
+          </p:nvPr>
+        </p:nvSpPr>
+        <p:spPr/>
+        <p:txBody>
+          <a:bodyPr/>
+          <a:lstStyle/>
+          <a:p>
+            <a:r>
+              <a:rPr lang="en-US" dirty="0"/>
+              <a:t>For those who need more practice, fill in the blanks in your exercise book. The answers are: number 1, igneous; number 2, sedimentary; number 3, metamorphic.</a:t>
+            </a:r>
+            <a:endParaRPr lang="en-US" dirty="0"/>
+          </a:p>
+        </p:txBody>
+      </p:sp>
+      <p:sp>
+        <p:nvSpPr>
+          <p:cNvPr id="4" name="Slide Number Placeholder 3"/>
+          <p:cNvSpPr>
+            <a:spLocks noGrp="1"/>
+          </p:cNvSpPr>
+          <p:nvPr>
+            <p:ph type="sldNum" sz="quarter" idx="10"/>
+          </p:nvPr>
+        </p:nvSpPr>
+        <p:spPr/>
+        <p:txBody>
+          <a:bodyPr/>
+          <a:lstStyle/>
+          <a:p>
+            <a:fld id="{F7021451-1387-4CA6-816F-3879F97B5CBC}" type="slidenum">
+              <a:rPr lang="en-US"/>
+              <a:t>47</a:t>
+            </a:fld>
+            <a:endParaRPr lang="en-US"/>
+          </a:p>
+        </p:txBody>
+      </p:sp>
+    </p:spTree>
+    <p:extLst>
+      <p:ext uri="{BB962C8B-B14F-4D97-AF65-F5344CB8AC3E}">
+        <p14:creationId xmlns:p14="http://schemas.microsoft.com/office/powerpoint/2010/main" val="1024086991"/>
+      </p:ext>
+    </p:extLst>
+  </p:cSld>
+  <p:clrMapOvr>
+    <a:masterClrMapping/>
+  </p:clrMapOvr>
+</p:notes>
+</file>
+
+<file path=ppt/notesSlides/notesSlide48.xml><?xml version="1.0" encoding="utf-8"?>
+<p:notes xmlns:a="http://schemas.openxmlformats.org/drawingml/2006/main" xmlns:r="http://schemas.openxmlformats.org/officeDocument/2006/relationships" xmlns:p="http://schemas.openxmlformats.org/presentationml/2006/main">
+  <p:cSld>
+    <p:spTree>
+      <p:nvGrpSpPr>
+        <p:cNvPr id="1" name=""/>
+        <p:cNvGrpSpPr/>
+        <p:nvPr/>
+      </p:nvGrpSpPr>
+      <p:grpSpPr>
+        <a:xfrm>
+          <a:off x="0" y="0"/>
+          <a:ext cx="0" cy="0"/>
+          <a:chOff x="0" y="0"/>
+          <a:chExt cx="0" cy="0"/>
+        </a:xfrm>
+      </p:grpSpPr>
+      <p:sp>
+        <p:nvSpPr>
+          <p:cNvPr id="2" name="Slide Image Placeholder 1"/>
+          <p:cNvSpPr>
+            <a:spLocks noGrp="1" noRot="1" noChangeAspect="1"/>
+          </p:cNvSpPr>
+          <p:nvPr>
+            <p:ph type="sldImg"/>
+          </p:nvPr>
+        </p:nvSpPr>
+        <p:spPr/>
+      </p:sp>
+      <p:sp>
+        <p:nvSpPr>
+          <p:cNvPr id="3" name="Notes Placeholder 2"/>
+          <p:cNvSpPr>
+            <a:spLocks noGrp="1"/>
+          </p:cNvSpPr>
+          <p:nvPr>
+            <p:ph type="body" idx="1"/>
+          </p:nvPr>
+        </p:nvSpPr>
+        <p:spPr/>
+        <p:txBody>
+          <a:bodyPr/>
+          <a:lstStyle/>
+          <a:p>
+            <a:r>
+              <a:rPr lang="en-US" dirty="0"/>
+              <a:t>For your homework: Look at a map of the world. Cut out, or trace, Africa and South America and try to fit their coasts together. Write what you notice. We shall correct it at the beginning of our next lesson.</a:t>
+            </a:r>
+            <a:endParaRPr lang="en-US" dirty="0"/>
+          </a:p>
+        </p:txBody>
+      </p:sp>
+      <p:sp>
+        <p:nvSpPr>
+          <p:cNvPr id="4" name="Slide Number Placeholder 3"/>
+          <p:cNvSpPr>
+            <a:spLocks noGrp="1"/>
+          </p:cNvSpPr>
+          <p:nvPr>
+            <p:ph type="sldNum" sz="quarter" idx="10"/>
+          </p:nvPr>
+        </p:nvSpPr>
+        <p:spPr/>
+        <p:txBody>
+          <a:bodyPr/>
+          <a:lstStyle/>
+          <a:p>
+            <a:fld id="{F7021451-1387-4CA6-816F-3879F97B5CBC}" type="slidenum">
+              <a:rPr lang="en-US"/>
+              <a:t>48</a:t>
+            </a:fld>
+            <a:endParaRPr lang="en-US"/>
+          </a:p>
+        </p:txBody>
+      </p:sp>
+    </p:spTree>
+    <p:extLst>
+      <p:ext uri="{BB962C8B-B14F-4D97-AF65-F5344CB8AC3E}">
+        <p14:creationId xmlns:p14="http://schemas.microsoft.com/office/powerpoint/2010/main" val="1024086991"/>
+      </p:ext>
+    </p:extLst>
+  </p:cSld>
+  <p:clrMapOvr>
+    <a:masterClrMapping/>
+  </p:clrMapOvr>
+</p:notes>
+</file>
+
+<file path=ppt/notesSlides/notesSlide49.xml><?xml version="1.0" encoding="utf-8"?>
+<p:notes xmlns:a="http://schemas.openxmlformats.org/drawingml/2006/main" xmlns:r="http://schemas.openxmlformats.org/officeDocument/2006/relationships" xmlns:p="http://schemas.openxmlformats.org/presentationml/2006/main">
+  <p:cSld>
+    <p:spTree>
+      <p:nvGrpSpPr>
+        <p:cNvPr id="1" name=""/>
+        <p:cNvGrpSpPr/>
+        <p:nvPr/>
+      </p:nvGrpSpPr>
+      <p:grpSpPr>
+        <a:xfrm>
+          <a:off x="0" y="0"/>
+          <a:ext cx="0" cy="0"/>
+          <a:chOff x="0" y="0"/>
+          <a:chExt cx="0" cy="0"/>
+        </a:xfrm>
+      </p:grpSpPr>
+      <p:sp>
+        <p:nvSpPr>
+          <p:cNvPr id="2" name="Slide Image Placeholder 1"/>
+          <p:cNvSpPr>
+            <a:spLocks noGrp="1" noRot="1" noChangeAspect="1"/>
+          </p:cNvSpPr>
+          <p:nvPr>
+            <p:ph type="sldImg"/>
+          </p:nvPr>
+        </p:nvSpPr>
+        <p:spPr/>
+      </p:sp>
+      <p:sp>
+        <p:nvSpPr>
+          <p:cNvPr id="3" name="Notes Placeholder 2"/>
+          <p:cNvSpPr>
+            <a:spLocks noGrp="1"/>
+          </p:cNvSpPr>
+          <p:nvPr>
+            <p:ph type="body" idx="1"/>
+          </p:nvPr>
+        </p:nvSpPr>
+        <p:spPr/>
+        <p:txBody>
+          <a:bodyPr/>
+          <a:lstStyle/>
+          <a:p>
+            <a:r>
+              <a:rPr lang="en-US" dirty="0"/>
+              <a:t>Our next lesson will be on Lesson 9: The Theories of the Earth's Structure: Continental Drift. Thank you for your attention, and see you next time.</a:t>
+            </a:r>
+            <a:endParaRPr lang="en-US" dirty="0"/>
+          </a:p>
+        </p:txBody>
+      </p:sp>
+      <p:sp>
+        <p:nvSpPr>
+          <p:cNvPr id="4" name="Slide Number Placeholder 3"/>
+          <p:cNvSpPr>
+            <a:spLocks noGrp="1"/>
+          </p:cNvSpPr>
+          <p:nvPr>
+            <p:ph type="sldNum" sz="quarter" idx="10"/>
+          </p:nvPr>
+        </p:nvSpPr>
+        <p:spPr/>
+        <p:txBody>
+          <a:bodyPr/>
+          <a:lstStyle/>
+          <a:p>
+            <a:fld id="{F7021451-1387-4CA6-816F-3879F97B5CBC}" type="slidenum">
+              <a:rPr lang="en-US"/>
+              <a:t>49</a:t>
             </a:fld>
             <a:endParaRPr lang="en-US"/>
           </a:p>
@@ -4197,6 +4470,534 @@
 </p:notes>
 </file>
 
+<file path=ppt/notesSlides/notesSlide50.xml><?xml version="1.0" encoding="utf-8"?>
+<p:notes xmlns:a="http://schemas.openxmlformats.org/drawingml/2006/main" xmlns:r="http://schemas.openxmlformats.org/officeDocument/2006/relationships" xmlns:p="http://schemas.openxmlformats.org/presentationml/2006/main">
+  <p:cSld>
+    <p:spTree>
+      <p:nvGrpSpPr>
+        <p:cNvPr id="1" name=""/>
+        <p:cNvGrpSpPr/>
+        <p:nvPr/>
+      </p:nvGrpSpPr>
+      <p:grpSpPr>
+        <a:xfrm>
+          <a:off x="0" y="0"/>
+          <a:ext cx="0" cy="0"/>
+          <a:chOff x="0" y="0"/>
+          <a:chExt cx="0" cy="0"/>
+        </a:xfrm>
+      </p:grpSpPr>
+      <p:sp>
+        <p:nvSpPr>
+          <p:cNvPr id="2" name="Slide Image Placeholder 1"/>
+          <p:cNvSpPr>
+            <a:spLocks noGrp="1" noRot="1" noChangeAspect="1"/>
+          </p:cNvSpPr>
+          <p:nvPr>
+            <p:ph type="sldImg"/>
+          </p:nvPr>
+        </p:nvSpPr>
+        <p:spPr/>
+      </p:sp>
+      <p:sp>
+        <p:nvSpPr>
+          <p:cNvPr id="3" name="Notes Placeholder 2"/>
+          <p:cNvSpPr>
+            <a:spLocks noGrp="1"/>
+          </p:cNvSpPr>
+          <p:nvPr>
+            <p:ph type="body" idx="1"/>
+          </p:nvPr>
+        </p:nvSpPr>
+        <p:spPr/>
+        <p:txBody>
+          <a:bodyPr/>
+          <a:lstStyle/>
+          <a:p>
+            <a:r>
+              <a:rPr lang="en-US" dirty="0"/>
+              <a:t>Let us play the bilingual game. I say a word in English, and you give me the French word. Then we do the reverse.</a:t>
+            </a:r>
+            <a:endParaRPr lang="en-US" dirty="0"/>
+          </a:p>
+        </p:txBody>
+      </p:sp>
+      <p:sp>
+        <p:nvSpPr>
+          <p:cNvPr id="4" name="Slide Number Placeholder 3"/>
+          <p:cNvSpPr>
+            <a:spLocks noGrp="1"/>
+          </p:cNvSpPr>
+          <p:nvPr>
+            <p:ph type="sldNum" sz="quarter" idx="10"/>
+          </p:nvPr>
+        </p:nvSpPr>
+        <p:spPr/>
+        <p:txBody>
+          <a:bodyPr/>
+          <a:lstStyle/>
+          <a:p>
+            <a:fld id="{F7021451-1387-4CA6-816F-3879F97B5CBC}" type="slidenum">
+              <a:rPr lang="en-US"/>
+              <a:t>50</a:t>
+            </a:fld>
+            <a:endParaRPr lang="en-US"/>
+          </a:p>
+        </p:txBody>
+      </p:sp>
+    </p:spTree>
+    <p:extLst>
+      <p:ext uri="{BB962C8B-B14F-4D97-AF65-F5344CB8AC3E}">
+        <p14:creationId xmlns:p14="http://schemas.microsoft.com/office/powerpoint/2010/main" val="1024086991"/>
+      </p:ext>
+    </p:extLst>
+  </p:cSld>
+  <p:clrMapOvr>
+    <a:masterClrMapping/>
+  </p:clrMapOvr>
+</p:notes>
+</file>
+
+<file path=ppt/notesSlides/notesSlide51.xml><?xml version="1.0" encoding="utf-8"?>
+<p:notes xmlns:a="http://schemas.openxmlformats.org/drawingml/2006/main" xmlns:r="http://schemas.openxmlformats.org/officeDocument/2006/relationships" xmlns:p="http://schemas.openxmlformats.org/presentationml/2006/main">
+  <p:cSld>
+    <p:spTree>
+      <p:nvGrpSpPr>
+        <p:cNvPr id="1" name=""/>
+        <p:cNvGrpSpPr/>
+        <p:nvPr/>
+      </p:nvGrpSpPr>
+      <p:grpSpPr>
+        <a:xfrm>
+          <a:off x="0" y="0"/>
+          <a:ext cx="0" cy="0"/>
+          <a:chOff x="0" y="0"/>
+          <a:chExt cx="0" cy="0"/>
+        </a:xfrm>
+      </p:grpSpPr>
+      <p:sp>
+        <p:nvSpPr>
+          <p:cNvPr id="2" name="Slide Image Placeholder 1"/>
+          <p:cNvSpPr>
+            <a:spLocks noGrp="1" noRot="1" noChangeAspect="1"/>
+          </p:cNvSpPr>
+          <p:nvPr>
+            <p:ph type="sldImg"/>
+          </p:nvPr>
+        </p:nvSpPr>
+        <p:spPr/>
+      </p:sp>
+      <p:sp>
+        <p:nvSpPr>
+          <p:cNvPr id="3" name="Notes Placeholder 2"/>
+          <p:cNvSpPr>
+            <a:spLocks noGrp="1"/>
+          </p:cNvSpPr>
+          <p:nvPr>
+            <p:ph type="body" idx="1"/>
+          </p:nvPr>
+        </p:nvSpPr>
+        <p:spPr/>
+        <p:txBody>
+          <a:bodyPr/>
+          <a:lstStyle/>
+          <a:p>
+            <a:r>
+              <a:rPr lang="en-US" dirty="0"/>
+              <a:t>I record this information in the official logbook of the class after the lesson.</a:t>
+            </a:r>
+            <a:endParaRPr lang="en-US" dirty="0"/>
+          </a:p>
+        </p:txBody>
+      </p:sp>
+      <p:sp>
+        <p:nvSpPr>
+          <p:cNvPr id="4" name="Slide Number Placeholder 3"/>
+          <p:cNvSpPr>
+            <a:spLocks noGrp="1"/>
+          </p:cNvSpPr>
+          <p:nvPr>
+            <p:ph type="sldNum" sz="quarter" idx="10"/>
+          </p:nvPr>
+        </p:nvSpPr>
+        <p:spPr/>
+        <p:txBody>
+          <a:bodyPr/>
+          <a:lstStyle/>
+          <a:p>
+            <a:fld id="{F7021451-1387-4CA6-816F-3879F97B5CBC}" type="slidenum">
+              <a:rPr lang="en-US"/>
+              <a:t>51</a:t>
+            </a:fld>
+            <a:endParaRPr lang="en-US"/>
+          </a:p>
+        </p:txBody>
+      </p:sp>
+    </p:spTree>
+    <p:extLst>
+      <p:ext uri="{BB962C8B-B14F-4D97-AF65-F5344CB8AC3E}">
+        <p14:creationId xmlns:p14="http://schemas.microsoft.com/office/powerpoint/2010/main" val="1024086991"/>
+      </p:ext>
+    </p:extLst>
+  </p:cSld>
+  <p:clrMapOvr>
+    <a:masterClrMapping/>
+  </p:clrMapOvr>
+</p:notes>
+</file>
+
+<file path=ppt/notesSlides/notesSlide52.xml><?xml version="1.0" encoding="utf-8"?>
+<p:notes xmlns:a="http://schemas.openxmlformats.org/drawingml/2006/main" xmlns:r="http://schemas.openxmlformats.org/officeDocument/2006/relationships" xmlns:p="http://schemas.openxmlformats.org/presentationml/2006/main">
+  <p:cSld>
+    <p:spTree>
+      <p:nvGrpSpPr>
+        <p:cNvPr id="1" name=""/>
+        <p:cNvGrpSpPr/>
+        <p:nvPr/>
+      </p:nvGrpSpPr>
+      <p:grpSpPr>
+        <a:xfrm>
+          <a:off x="0" y="0"/>
+          <a:ext cx="0" cy="0"/>
+          <a:chOff x="0" y="0"/>
+          <a:chExt cx="0" cy="0"/>
+        </a:xfrm>
+      </p:grpSpPr>
+      <p:sp>
+        <p:nvSpPr>
+          <p:cNvPr id="2" name="Slide Image Placeholder 1"/>
+          <p:cNvSpPr>
+            <a:spLocks noGrp="1" noRot="1" noChangeAspect="1"/>
+          </p:cNvSpPr>
+          <p:nvPr>
+            <p:ph type="sldImg"/>
+          </p:nvPr>
+        </p:nvSpPr>
+        <p:spPr/>
+      </p:sp>
+      <p:sp>
+        <p:nvSpPr>
+          <p:cNvPr id="3" name="Notes Placeholder 2"/>
+          <p:cNvSpPr>
+            <a:spLocks noGrp="1"/>
+          </p:cNvSpPr>
+          <p:nvPr>
+            <p:ph type="body" idx="1"/>
+          </p:nvPr>
+        </p:nvSpPr>
+        <p:spPr/>
+        <p:txBody>
+          <a:bodyPr/>
+          <a:lstStyle/>
+          <a:p>
+            <a:r>
+              <a:rPr lang="en-US" dirty="0"/>
+              <a:t>I complete the second page of the logbook: the matter taught, the evaluation, the homework and the attendance.</a:t>
+            </a:r>
+            <a:endParaRPr lang="en-US" dirty="0"/>
+          </a:p>
+        </p:txBody>
+      </p:sp>
+      <p:sp>
+        <p:nvSpPr>
+          <p:cNvPr id="4" name="Slide Number Placeholder 3"/>
+          <p:cNvSpPr>
+            <a:spLocks noGrp="1"/>
+          </p:cNvSpPr>
+          <p:nvPr>
+            <p:ph type="sldNum" sz="quarter" idx="10"/>
+          </p:nvPr>
+        </p:nvSpPr>
+        <p:spPr/>
+        <p:txBody>
+          <a:bodyPr/>
+          <a:lstStyle/>
+          <a:p>
+            <a:fld id="{F7021451-1387-4CA6-816F-3879F97B5CBC}" type="slidenum">
+              <a:rPr lang="en-US"/>
+              <a:t>52</a:t>
+            </a:fld>
+            <a:endParaRPr lang="en-US"/>
+          </a:p>
+        </p:txBody>
+      </p:sp>
+    </p:spTree>
+    <p:extLst>
+      <p:ext uri="{BB962C8B-B14F-4D97-AF65-F5344CB8AC3E}">
+        <p14:creationId xmlns:p14="http://schemas.microsoft.com/office/powerpoint/2010/main" val="1024086991"/>
+      </p:ext>
+    </p:extLst>
+  </p:cSld>
+  <p:clrMapOvr>
+    <a:masterClrMapping/>
+  </p:clrMapOvr>
+</p:notes>
+</file>
+
+<file path=ppt/notesSlides/notesSlide53.xml><?xml version="1.0" encoding="utf-8"?>
+<p:notes xmlns:a="http://schemas.openxmlformats.org/drawingml/2006/main" xmlns:r="http://schemas.openxmlformats.org/officeDocument/2006/relationships" xmlns:p="http://schemas.openxmlformats.org/presentationml/2006/main">
+  <p:cSld>
+    <p:spTree>
+      <p:nvGrpSpPr>
+        <p:cNvPr id="1" name=""/>
+        <p:cNvGrpSpPr/>
+        <p:nvPr/>
+      </p:nvGrpSpPr>
+      <p:grpSpPr>
+        <a:xfrm>
+          <a:off x="0" y="0"/>
+          <a:ext cx="0" cy="0"/>
+          <a:chOff x="0" y="0"/>
+          <a:chExt cx="0" cy="0"/>
+        </a:xfrm>
+      </p:grpSpPr>
+      <p:sp>
+        <p:nvSpPr>
+          <p:cNvPr id="2" name="Slide Image Placeholder 1"/>
+          <p:cNvSpPr>
+            <a:spLocks noGrp="1" noRot="1" noChangeAspect="1"/>
+          </p:cNvSpPr>
+          <p:nvPr>
+            <p:ph type="sldImg"/>
+          </p:nvPr>
+        </p:nvSpPr>
+        <p:spPr/>
+      </p:sp>
+      <p:sp>
+        <p:nvSpPr>
+          <p:cNvPr id="3" name="Notes Placeholder 2"/>
+          <p:cNvSpPr>
+            <a:spLocks noGrp="1"/>
+          </p:cNvSpPr>
+          <p:nvPr>
+            <p:ph type="body" idx="1"/>
+          </p:nvPr>
+        </p:nvSpPr>
+        <p:spPr/>
+        <p:txBody>
+          <a:bodyPr/>
+          <a:lstStyle/>
+          <a:p>
+            <a:r>
+              <a:rPr lang="en-US" dirty="0"/>
+              <a:t>This slide is for me, the teacher: it gives the timing of the lesson and what to do if the projector is not available.</a:t>
+            </a:r>
+            <a:endParaRPr lang="en-US" dirty="0"/>
+          </a:p>
+        </p:txBody>
+      </p:sp>
+      <p:sp>
+        <p:nvSpPr>
+          <p:cNvPr id="4" name="Slide Number Placeholder 3"/>
+          <p:cNvSpPr>
+            <a:spLocks noGrp="1"/>
+          </p:cNvSpPr>
+          <p:nvPr>
+            <p:ph type="sldNum" sz="quarter" idx="10"/>
+          </p:nvPr>
+        </p:nvSpPr>
+        <p:spPr/>
+        <p:txBody>
+          <a:bodyPr/>
+          <a:lstStyle/>
+          <a:p>
+            <a:fld id="{F7021451-1387-4CA6-816F-3879F97B5CBC}" type="slidenum">
+              <a:rPr lang="en-US"/>
+              <a:t>53</a:t>
+            </a:fld>
+            <a:endParaRPr lang="en-US"/>
+          </a:p>
+        </p:txBody>
+      </p:sp>
+    </p:spTree>
+    <p:extLst>
+      <p:ext uri="{BB962C8B-B14F-4D97-AF65-F5344CB8AC3E}">
+        <p14:creationId xmlns:p14="http://schemas.microsoft.com/office/powerpoint/2010/main" val="1024086991"/>
+      </p:ext>
+    </p:extLst>
+  </p:cSld>
+  <p:clrMapOvr>
+    <a:masterClrMapping/>
+  </p:clrMapOvr>
+</p:notes>
+</file>
+
+<file path=ppt/notesSlides/notesSlide54.xml><?xml version="1.0" encoding="utf-8"?>
+<p:notes xmlns:a="http://schemas.openxmlformats.org/drawingml/2006/main" xmlns:r="http://schemas.openxmlformats.org/officeDocument/2006/relationships" xmlns:p="http://schemas.openxmlformats.org/presentationml/2006/main">
+  <p:cSld>
+    <p:spTree>
+      <p:nvGrpSpPr>
+        <p:cNvPr id="1" name=""/>
+        <p:cNvGrpSpPr/>
+        <p:nvPr/>
+      </p:nvGrpSpPr>
+      <p:grpSpPr>
+        <a:xfrm>
+          <a:off x="0" y="0"/>
+          <a:ext cx="0" cy="0"/>
+          <a:chOff x="0" y="0"/>
+          <a:chExt cx="0" cy="0"/>
+        </a:xfrm>
+      </p:grpSpPr>
+      <p:sp>
+        <p:nvSpPr>
+          <p:cNvPr id="2" name="Slide Image Placeholder 1"/>
+          <p:cNvSpPr>
+            <a:spLocks noGrp="1" noRot="1" noChangeAspect="1"/>
+          </p:cNvSpPr>
+          <p:nvPr>
+            <p:ph type="sldImg"/>
+          </p:nvPr>
+        </p:nvSpPr>
+        <p:spPr/>
+      </p:sp>
+      <p:sp>
+        <p:nvSpPr>
+          <p:cNvPr id="3" name="Notes Placeholder 2"/>
+          <p:cNvSpPr>
+            <a:spLocks noGrp="1"/>
+          </p:cNvSpPr>
+          <p:nvPr>
+            <p:ph type="body" idx="1"/>
+          </p:nvPr>
+        </p:nvSpPr>
+        <p:spPr/>
+        <p:txBody>
+          <a:bodyPr/>
+          <a:lstStyle/>
+          <a:p>
+            <a:r>
+              <a:rPr lang="en-US" dirty="0"/>
+              <a:t>Take your time to copy this part; we will continue together.</a:t>
+            </a:r>
+            <a:endParaRPr lang="en-US" dirty="0"/>
+          </a:p>
+        </p:txBody>
+      </p:sp>
+      <p:sp>
+        <p:nvSpPr>
+          <p:cNvPr id="4" name="Slide Number Placeholder 3"/>
+          <p:cNvSpPr>
+            <a:spLocks noGrp="1"/>
+          </p:cNvSpPr>
+          <p:nvPr>
+            <p:ph type="sldNum" sz="quarter" idx="10"/>
+          </p:nvPr>
+        </p:nvSpPr>
+        <p:spPr/>
+        <p:txBody>
+          <a:bodyPr/>
+          <a:lstStyle/>
+          <a:p>
+            <a:fld id="{F7021451-1387-4CA6-816F-3879F97B5CBC}" type="slidenum">
+              <a:rPr lang="en-US"/>
+              <a:t>54</a:t>
+            </a:fld>
+            <a:endParaRPr lang="en-US"/>
+          </a:p>
+        </p:txBody>
+      </p:sp>
+    </p:spTree>
+    <p:extLst>
+      <p:ext uri="{BB962C8B-B14F-4D97-AF65-F5344CB8AC3E}">
+        <p14:creationId xmlns:p14="http://schemas.microsoft.com/office/powerpoint/2010/main" val="1024086991"/>
+      </p:ext>
+    </p:extLst>
+  </p:cSld>
+  <p:clrMapOvr>
+    <a:masterClrMapping/>
+  </p:clrMapOvr>
+</p:notes>
+</file>
+
+<file path=ppt/notesSlides/notesSlide55.xml><?xml version="1.0" encoding="utf-8"?>
+<p:notes xmlns:a="http://schemas.openxmlformats.org/drawingml/2006/main" xmlns:r="http://schemas.openxmlformats.org/officeDocument/2006/relationships" xmlns:p="http://schemas.openxmlformats.org/presentationml/2006/main">
+  <p:cSld>
+    <p:spTree>
+      <p:nvGrpSpPr>
+        <p:cNvPr id="1" name=""/>
+        <p:cNvGrpSpPr/>
+        <p:nvPr/>
+      </p:nvGrpSpPr>
+      <p:grpSpPr>
+        <a:xfrm>
+          <a:off x="0" y="0"/>
+          <a:ext cx="0" cy="0"/>
+          <a:chOff x="0" y="0"/>
+          <a:chExt cx="0" cy="0"/>
+        </a:xfrm>
+      </p:grpSpPr>
+      <p:sp>
+        <p:nvSpPr>
+          <p:cNvPr id="2" name="Slide Image Placeholder 1"/>
+          <p:cNvSpPr>
+            <a:spLocks noGrp="1" noRot="1" noChangeAspect="1"/>
+          </p:cNvSpPr>
+          <p:nvPr>
+            <p:ph type="sldImg"/>
+          </p:nvPr>
+        </p:nvSpPr>
+        <p:spPr/>
+      </p:sp>
+      <p:sp>
+        <p:nvSpPr>
+          <p:cNvPr id="3" name="Notes Placeholder 2"/>
+          <p:cNvSpPr>
+            <a:spLocks noGrp="1"/>
+          </p:cNvSpPr>
+          <p:nvPr>
+            <p:ph type="body" idx="1"/>
+          </p:nvPr>
+        </p:nvSpPr>
+        <p:spPr/>
+        <p:txBody>
+          <a:bodyPr/>
+          <a:lstStyle/>
+          <a:p>
+            <a:r>
+              <a:rPr lang="en-US" dirty="0"/>
+              <a:t>These are the references and picture credits used to prepare this lesson.</a:t>
+            </a:r>
+            <a:endParaRPr lang="en-US" dirty="0"/>
+          </a:p>
+        </p:txBody>
+      </p:sp>
+      <p:sp>
+        <p:nvSpPr>
+          <p:cNvPr id="4" name="Slide Number Placeholder 3"/>
+          <p:cNvSpPr>
+            <a:spLocks noGrp="1"/>
+          </p:cNvSpPr>
+          <p:nvPr>
+            <p:ph type="sldNum" sz="quarter" idx="10"/>
+          </p:nvPr>
+        </p:nvSpPr>
+        <p:spPr/>
+        <p:txBody>
+          <a:bodyPr/>
+          <a:lstStyle/>
+          <a:p>
+            <a:fld id="{F7021451-1387-4CA6-816F-3879F97B5CBC}" type="slidenum">
+              <a:rPr lang="en-US"/>
+              <a:t>55</a:t>
+            </a:fld>
+            <a:endParaRPr lang="en-US"/>
+          </a:p>
+        </p:txBody>
+      </p:sp>
+    </p:spTree>
+    <p:extLst>
+      <p:ext uri="{BB962C8B-B14F-4D97-AF65-F5344CB8AC3E}">
+        <p14:creationId xmlns:p14="http://schemas.microsoft.com/office/powerpoint/2010/main" val="1024086991"/>
+      </p:ext>
+    </p:extLst>
+  </p:cSld>
+  <p:clrMapOvr>
+    <a:masterClrMapping/>
+  </p:clrMapOvr>
+</p:notes>
+</file>
+
 <file path=ppt/notesSlides/notesSlide6.xml><?xml version="1.0" encoding="utf-8"?>
 <p:notes xmlns:a="http://schemas.openxmlformats.org/drawingml/2006/main" xmlns:r="http://schemas.openxmlformats.org/officeDocument/2006/relationships" xmlns:p="http://schemas.openxmlformats.org/presentationml/2006/main">
   <p:cSld>
@@ -4419,7 +5220,7 @@
           <a:p>
             <a:r>
               <a:rPr lang="en-US" dirty="0"/>
-              <a:t>By the end of this lesson, you should be able to do three things. Number 1: define a rock. Number 2: classify rocks according to their origin. Number 3: give the characteristics and examples of each type of rock. Number 4: draw the rock cycle.</a:t>
+              <a:t>By the end of this lesson, you should be able to do four things. Number 1: define a rock. Number 2: classify rocks according to their origin. Number 3: give the characteristics and examples of each type of rock. Number 4: draw the rock cycle.</a:t>
             </a:r>
             <a:endParaRPr lang="en-US" dirty="0"/>
           </a:p>
@@ -5887,7 +6688,7 @@
         <p:spPr>
           <a:xfrm>
             <a:off x="0" y="658368"/>
-            <a:ext cx="5120640" cy="5833872"/>
+            <a:ext cx="2468880" cy="5833872"/>
           </a:xfrm>
           <a:prstGeom prst="rect">
             <a:avLst/>
@@ -5902,8 +6703,8 @@
         </p:nvSpPr>
         <p:spPr>
           <a:xfrm>
-            <a:off x="5349240" y="1005840"/>
-            <a:ext cx="6522415" cy="731520"/>
+            <a:off x="2697480" y="1005840"/>
+            <a:ext cx="9174175" cy="731520"/>
           </a:xfrm>
           <a:prstGeom prst="rect">
             <a:avLst/>
@@ -5943,8 +6744,8 @@
         </p:nvSpPr>
         <p:spPr>
           <a:xfrm>
-            <a:off x="5349240" y="1783080"/>
-            <a:ext cx="6522415" cy="4663440"/>
+            <a:off x="2697480" y="1783080"/>
+            <a:ext cx="9174175" cy="4663440"/>
           </a:xfrm>
           <a:prstGeom prst="rect">
             <a:avLst/>
@@ -5971,7 +6772,7 @@
                 <a:ea typeface="Times New Roman" pitchFamily="34" charset="-122"/>
                 <a:cs typeface="Times New Roman" pitchFamily="34" charset="-120"/>
               </a:rPr>
-              <a:t>In Garoua, a new mosque is built on hard grey stones with small crystals. Some walls are made of blocks with thin layers. Kadidja wonders why the stones are different.</a:t>
+              <a:t>In Garoua, a new mosque is built on hard grey stones with small crystals, while some walls are made of blocks with thin layers, and the floor is covered with shiny marble. Kadidja asks: "Why are these stones so different, and how were they formed?"</a:t>
             </a:r>
             <a:endParaRPr lang="en-US" sz="4000" dirty="0"/>
           </a:p>
@@ -6409,7 +7210,7 @@
                 <a:ea typeface="Times New Roman" pitchFamily="34" charset="-122"/>
                 <a:cs typeface="Times New Roman" pitchFamily="34" charset="-120"/>
               </a:rPr>
-              <a:t>Kadidja does not know why rocks are different.</a:t>
+              <a:t>Kadidja does not know why rocks are different and how they were formed.</a:t>
             </a:r>
             <a:endParaRPr lang="en-US" sz="4000" dirty="0"/>
           </a:p>
@@ -6628,7 +7429,7 @@
                 <a:ea typeface="Times New Roman" pitchFamily="34" charset="-122"/>
                 <a:cs typeface="Times New Roman" pitchFamily="34" charset="-120"/>
               </a:rPr>
-              <a:t>Describe the two kinds of stones.</a:t>
+              <a:t>Describe two kinds of stones in the situation.</a:t>
             </a:r>
             <a:endParaRPr lang="en-US" sz="4000" dirty="0"/>
           </a:p>
@@ -6847,7 +7648,7 @@
                 <a:ea typeface="Times New Roman" pitchFamily="34" charset="-122"/>
                 <a:cs typeface="Times New Roman" pitchFamily="34" charset="-120"/>
               </a:rPr>
-              <a:t>Hard grey stones with crystals, and stones with layers.</a:t>
+              <a:t>Hard grey stones with crystals, and blocks with thin layers.</a:t>
             </a:r>
             <a:endParaRPr lang="en-US" sz="4000" dirty="0"/>
           </a:p>
@@ -7285,7 +8086,7 @@
                 <a:ea typeface="Times New Roman" pitchFamily="34" charset="-122"/>
                 <a:cs typeface="Times New Roman" pitchFamily="34" charset="-120"/>
               </a:rPr>
-              <a:t>By the way they were formed: igneous, sedimentary, metamorphic.</a:t>
+              <a:t>By their origin: igneous, sedimentary and metamorphic rocks.</a:t>
             </a:r>
             <a:endParaRPr lang="en-US" sz="4000" dirty="0"/>
           </a:p>
@@ -7835,7 +8636,7 @@
                 <a:ea typeface="Calibri" pitchFamily="34" charset="-122"/>
                 <a:cs typeface="Calibri" pitchFamily="34" charset="-120"/>
               </a:rPr>
-              <a:t>2. IGNEOUS ROCKS</a:t>
+              <a:t>1. IGNEOUS ROCKS</a:t>
             </a:r>
             <a:endParaRPr lang="en-US" sz="1400" dirty="0"/>
           </a:p>
@@ -8644,7 +9445,7 @@
                 <a:ea typeface="Calibri" pitchFamily="34" charset="-122"/>
                 <a:cs typeface="Calibri" pitchFamily="34" charset="-120"/>
               </a:rPr>
-              <a:t>2. IGNEOUS ROCKS</a:t>
+              <a:t>1. IGNEOUS ROCKS</a:t>
             </a:r>
             <a:endParaRPr lang="en-US" sz="1400" dirty="0"/>
           </a:p>
@@ -8863,7 +9664,7 @@
                 <a:ea typeface="Calibri" pitchFamily="34" charset="-122"/>
                 <a:cs typeface="Calibri" pitchFamily="34" charset="-120"/>
               </a:rPr>
-              <a:t>2. IGNEOUS ROCKS</a:t>
+              <a:t>1. IGNEOUS ROCKS</a:t>
             </a:r>
             <a:endParaRPr lang="en-US" sz="1400" dirty="0"/>
           </a:p>
@@ -8970,7 +9771,7 @@
                 <a:ea typeface="Times New Roman" pitchFamily="34" charset="-122"/>
                 <a:cs typeface="Times New Roman" pitchFamily="34" charset="-120"/>
               </a:rPr>
-              <a:t>Hot magma cooled and became hard. It is an igneous rock.</a:t>
+              <a:t>Hot magma cooled slowly and became hard: it is an igneous rock.</a:t>
             </a:r>
             <a:endParaRPr lang="en-US" sz="4000" dirty="0"/>
           </a:p>
@@ -9082,7 +9883,7 @@
                 <a:ea typeface="Calibri" pitchFamily="34" charset="-122"/>
                 <a:cs typeface="Calibri" pitchFamily="34" charset="-120"/>
               </a:rPr>
-              <a:t>2. SEDIMENTARY ROCKS</a:t>
+              <a:t>1. SEDIMENTARY ROCKS</a:t>
             </a:r>
             <a:endParaRPr lang="en-US" sz="1400" dirty="0"/>
           </a:p>
@@ -9296,7 +10097,7 @@
                 <a:ea typeface="Calibri" pitchFamily="34" charset="-122"/>
                 <a:cs typeface="Calibri" pitchFamily="34" charset="-120"/>
               </a:rPr>
-              <a:t>2. SEDIMENTARY ROCKS</a:t>
+              <a:t>1. SEDIMENTARY ROCKS</a:t>
             </a:r>
             <a:endParaRPr lang="en-US" sz="1400" dirty="0"/>
           </a:p>
@@ -9515,7 +10316,7 @@
                 <a:ea typeface="Calibri" pitchFamily="34" charset="-122"/>
                 <a:cs typeface="Calibri" pitchFamily="34" charset="-120"/>
               </a:rPr>
-              <a:t>2. SEDIMENTARY ROCKS</a:t>
+              <a:t>1. SEDIMENTARY ROCKS</a:t>
             </a:r>
             <a:endParaRPr lang="en-US" sz="1400" dirty="0"/>
           </a:p>
@@ -9622,7 +10423,7 @@
                 <a:ea typeface="Times New Roman" pitchFamily="34" charset="-122"/>
                 <a:cs typeface="Times New Roman" pitchFamily="34" charset="-120"/>
               </a:rPr>
-              <a:t>Layers of sand and mud were pressed together. It is a sedimentary rock.</a:t>
+              <a:t>Layers of sand and mud were pressed together: it is a sedimentary rock.</a:t>
             </a:r>
             <a:endParaRPr lang="en-US" sz="4000" dirty="0"/>
           </a:p>
@@ -9734,7 +10535,7 @@
                 <a:ea typeface="Calibri" pitchFamily="34" charset="-122"/>
                 <a:cs typeface="Calibri" pitchFamily="34" charset="-120"/>
               </a:rPr>
-              <a:t>2. METAMORPHIC ROCKS</a:t>
+              <a:t>1. METAMORPHIC ROCKS</a:t>
             </a:r>
             <a:endParaRPr lang="en-US" sz="1400" dirty="0"/>
           </a:p>
@@ -9948,7 +10749,7 @@
                 <a:ea typeface="Calibri" pitchFamily="34" charset="-122"/>
                 <a:cs typeface="Calibri" pitchFamily="34" charset="-120"/>
               </a:rPr>
-              <a:t>2. METAMORPHIC ROCKS</a:t>
+              <a:t>1. METAMORPHIC ROCKS</a:t>
             </a:r>
             <a:endParaRPr lang="en-US" sz="1400" dirty="0"/>
           </a:p>
@@ -10055,7 +10856,7 @@
                 <a:ea typeface="Times New Roman" pitchFamily="34" charset="-122"/>
                 <a:cs typeface="Times New Roman" pitchFamily="34" charset="-120"/>
               </a:rPr>
-              <a:t>Marble was limestone. What changed it?</a:t>
+              <a:t>Marble was once limestone. What changed it?</a:t>
             </a:r>
             <a:endParaRPr lang="en-US" sz="4000" dirty="0"/>
           </a:p>
@@ -10167,7 +10968,7 @@
                 <a:ea typeface="Calibri" pitchFamily="34" charset="-122"/>
                 <a:cs typeface="Calibri" pitchFamily="34" charset="-120"/>
               </a:rPr>
-              <a:t>2. METAMORPHIC ROCKS</a:t>
+              <a:t>1. METAMORPHIC ROCKS</a:t>
             </a:r>
             <a:endParaRPr lang="en-US" sz="1400" dirty="0"/>
           </a:p>
@@ -10274,7 +11075,7 @@
                 <a:ea typeface="Times New Roman" pitchFamily="34" charset="-122"/>
                 <a:cs typeface="Times New Roman" pitchFamily="34" charset="-120"/>
               </a:rPr>
-              <a:t>Great heat and pressure. It is a metamorphic rock.</a:t>
+              <a:t>Great heat and pressure: it is a metamorphic rock.</a:t>
             </a:r>
             <a:endParaRPr lang="en-US" sz="4000" dirty="0"/>
           </a:p>
@@ -10668,7 +11469,7 @@
         <p:spPr>
           <a:xfrm>
             <a:off x="0" y="658368"/>
-            <a:ext cx="5120640" cy="5833872"/>
+            <a:ext cx="2468880" cy="5833872"/>
           </a:xfrm>
           <a:prstGeom prst="rect">
             <a:avLst/>
@@ -10683,8 +11484,8 @@
         </p:nvSpPr>
         <p:spPr>
           <a:xfrm>
-            <a:off x="5349240" y="1005840"/>
-            <a:ext cx="6522415" cy="731520"/>
+            <a:off x="2697480" y="1005840"/>
+            <a:ext cx="9174175" cy="731520"/>
           </a:xfrm>
           <a:prstGeom prst="rect">
             <a:avLst/>
@@ -10724,8 +11525,8 @@
         </p:nvSpPr>
         <p:spPr>
           <a:xfrm>
-            <a:off x="5349240" y="1783080"/>
-            <a:ext cx="6522415" cy="4663440"/>
+            <a:off x="2697480" y="1783080"/>
+            <a:ext cx="9174175" cy="4663440"/>
           </a:xfrm>
           <a:prstGeom prst="rect">
             <a:avLst/>
@@ -10789,7 +11590,7 @@
                 <a:ea typeface="Times New Roman" pitchFamily="34" charset="-122"/>
                 <a:cs typeface="Times New Roman" pitchFamily="34" charset="-120"/>
               </a:rPr>
-              <a:t>It is a hard, natural material that makes up the crust of the Earth.</a:t>
+              <a:t>It is a hard, natural material made of one or more minerals, which forms the crust of the Earth.</a:t>
             </a:r>
             <a:endParaRPr lang="en-US" sz="4000" dirty="0"/>
           </a:p>
@@ -12012,7 +12813,7 @@
                 <a:ea typeface="Times New Roman" pitchFamily="34" charset="-122"/>
                 <a:cs typeface="Times New Roman" pitchFamily="34" charset="-120"/>
               </a:rPr>
-              <a:t>1. Classification of Rocks</a:t>
+              <a:t>DEFINITIONS (continued)</a:t>
             </a:r>
             <a:endParaRPr lang="en-US" sz="3600" dirty="0"/>
           </a:p>
@@ -12046,7 +12847,7 @@
               <a:buNone/>
             </a:pPr>
             <a:r>
-              <a:rPr lang="en-US" sz="4000" i="1" dirty="0">
+              <a:rPr lang="en-US" sz="4000" b="1" dirty="0">
                 <a:solidFill>
                   <a:srgbClr val="111111"/>
                 </a:solidFill>
@@ -12054,11 +12855,8 @@
                 <a:ea typeface="Times New Roman" pitchFamily="34" charset="-122"/>
                 <a:cs typeface="Times New Roman" pitchFamily="34" charset="-120"/>
               </a:rPr>
-              <a:t>Rocks are classified according to their origin as follows:</a:t>
-            </a:r>
-            <a:endParaRPr lang="en-US" sz="4000" dirty="0"/>
-          </a:p>
-          <a:p>
+              <a:t>Sediments: </a:t>
+            </a:r>
             <a:pPr algn="l" indent="0" marL="0">
               <a:spcAft>
                 <a:spcPts val="800"/>
@@ -12066,7 +12864,7 @@
               <a:buNone/>
             </a:pPr>
             <a:r>
-              <a:rPr lang="en-US" sz="4000" b="1" dirty="0">
+              <a:rPr lang="en-US" sz="4000" dirty="0">
                 <a:solidFill>
                   <a:srgbClr val="111111"/>
                 </a:solidFill>
@@ -12074,24 +12872,7 @@
                 <a:ea typeface="Times New Roman" pitchFamily="34" charset="-122"/>
                 <a:cs typeface="Times New Roman" pitchFamily="34" charset="-120"/>
               </a:rPr>
-              <a:t>Igneous rocks: </a:t>
-            </a:r>
-            <a:pPr algn="l" indent="0" marL="0">
-              <a:spcAft>
-                <a:spcPts val="800"/>
-              </a:spcAft>
-              <a:buNone/>
-            </a:pPr>
-            <a:r>
-              <a:rPr lang="en-US" sz="4000" dirty="0">
-                <a:solidFill>
-                  <a:srgbClr val="111111"/>
-                </a:solidFill>
-                <a:latin typeface="Times New Roman" pitchFamily="34" charset="0"/>
-                <a:ea typeface="Times New Roman" pitchFamily="34" charset="-122"/>
-                <a:cs typeface="Times New Roman" pitchFamily="34" charset="-120"/>
-              </a:rPr>
-              <a:t>They are formed when magma or lava cools and hardens, like granite and basalt.</a:t>
+              <a:t>They are small pieces of rock, sand, mud and remains of living things laid down by water, wind or ice.</a:t>
             </a:r>
             <a:endParaRPr lang="en-US" sz="4000" dirty="0"/>
           </a:p>
@@ -12209,9 +12990,170 @@
           </a:p>
         </p:txBody>
       </p:sp>
+      <p:sp>
+        <p:nvSpPr>
+          <p:cNvPr id="3" name="Text 1"/>
+          <p:cNvSpPr/>
+          <p:nvPr/>
+        </p:nvSpPr>
+        <p:spPr>
+          <a:xfrm>
+            <a:off x="365760" y="1005840"/>
+            <a:ext cx="11460175" cy="731520"/>
+          </a:xfrm>
+          <a:prstGeom prst="rect">
+            <a:avLst/>
+          </a:prstGeom>
+          <a:noFill/>
+          <a:ln/>
+        </p:spPr>
+        <p:txBody>
+          <a:bodyPr wrap="square" lIns="0" tIns="0" rIns="0" bIns="0" rtlCol="0" anchor="ctr">
+            <a:normAutofit/>
+          </a:bodyPr>
+          <a:lstStyle/>
+          <a:p>
+            <a:pPr algn="ctr" indent="0" marL="0">
+              <a:buNone/>
+            </a:pPr>
+            <a:r>
+              <a:rPr lang="en-US" sz="3600" b="1" dirty="0">
+                <a:solidFill>
+                  <a:srgbClr val="990011"/>
+                </a:solidFill>
+                <a:latin typeface="Times New Roman" pitchFamily="34" charset="0"/>
+                <a:ea typeface="Times New Roman" pitchFamily="34" charset="-122"/>
+                <a:cs typeface="Times New Roman" pitchFamily="34" charset="-120"/>
+              </a:rPr>
+              <a:t>1. Classification of Rocks according to Origin</a:t>
+            </a:r>
+            <a:endParaRPr lang="en-US" sz="3600" dirty="0"/>
+          </a:p>
+        </p:txBody>
+      </p:sp>
+      <p:sp>
+        <p:nvSpPr>
+          <p:cNvPr id="4" name="Text 2"/>
+          <p:cNvSpPr/>
+          <p:nvPr/>
+        </p:nvSpPr>
+        <p:spPr>
+          <a:xfrm>
+            <a:off x="365760" y="1737360"/>
+            <a:ext cx="5120640" cy="457200"/>
+          </a:xfrm>
+          <a:prstGeom prst="rect">
+            <a:avLst/>
+          </a:prstGeom>
+          <a:noFill/>
+          <a:ln/>
+        </p:spPr>
+        <p:txBody>
+          <a:bodyPr wrap="square" lIns="0" tIns="0" rIns="0" bIns="0" rtlCol="0" anchor="ctr">
+            <a:normAutofit/>
+          </a:bodyPr>
+          <a:lstStyle/>
+          <a:p>
+            <a:pPr algn="l" indent="0" marL="0">
+              <a:buNone/>
+            </a:pPr>
+            <a:r>
+              <a:rPr lang="en-US" sz="3000" b="1" dirty="0">
+                <a:solidFill>
+                  <a:srgbClr val="990011"/>
+                </a:solidFill>
+                <a:latin typeface="Times New Roman" pitchFamily="34" charset="0"/>
+                <a:ea typeface="Times New Roman" pitchFamily="34" charset="-122"/>
+                <a:cs typeface="Times New Roman" pitchFamily="34" charset="-120"/>
+              </a:rPr>
+              <a:t>A) Igneous Rocks</a:t>
+            </a:r>
+            <a:endParaRPr lang="en-US" sz="3000" dirty="0"/>
+          </a:p>
+        </p:txBody>
+      </p:sp>
+      <p:sp>
+        <p:nvSpPr>
+          <p:cNvPr id="5" name="Text 3"/>
+          <p:cNvSpPr/>
+          <p:nvPr/>
+        </p:nvSpPr>
+        <p:spPr>
+          <a:xfrm>
+            <a:off x="365760" y="2240280"/>
+            <a:ext cx="4846320" cy="4160520"/>
+          </a:xfrm>
+          <a:prstGeom prst="rect">
+            <a:avLst/>
+          </a:prstGeom>
+          <a:noFill/>
+          <a:ln/>
+        </p:spPr>
+        <p:txBody>
+          <a:bodyPr wrap="square" lIns="0" tIns="0" rIns="0" bIns="0" rtlCol="0" anchor="t"/>
+          <a:lstStyle/>
+          <a:p>
+            <a:pPr algn="l" indent="0" marL="0">
+              <a:spcAft>
+                <a:spcPts val="800"/>
+              </a:spcAft>
+              <a:buNone/>
+            </a:pPr>
+            <a:r>
+              <a:rPr lang="en-US" sz="3600" i="1" dirty="0">
+                <a:solidFill>
+                  <a:srgbClr val="111111"/>
+                </a:solidFill>
+                <a:latin typeface="Times New Roman" pitchFamily="34" charset="0"/>
+                <a:ea typeface="Times New Roman" pitchFamily="34" charset="-122"/>
+                <a:cs typeface="Times New Roman" pitchFamily="34" charset="-120"/>
+              </a:rPr>
+              <a:t>Igneous rocks have the following characteristics and examples:</a:t>
+            </a:r>
+            <a:endParaRPr lang="en-US" sz="3600" dirty="0"/>
+          </a:p>
+          <a:p>
+            <a:pPr algn="l" indent="0" marL="0">
+              <a:spcAft>
+                <a:spcPts val="800"/>
+              </a:spcAft>
+              <a:buNone/>
+            </a:pPr>
+            <a:r>
+              <a:rPr lang="en-US" sz="3600" b="1" dirty="0">
+                <a:solidFill>
+                  <a:srgbClr val="111111"/>
+                </a:solidFill>
+                <a:latin typeface="Times New Roman" pitchFamily="34" charset="0"/>
+                <a:ea typeface="Times New Roman" pitchFamily="34" charset="-122"/>
+                <a:cs typeface="Times New Roman" pitchFamily="34" charset="-120"/>
+              </a:rPr>
+              <a:t>Formation: </a:t>
+            </a:r>
+            <a:pPr algn="l" indent="0" marL="0">
+              <a:spcAft>
+                <a:spcPts val="800"/>
+              </a:spcAft>
+              <a:buNone/>
+            </a:pPr>
+            <a:r>
+              <a:rPr lang="en-US" sz="3600" dirty="0">
+                <a:solidFill>
+                  <a:srgbClr val="111111"/>
+                </a:solidFill>
+                <a:latin typeface="Times New Roman" pitchFamily="34" charset="0"/>
+                <a:ea typeface="Times New Roman" pitchFamily="34" charset="-122"/>
+                <a:cs typeface="Times New Roman" pitchFamily="34" charset="-120"/>
+              </a:rPr>
+              <a:t>They are formed when magma or lava cools and hardens.</a:t>
+            </a:r>
+            <a:endParaRPr lang="en-US" sz="3600" dirty="0"/>
+          </a:p>
+        </p:txBody>
+      </p:sp>
       <p:pic>
         <p:nvPicPr>
-          <p:cNvPr id="3" name="Image 0" descr="/home/claude/f4/img/minesec_sheet.png">    </p:cNvPr>
+          <p:cNvPr id="6" name="Image 0" descr="/home/claude/f4/img/v2/f4_granite.jpg">    </p:cNvPr>
           <p:cNvPicPr>
             <a:picLocks noChangeAspect="1"/>
           </p:cNvPicPr>
@@ -12225,8 +13167,8 @@
         </p:blipFill>
         <p:spPr>
           <a:xfrm>
-            <a:off x="0" y="658368"/>
-            <a:ext cx="2468880" cy="5833872"/>
+            <a:off x="5349240" y="2071212"/>
+            <a:ext cx="6659575" cy="3693983"/>
           </a:xfrm>
           <a:prstGeom prst="rect">
             <a:avLst/>
@@ -12235,14 +13177,14 @@
       </p:pic>
       <p:sp>
         <p:nvSpPr>
-          <p:cNvPr id="4" name="Text 1"/>
+          <p:cNvPr id="7" name="Text 4"/>
           <p:cNvSpPr/>
           <p:nvPr/>
         </p:nvSpPr>
         <p:spPr>
           <a:xfrm>
-            <a:off x="2697480" y="1005840"/>
-            <a:ext cx="9174175" cy="731520"/>
+            <a:off x="5349240" y="6089904"/>
+            <a:ext cx="6659575" cy="347472"/>
           </a:xfrm>
           <a:prstGeom prst="rect">
             <a:avLst/>
@@ -12251,122 +13193,24 @@
           <a:ln/>
         </p:spPr>
         <p:txBody>
-          <a:bodyPr wrap="square" lIns="0" tIns="0" rIns="0" bIns="0" rtlCol="0" anchor="ctr">
-            <a:normAutofit/>
-          </a:bodyPr>
+          <a:bodyPr wrap="square" lIns="0" tIns="0" rIns="0" bIns="0" rtlCol="0" anchor="ctr"/>
           <a:lstStyle/>
           <a:p>
             <a:pPr algn="ctr" indent="0" marL="0">
               <a:buNone/>
             </a:pPr>
             <a:r>
-              <a:rPr lang="en-US" sz="3600" b="1" dirty="0">
-                <a:solidFill>
-                  <a:srgbClr val="990011"/>
+              <a:rPr lang="en-US" sz="1600" i="1" dirty="0">
+                <a:solidFill>
+                  <a:srgbClr val="555555"/>
                 </a:solidFill>
                 <a:latin typeface="Times New Roman" pitchFamily="34" charset="0"/>
                 <a:ea typeface="Times New Roman" pitchFamily="34" charset="-122"/>
                 <a:cs typeface="Times New Roman" pitchFamily="34" charset="-120"/>
               </a:rPr>
-              <a:t>1. Classification of Rocks (continued)</a:t>
-            </a:r>
-            <a:endParaRPr lang="en-US" sz="3600" dirty="0"/>
-          </a:p>
-        </p:txBody>
-      </p:sp>
-      <p:sp>
-        <p:nvSpPr>
-          <p:cNvPr id="5" name="Text 2"/>
-          <p:cNvSpPr/>
-          <p:nvPr/>
-        </p:nvSpPr>
-        <p:spPr>
-          <a:xfrm>
-            <a:off x="2697480" y="1783080"/>
-            <a:ext cx="9174175" cy="4663440"/>
-          </a:xfrm>
-          <a:prstGeom prst="rect">
-            <a:avLst/>
-          </a:prstGeom>
-          <a:noFill/>
-          <a:ln/>
-        </p:spPr>
-        <p:txBody>
-          <a:bodyPr wrap="square" lIns="0" tIns="0" rIns="0" bIns="0" rtlCol="0" anchor="t"/>
-          <a:lstStyle/>
-          <a:p>
-            <a:pPr algn="l" indent="0" marL="0">
-              <a:spcAft>
-                <a:spcPts val="800"/>
-              </a:spcAft>
-              <a:buNone/>
-            </a:pPr>
-            <a:r>
-              <a:rPr lang="en-US" sz="4000" b="1" dirty="0">
-                <a:solidFill>
-                  <a:srgbClr val="111111"/>
-                </a:solidFill>
-                <a:latin typeface="Times New Roman" pitchFamily="34" charset="0"/>
-                <a:ea typeface="Times New Roman" pitchFamily="34" charset="-122"/>
-                <a:cs typeface="Times New Roman" pitchFamily="34" charset="-120"/>
-              </a:rPr>
-              <a:t>Sedimentary rocks: </a:t>
-            </a:r>
-            <a:pPr algn="l" indent="0" marL="0">
-              <a:spcAft>
-                <a:spcPts val="800"/>
-              </a:spcAft>
-              <a:buNone/>
-            </a:pPr>
-            <a:r>
-              <a:rPr lang="en-US" sz="4000" dirty="0">
-                <a:solidFill>
-                  <a:srgbClr val="111111"/>
-                </a:solidFill>
-                <a:latin typeface="Times New Roman" pitchFamily="34" charset="0"/>
-                <a:ea typeface="Times New Roman" pitchFamily="34" charset="-122"/>
-                <a:cs typeface="Times New Roman" pitchFamily="34" charset="-120"/>
-              </a:rPr>
-              <a:t>They are formed from layers of sediments pressed together, like sandstone and limestone.</a:t>
-            </a:r>
-            <a:endParaRPr lang="en-US" sz="4000" dirty="0"/>
-          </a:p>
-          <a:p>
-            <a:pPr algn="l" indent="0" marL="0">
-              <a:spcAft>
-                <a:spcPts val="800"/>
-              </a:spcAft>
-              <a:buNone/>
-            </a:pPr>
-            <a:r>
-              <a:rPr lang="en-US" sz="4000" b="1" dirty="0">
-                <a:solidFill>
-                  <a:srgbClr val="111111"/>
-                </a:solidFill>
-                <a:latin typeface="Times New Roman" pitchFamily="34" charset="0"/>
-                <a:ea typeface="Times New Roman" pitchFamily="34" charset="-122"/>
-                <a:cs typeface="Times New Roman" pitchFamily="34" charset="-120"/>
-              </a:rPr>
-              <a:t>Metamorphic rocks: </a:t>
-            </a:r>
-            <a:pPr algn="l" indent="0" marL="0">
-              <a:spcAft>
-                <a:spcPts val="800"/>
-              </a:spcAft>
-              <a:buNone/>
-            </a:pPr>
-            <a:r>
-              <a:rPr lang="en-US" sz="4000" dirty="0">
-                <a:solidFill>
-                  <a:srgbClr val="111111"/>
-                </a:solidFill>
-                <a:latin typeface="Times New Roman" pitchFamily="34" charset="0"/>
-                <a:ea typeface="Times New Roman" pitchFamily="34" charset="-122"/>
-                <a:cs typeface="Times New Roman" pitchFamily="34" charset="-120"/>
-              </a:rPr>
-              <a:t>They are formed when other rocks are changed by heat and pressure, like marble and slate.</a:t>
-            </a:r>
-            <a:endParaRPr lang="en-US" sz="4000" dirty="0"/>
+              <a:t>Illustration: granite, an igneous rock</a:t>
+            </a:r>
+            <a:endParaRPr lang="en-US" sz="1600" dirty="0"/>
           </a:p>
         </p:txBody>
       </p:sp>
@@ -12499,7 +13343,7 @@
         <p:spPr>
           <a:xfrm>
             <a:off x="0" y="658368"/>
-            <a:ext cx="5120640" cy="5833872"/>
+            <a:ext cx="3840480" cy="5833872"/>
           </a:xfrm>
           <a:prstGeom prst="rect">
             <a:avLst/>
@@ -12514,8 +13358,8 @@
         </p:nvSpPr>
         <p:spPr>
           <a:xfrm>
-            <a:off x="5349240" y="1005840"/>
-            <a:ext cx="6522415" cy="731520"/>
+            <a:off x="4069080" y="1005840"/>
+            <a:ext cx="7802575" cy="731520"/>
           </a:xfrm>
           <a:prstGeom prst="rect">
             <a:avLst/>
@@ -12541,7 +13385,7 @@
                 <a:ea typeface="Times New Roman" pitchFamily="34" charset="-122"/>
                 <a:cs typeface="Times New Roman" pitchFamily="34" charset="-120"/>
               </a:rPr>
-              <a:t>1. Classification of Rocks (continued)</a:t>
+              <a:t>1. Classification of Rocks according to Origin</a:t>
             </a:r>
             <a:endParaRPr lang="en-US" sz="3600" dirty="0"/>
           </a:p>
@@ -12555,8 +13399,47 @@
         </p:nvSpPr>
         <p:spPr>
           <a:xfrm>
-            <a:off x="5349240" y="1783080"/>
-            <a:ext cx="6522415" cy="4663440"/>
+            <a:off x="4069080" y="1737360"/>
+            <a:ext cx="7802575" cy="457200"/>
+          </a:xfrm>
+          <a:prstGeom prst="rect">
+            <a:avLst/>
+          </a:prstGeom>
+          <a:noFill/>
+          <a:ln/>
+        </p:spPr>
+        <p:txBody>
+          <a:bodyPr wrap="square" lIns="0" tIns="0" rIns="0" bIns="0" rtlCol="0" anchor="ctr"/>
+          <a:lstStyle/>
+          <a:p>
+            <a:pPr algn="l" indent="0" marL="0">
+              <a:buNone/>
+            </a:pPr>
+            <a:r>
+              <a:rPr lang="en-US" sz="3200" b="1" dirty="0">
+                <a:solidFill>
+                  <a:srgbClr val="990011"/>
+                </a:solidFill>
+                <a:latin typeface="Times New Roman" pitchFamily="34" charset="0"/>
+                <a:ea typeface="Times New Roman" pitchFamily="34" charset="-122"/>
+                <a:cs typeface="Times New Roman" pitchFamily="34" charset="-120"/>
+              </a:rPr>
+              <a:t>A) Igneous Rocks</a:t>
+            </a:r>
+            <a:endParaRPr lang="en-US" sz="3200" dirty="0"/>
+          </a:p>
+        </p:txBody>
+      </p:sp>
+      <p:sp>
+        <p:nvSpPr>
+          <p:cNvPr id="6" name="Text 3"/>
+          <p:cNvSpPr/>
+          <p:nvPr/>
+        </p:nvSpPr>
+        <p:spPr>
+          <a:xfrm>
+            <a:off x="4069080" y="2240280"/>
+            <a:ext cx="7802575" cy="4206240"/>
           </a:xfrm>
           <a:prstGeom prst="rect">
             <a:avLst/>
@@ -12583,7 +13466,7 @@
                 <a:ea typeface="Times New Roman" pitchFamily="34" charset="-122"/>
                 <a:cs typeface="Times New Roman" pitchFamily="34" charset="-120"/>
               </a:rPr>
-              <a:t>Fossils: </a:t>
+              <a:t>Crystals: </a:t>
             </a:r>
             <a:pPr algn="l" indent="0" marL="0">
               <a:spcAft>
@@ -12600,7 +13483,44 @@
                 <a:ea typeface="Times New Roman" pitchFamily="34" charset="-122"/>
                 <a:cs typeface="Times New Roman" pitchFamily="34" charset="-120"/>
               </a:rPr>
-              <a:t>They are marks of old plants or animals, and they are found in sedimentary rocks.</a:t>
+              <a:t>They are made of crystals, large when magma cools slowly underground and small when lava cools quickly.</a:t>
+            </a:r>
+            <a:endParaRPr lang="en-US" sz="4000" dirty="0"/>
+          </a:p>
+          <a:p>
+            <a:pPr algn="l" indent="0" marL="0">
+              <a:spcAft>
+                <a:spcPts val="800"/>
+              </a:spcAft>
+              <a:buNone/>
+            </a:pPr>
+            <a:r>
+              <a:rPr lang="en-US" sz="4000" b="1" dirty="0">
+                <a:solidFill>
+                  <a:srgbClr val="111111"/>
+                </a:solidFill>
+                <a:latin typeface="Times New Roman" pitchFamily="34" charset="0"/>
+                <a:ea typeface="Times New Roman" pitchFamily="34" charset="-122"/>
+                <a:cs typeface="Times New Roman" pitchFamily="34" charset="-120"/>
+              </a:rPr>
+              <a:t>Hardness: </a:t>
+            </a:r>
+            <a:pPr algn="l" indent="0" marL="0">
+              <a:spcAft>
+                <a:spcPts val="800"/>
+              </a:spcAft>
+              <a:buNone/>
+            </a:pPr>
+            <a:r>
+              <a:rPr lang="en-US" sz="4000" dirty="0">
+                <a:solidFill>
+                  <a:srgbClr val="111111"/>
+                </a:solidFill>
+                <a:latin typeface="Times New Roman" pitchFamily="34" charset="0"/>
+                <a:ea typeface="Times New Roman" pitchFamily="34" charset="-122"/>
+                <a:cs typeface="Times New Roman" pitchFamily="34" charset="-120"/>
+              </a:rPr>
+              <a:t>They are hard, have no layers and contain no fossils.</a:t>
             </a:r>
             <a:endParaRPr lang="en-US" sz="4000" dirty="0"/>
           </a:p>
@@ -12777,7 +13697,7 @@
                 <a:ea typeface="Times New Roman" pitchFamily="34" charset="-122"/>
                 <a:cs typeface="Times New Roman" pitchFamily="34" charset="-120"/>
               </a:rPr>
-              <a:t>2. The Rock Cycle</a:t>
+              <a:t>1. Classification of Rocks according to Origin</a:t>
             </a:r>
             <a:endParaRPr lang="en-US" sz="3600" dirty="0"/>
           </a:p>
@@ -12791,8 +13711,47 @@
         </p:nvSpPr>
         <p:spPr>
           <a:xfrm>
-            <a:off x="5349240" y="1783080"/>
-            <a:ext cx="6522415" cy="4663440"/>
+            <a:off x="5349240" y="1737360"/>
+            <a:ext cx="6522415" cy="457200"/>
+          </a:xfrm>
+          <a:prstGeom prst="rect">
+            <a:avLst/>
+          </a:prstGeom>
+          <a:noFill/>
+          <a:ln/>
+        </p:spPr>
+        <p:txBody>
+          <a:bodyPr wrap="square" lIns="0" tIns="0" rIns="0" bIns="0" rtlCol="0" anchor="ctr"/>
+          <a:lstStyle/>
+          <a:p>
+            <a:pPr algn="l" indent="0" marL="0">
+              <a:buNone/>
+            </a:pPr>
+            <a:r>
+              <a:rPr lang="en-US" sz="3200" b="1" dirty="0">
+                <a:solidFill>
+                  <a:srgbClr val="990011"/>
+                </a:solidFill>
+                <a:latin typeface="Times New Roman" pitchFamily="34" charset="0"/>
+                <a:ea typeface="Times New Roman" pitchFamily="34" charset="-122"/>
+                <a:cs typeface="Times New Roman" pitchFamily="34" charset="-120"/>
+              </a:rPr>
+              <a:t>A) Igneous Rocks (continued)</a:t>
+            </a:r>
+            <a:endParaRPr lang="en-US" sz="3200" dirty="0"/>
+          </a:p>
+        </p:txBody>
+      </p:sp>
+      <p:sp>
+        <p:nvSpPr>
+          <p:cNvPr id="6" name="Text 3"/>
+          <p:cNvSpPr/>
+          <p:nvPr/>
+        </p:nvSpPr>
+        <p:spPr>
+          <a:xfrm>
+            <a:off x="5349240" y="2240280"/>
+            <a:ext cx="6522415" cy="4206240"/>
           </a:xfrm>
           <a:prstGeom prst="rect">
             <a:avLst/>
@@ -12811,7 +13770,7 @@
               <a:buNone/>
             </a:pPr>
             <a:r>
-              <a:rPr lang="en-US" sz="4000" i="1" dirty="0">
+              <a:rPr lang="en-US" sz="4000" b="1" dirty="0">
                 <a:solidFill>
                   <a:srgbClr val="111111"/>
                 </a:solidFill>
@@ -12819,11 +13778,8 @@
                 <a:ea typeface="Times New Roman" pitchFamily="34" charset="-122"/>
                 <a:cs typeface="Times New Roman" pitchFamily="34" charset="-120"/>
               </a:rPr>
-              <a:t>The rock cycle is explained as follows:</a:t>
-            </a:r>
-            <a:endParaRPr lang="en-US" sz="4000" dirty="0"/>
-          </a:p>
-          <a:p>
+              <a:t>Intrusive examples: </a:t>
+            </a:r>
             <a:pPr algn="l" indent="0" marL="0">
               <a:spcAft>
                 <a:spcPts val="800"/>
@@ -12831,7 +13787,7 @@
               <a:buNone/>
             </a:pPr>
             <a:r>
-              <a:rPr lang="en-US" sz="4000" b="1" dirty="0">
+              <a:rPr lang="en-US" sz="4000" dirty="0">
                 <a:solidFill>
                   <a:srgbClr val="111111"/>
                 </a:solidFill>
@@ -12839,24 +13795,7 @@
                 <a:ea typeface="Times New Roman" pitchFamily="34" charset="-122"/>
                 <a:cs typeface="Times New Roman" pitchFamily="34" charset="-120"/>
               </a:rPr>
-              <a:t>Rock cycle: </a:t>
-            </a:r>
-            <a:pPr algn="l" indent="0" marL="0">
-              <a:spcAft>
-                <a:spcPts val="800"/>
-              </a:spcAft>
-              <a:buNone/>
-            </a:pPr>
-            <a:r>
-              <a:rPr lang="en-US" sz="4000" dirty="0">
-                <a:solidFill>
-                  <a:srgbClr val="111111"/>
-                </a:solidFill>
-                <a:latin typeface="Times New Roman" pitchFamily="34" charset="0"/>
-                <a:ea typeface="Times New Roman" pitchFamily="34" charset="-122"/>
-                <a:cs typeface="Times New Roman" pitchFamily="34" charset="-120"/>
-              </a:rPr>
-              <a:t>It is the process by which one type of rock slowly changes into another type.</a:t>
+              <a:t>Granite and gabbro cooled inside the crust.</a:t>
             </a:r>
             <a:endParaRPr lang="en-US" sz="4000" dirty="0"/>
           </a:p>
@@ -12982,8 +13921,8 @@
         </p:nvSpPr>
         <p:spPr>
           <a:xfrm>
-            <a:off x="457200" y="1005840"/>
-            <a:ext cx="11277295" cy="731520"/>
+            <a:off x="365760" y="1005840"/>
+            <a:ext cx="11460175" cy="731520"/>
           </a:xfrm>
           <a:prstGeom prst="rect">
             <a:avLst/>
@@ -12992,7 +13931,9 @@
           <a:ln/>
         </p:spPr>
         <p:txBody>
-          <a:bodyPr wrap="square" lIns="0" tIns="0" rIns="0" bIns="0" rtlCol="0" anchor="ctr"/>
+          <a:bodyPr wrap="square" lIns="0" tIns="0" rIns="0" bIns="0" rtlCol="0" anchor="ctr">
+            <a:normAutofit/>
+          </a:bodyPr>
           <a:lstStyle/>
           <a:p>
             <a:pPr algn="ctr" indent="0" marL="0">
@@ -13007,7 +13948,107 @@
                 <a:ea typeface="Times New Roman" pitchFamily="34" charset="-122"/>
                 <a:cs typeface="Times New Roman" pitchFamily="34" charset="-120"/>
               </a:rPr>
-              <a:t>2. The Rock Cycle</a:t>
+              <a:t>1. Classification of Rocks according to Origin</a:t>
+            </a:r>
+            <a:endParaRPr lang="en-US" sz="3600" dirty="0"/>
+          </a:p>
+        </p:txBody>
+      </p:sp>
+      <p:sp>
+        <p:nvSpPr>
+          <p:cNvPr id="4" name="Text 2"/>
+          <p:cNvSpPr/>
+          <p:nvPr/>
+        </p:nvSpPr>
+        <p:spPr>
+          <a:xfrm>
+            <a:off x="365760" y="1737360"/>
+            <a:ext cx="5120640" cy="457200"/>
+          </a:xfrm>
+          <a:prstGeom prst="rect">
+            <a:avLst/>
+          </a:prstGeom>
+          <a:noFill/>
+          <a:ln/>
+        </p:spPr>
+        <p:txBody>
+          <a:bodyPr wrap="square" lIns="0" tIns="0" rIns="0" bIns="0" rtlCol="0" anchor="ctr">
+            <a:normAutofit/>
+          </a:bodyPr>
+          <a:lstStyle/>
+          <a:p>
+            <a:pPr algn="l" indent="0" marL="0">
+              <a:buNone/>
+            </a:pPr>
+            <a:r>
+              <a:rPr lang="en-US" sz="3000" b="1" dirty="0">
+                <a:solidFill>
+                  <a:srgbClr val="990011"/>
+                </a:solidFill>
+                <a:latin typeface="Times New Roman" pitchFamily="34" charset="0"/>
+                <a:ea typeface="Times New Roman" pitchFamily="34" charset="-122"/>
+                <a:cs typeface="Times New Roman" pitchFamily="34" charset="-120"/>
+              </a:rPr>
+              <a:t>A) Igneous Rocks</a:t>
+            </a:r>
+            <a:endParaRPr lang="en-US" sz="3000" dirty="0"/>
+          </a:p>
+        </p:txBody>
+      </p:sp>
+      <p:sp>
+        <p:nvSpPr>
+          <p:cNvPr id="5" name="Text 3"/>
+          <p:cNvSpPr/>
+          <p:nvPr/>
+        </p:nvSpPr>
+        <p:spPr>
+          <a:xfrm>
+            <a:off x="365760" y="2240280"/>
+            <a:ext cx="4846320" cy="4160520"/>
+          </a:xfrm>
+          <a:prstGeom prst="rect">
+            <a:avLst/>
+          </a:prstGeom>
+          <a:noFill/>
+          <a:ln/>
+        </p:spPr>
+        <p:txBody>
+          <a:bodyPr wrap="square" lIns="0" tIns="0" rIns="0" bIns="0" rtlCol="0" anchor="t"/>
+          <a:lstStyle/>
+          <a:p>
+            <a:pPr algn="l" indent="0" marL="0">
+              <a:spcAft>
+                <a:spcPts val="800"/>
+              </a:spcAft>
+              <a:buNone/>
+            </a:pPr>
+            <a:r>
+              <a:rPr lang="en-US" sz="3600" b="1" dirty="0">
+                <a:solidFill>
+                  <a:srgbClr val="111111"/>
+                </a:solidFill>
+                <a:latin typeface="Times New Roman" pitchFamily="34" charset="0"/>
+                <a:ea typeface="Times New Roman" pitchFamily="34" charset="-122"/>
+                <a:cs typeface="Times New Roman" pitchFamily="34" charset="-120"/>
+              </a:rPr>
+              <a:t>Extrusive examples: </a:t>
+            </a:r>
+            <a:pPr algn="l" indent="0" marL="0">
+              <a:spcAft>
+                <a:spcPts val="800"/>
+              </a:spcAft>
+              <a:buNone/>
+            </a:pPr>
+            <a:r>
+              <a:rPr lang="en-US" sz="3600" dirty="0">
+                <a:solidFill>
+                  <a:srgbClr val="111111"/>
+                </a:solidFill>
+                <a:latin typeface="Times New Roman" pitchFamily="34" charset="0"/>
+                <a:ea typeface="Times New Roman" pitchFamily="34" charset="-122"/>
+                <a:cs typeface="Times New Roman" pitchFamily="34" charset="-120"/>
+              </a:rPr>
+              <a:t>Basalt and pumice cooled on the surface.</a:t>
             </a:r>
             <a:endParaRPr lang="en-US" sz="3600" dirty="0"/>
           </a:p>
@@ -13015,7 +14056,7 @@
       </p:sp>
       <p:pic>
         <p:nvPicPr>
-          <p:cNvPr id="4" name="Image 0" descr="/home/claude/f4/img/v2/rock_cycle_big.png">    </p:cNvPr>
+          <p:cNvPr id="6" name="Image 0" descr="/home/claude/f4/img/v2/lsa_basalt.jpg">    </p:cNvPr>
           <p:cNvPicPr>
             <a:picLocks noChangeAspect="1"/>
           </p:cNvPicPr>
@@ -13029,8 +14070,8 @@
         </p:blipFill>
         <p:spPr>
           <a:xfrm>
-            <a:off x="629930" y="1783080"/>
-            <a:ext cx="10931835" cy="4270248"/>
+            <a:off x="5349240" y="2071212"/>
+            <a:ext cx="6659575" cy="3693983"/>
           </a:xfrm>
           <a:prstGeom prst="rect">
             <a:avLst/>
@@ -13039,14 +14080,14 @@
       </p:pic>
       <p:sp>
         <p:nvSpPr>
-          <p:cNvPr id="5" name="Text 2"/>
+          <p:cNvPr id="7" name="Text 4"/>
           <p:cNvSpPr/>
           <p:nvPr/>
         </p:nvSpPr>
         <p:spPr>
           <a:xfrm>
-            <a:off x="457200" y="6089904"/>
-            <a:ext cx="11277295" cy="347472"/>
+            <a:off x="5349240" y="6089904"/>
+            <a:ext cx="6659575" cy="347472"/>
           </a:xfrm>
           <a:prstGeom prst="rect">
             <a:avLst/>
@@ -13062,7 +14103,7 @@
               <a:buNone/>
             </a:pPr>
             <a:r>
-              <a:rPr lang="en-US" sz="1800" i="1" dirty="0">
+              <a:rPr lang="en-US" sz="1600" i="1" dirty="0">
                 <a:solidFill>
                   <a:srgbClr val="555555"/>
                 </a:solidFill>
@@ -13070,9 +14111,9 @@
                 <a:ea typeface="Times New Roman" pitchFamily="34" charset="-122"/>
                 <a:cs typeface="Times New Roman" pitchFamily="34" charset="-120"/>
               </a:rPr>
-              <a:t>Illustration: the rock cycle</a:t>
-            </a:r>
-            <a:endParaRPr lang="en-US" sz="1800" dirty="0"/>
+              <a:t>Illustration: basalt</a:t>
+            </a:r>
+            <a:endParaRPr lang="en-US" sz="1600" dirty="0"/>
           </a:p>
         </p:txBody>
       </p:sp>
@@ -13182,15 +14223,176 @@
                 <a:ea typeface="Calibri" pitchFamily="34" charset="-122"/>
                 <a:cs typeface="Calibri" pitchFamily="34" charset="-120"/>
               </a:rPr>
-              <a:t>FORMATIVE EVALUATION</a:t>
+              <a:t>BOARD SUMMARY</a:t>
             </a:r>
             <a:endParaRPr lang="en-US" sz="1400" dirty="0"/>
+          </a:p>
+        </p:txBody>
+      </p:sp>
+      <p:sp>
+        <p:nvSpPr>
+          <p:cNvPr id="3" name="Text 1"/>
+          <p:cNvSpPr/>
+          <p:nvPr/>
+        </p:nvSpPr>
+        <p:spPr>
+          <a:xfrm>
+            <a:off x="365760" y="1005840"/>
+            <a:ext cx="11460175" cy="731520"/>
+          </a:xfrm>
+          <a:prstGeom prst="rect">
+            <a:avLst/>
+          </a:prstGeom>
+          <a:noFill/>
+          <a:ln/>
+        </p:spPr>
+        <p:txBody>
+          <a:bodyPr wrap="square" lIns="0" tIns="0" rIns="0" bIns="0" rtlCol="0" anchor="ctr">
+            <a:normAutofit/>
+          </a:bodyPr>
+          <a:lstStyle/>
+          <a:p>
+            <a:pPr algn="ctr" indent="0" marL="0">
+              <a:buNone/>
+            </a:pPr>
+            <a:r>
+              <a:rPr lang="en-US" sz="3600" b="1" dirty="0">
+                <a:solidFill>
+                  <a:srgbClr val="990011"/>
+                </a:solidFill>
+                <a:latin typeface="Times New Roman" pitchFamily="34" charset="0"/>
+                <a:ea typeface="Times New Roman" pitchFamily="34" charset="-122"/>
+                <a:cs typeface="Times New Roman" pitchFamily="34" charset="-120"/>
+              </a:rPr>
+              <a:t>1. Classification of Rocks according to Origin</a:t>
+            </a:r>
+            <a:endParaRPr lang="en-US" sz="3600" dirty="0"/>
+          </a:p>
+        </p:txBody>
+      </p:sp>
+      <p:sp>
+        <p:nvSpPr>
+          <p:cNvPr id="4" name="Text 2"/>
+          <p:cNvSpPr/>
+          <p:nvPr/>
+        </p:nvSpPr>
+        <p:spPr>
+          <a:xfrm>
+            <a:off x="365760" y="1737360"/>
+            <a:ext cx="5120640" cy="457200"/>
+          </a:xfrm>
+          <a:prstGeom prst="rect">
+            <a:avLst/>
+          </a:prstGeom>
+          <a:noFill/>
+          <a:ln/>
+        </p:spPr>
+        <p:txBody>
+          <a:bodyPr wrap="square" lIns="0" tIns="0" rIns="0" bIns="0" rtlCol="0" anchor="ctr">
+            <a:normAutofit/>
+          </a:bodyPr>
+          <a:lstStyle/>
+          <a:p>
+            <a:pPr algn="l" indent="0" marL="0">
+              <a:buNone/>
+            </a:pPr>
+            <a:r>
+              <a:rPr lang="en-US" sz="3000" b="1" dirty="0">
+                <a:solidFill>
+                  <a:srgbClr val="990011"/>
+                </a:solidFill>
+                <a:latin typeface="Times New Roman" pitchFamily="34" charset="0"/>
+                <a:ea typeface="Times New Roman" pitchFamily="34" charset="-122"/>
+                <a:cs typeface="Times New Roman" pitchFamily="34" charset="-120"/>
+              </a:rPr>
+              <a:t>B) Sedimentary Rocks</a:t>
+            </a:r>
+            <a:endParaRPr lang="en-US" sz="3000" dirty="0"/>
+          </a:p>
+        </p:txBody>
+      </p:sp>
+      <p:sp>
+        <p:nvSpPr>
+          <p:cNvPr id="5" name="Text 3"/>
+          <p:cNvSpPr/>
+          <p:nvPr/>
+        </p:nvSpPr>
+        <p:spPr>
+          <a:xfrm>
+            <a:off x="365760" y="2240280"/>
+            <a:ext cx="4846320" cy="4160520"/>
+          </a:xfrm>
+          <a:prstGeom prst="rect">
+            <a:avLst/>
+          </a:prstGeom>
+          <a:noFill/>
+          <a:ln/>
+        </p:spPr>
+        <p:txBody>
+          <a:bodyPr wrap="square" lIns="0" tIns="0" rIns="0" bIns="0" rtlCol="0" anchor="t"/>
+          <a:lstStyle/>
+          <a:p>
+            <a:pPr algn="l" indent="0" marL="0">
+              <a:spcAft>
+                <a:spcPts val="800"/>
+              </a:spcAft>
+              <a:buNone/>
+            </a:pPr>
+            <a:r>
+              <a:rPr lang="en-US" sz="3200" i="1" dirty="0">
+                <a:solidFill>
+                  <a:srgbClr val="111111"/>
+                </a:solidFill>
+                <a:latin typeface="Times New Roman" pitchFamily="34" charset="0"/>
+                <a:ea typeface="Times New Roman" pitchFamily="34" charset="-122"/>
+                <a:cs typeface="Times New Roman" pitchFamily="34" charset="-120"/>
+              </a:rPr>
+              <a:t>Sedimentary rocks have the following characteristics and examples:</a:t>
+            </a:r>
+            <a:endParaRPr lang="en-US" sz="3200" dirty="0"/>
+          </a:p>
+          <a:p>
+            <a:pPr algn="l" indent="0" marL="0">
+              <a:spcAft>
+                <a:spcPts val="800"/>
+              </a:spcAft>
+              <a:buNone/>
+            </a:pPr>
+            <a:r>
+              <a:rPr lang="en-US" sz="3200" b="1" dirty="0">
+                <a:solidFill>
+                  <a:srgbClr val="111111"/>
+                </a:solidFill>
+                <a:latin typeface="Times New Roman" pitchFamily="34" charset="0"/>
+                <a:ea typeface="Times New Roman" pitchFamily="34" charset="-122"/>
+                <a:cs typeface="Times New Roman" pitchFamily="34" charset="-120"/>
+              </a:rPr>
+              <a:t>Formation: </a:t>
+            </a:r>
+            <a:pPr algn="l" indent="0" marL="0">
+              <a:spcAft>
+                <a:spcPts val="800"/>
+              </a:spcAft>
+              <a:buNone/>
+            </a:pPr>
+            <a:r>
+              <a:rPr lang="en-US" sz="3200" dirty="0">
+                <a:solidFill>
+                  <a:srgbClr val="111111"/>
+                </a:solidFill>
+                <a:latin typeface="Times New Roman" pitchFamily="34" charset="0"/>
+                <a:ea typeface="Times New Roman" pitchFamily="34" charset="-122"/>
+                <a:cs typeface="Times New Roman" pitchFamily="34" charset="-120"/>
+              </a:rPr>
+              <a:t>They are formed from sediments laid down in layers and pressed together over a long time.</a:t>
+            </a:r>
+            <a:endParaRPr lang="en-US" sz="3200" dirty="0"/>
           </a:p>
         </p:txBody>
       </p:sp>
       <p:pic>
         <p:nvPicPr>
-          <p:cNvPr id="3" name="Image 0" descr="/home/claude/f4/img/minesec_sheet.png">    </p:cNvPr>
+          <p:cNvPr id="6" name="Image 0" descr="/home/claude/f4/img/v2/f4_sandstone.jpg">    </p:cNvPr>
           <p:cNvPicPr>
             <a:picLocks noChangeAspect="1"/>
           </p:cNvPicPr>
@@ -13204,8 +14406,8 @@
         </p:blipFill>
         <p:spPr>
           <a:xfrm>
-            <a:off x="0" y="658368"/>
-            <a:ext cx="5120640" cy="5833872"/>
+            <a:off x="5349240" y="2071212"/>
+            <a:ext cx="6659575" cy="3693983"/>
           </a:xfrm>
           <a:prstGeom prst="rect">
             <a:avLst/>
@@ -13214,14 +14416,14 @@
       </p:pic>
       <p:sp>
         <p:nvSpPr>
-          <p:cNvPr id="4" name="Text 1"/>
+          <p:cNvPr id="7" name="Text 4"/>
           <p:cNvSpPr/>
           <p:nvPr/>
         </p:nvSpPr>
         <p:spPr>
           <a:xfrm>
-            <a:off x="5349240" y="1005840"/>
-            <a:ext cx="6522415" cy="731520"/>
+            <a:off x="5349240" y="6089904"/>
+            <a:ext cx="6659575" cy="347472"/>
           </a:xfrm>
           <a:prstGeom prst="rect">
             <a:avLst/>
@@ -13230,68 +14432,24 @@
           <a:ln/>
         </p:spPr>
         <p:txBody>
-          <a:bodyPr wrap="square" lIns="0" tIns="0" rIns="0" bIns="0" rtlCol="0" anchor="ctr">
-            <a:normAutofit/>
-          </a:bodyPr>
+          <a:bodyPr wrap="square" lIns="0" tIns="0" rIns="0" bIns="0" rtlCol="0" anchor="ctr"/>
           <a:lstStyle/>
           <a:p>
             <a:pPr algn="ctr" indent="0" marL="0">
               <a:buNone/>
             </a:pPr>
             <a:r>
-              <a:rPr lang="en-US" sz="3600" b="1" dirty="0">
-                <a:solidFill>
-                  <a:srgbClr val="990011"/>
+              <a:rPr lang="en-US" sz="1600" i="1" dirty="0">
+                <a:solidFill>
+                  <a:srgbClr val="555555"/>
                 </a:solidFill>
                 <a:latin typeface="Times New Roman" pitchFamily="34" charset="0"/>
                 <a:ea typeface="Times New Roman" pitchFamily="34" charset="-122"/>
                 <a:cs typeface="Times New Roman" pitchFamily="34" charset="-120"/>
               </a:rPr>
-              <a:t>Evaluation 1</a:t>
-            </a:r>
-            <a:endParaRPr lang="en-US" sz="3600" dirty="0"/>
-          </a:p>
-        </p:txBody>
-      </p:sp>
-      <p:sp>
-        <p:nvSpPr>
-          <p:cNvPr id="5" name="Text 2"/>
-          <p:cNvSpPr/>
-          <p:nvPr/>
-        </p:nvSpPr>
-        <p:spPr>
-          <a:xfrm>
-            <a:off x="5349240" y="1783080"/>
-            <a:ext cx="6522415" cy="4663440"/>
-          </a:xfrm>
-          <a:prstGeom prst="rect">
-            <a:avLst/>
-          </a:prstGeom>
-          <a:noFill/>
-          <a:ln/>
-        </p:spPr>
-        <p:txBody>
-          <a:bodyPr wrap="square" lIns="0" tIns="0" rIns="0" bIns="0" rtlCol="0" anchor="t"/>
-          <a:lstStyle/>
-          <a:p>
-            <a:pPr algn="l" indent="0" marL="0">
-              <a:spcAft>
-                <a:spcPts val="800"/>
-              </a:spcAft>
-              <a:buNone/>
-            </a:pPr>
-            <a:r>
-              <a:rPr lang="en-US" sz="4000" dirty="0">
-                <a:solidFill>
-                  <a:srgbClr val="111111"/>
-                </a:solidFill>
-                <a:latin typeface="Times New Roman" pitchFamily="34" charset="0"/>
-                <a:ea typeface="Times New Roman" pitchFamily="34" charset="-122"/>
-                <a:cs typeface="Times New Roman" pitchFamily="34" charset="-120"/>
-              </a:rPr>
-              <a:t>How are igneous rocks formed?</a:t>
-            </a:r>
-            <a:endParaRPr lang="en-US" sz="4000" dirty="0"/>
+              <a:t>Illustration: sandstone, a sedimentary rock</a:t>
+            </a:r>
+            <a:endParaRPr lang="en-US" sz="1600" dirty="0"/>
           </a:p>
         </p:txBody>
       </p:sp>
@@ -13401,7 +14559,7 @@
                 <a:ea typeface="Calibri" pitchFamily="34" charset="-122"/>
                 <a:cs typeface="Calibri" pitchFamily="34" charset="-120"/>
               </a:rPr>
-              <a:t>FORMATIVE EVALUATION</a:t>
+              <a:t>BOARD SUMMARY</a:t>
             </a:r>
             <a:endParaRPr lang="en-US" sz="1400" dirty="0"/>
           </a:p>
@@ -13466,7 +14624,7 @@
                 <a:ea typeface="Times New Roman" pitchFamily="34" charset="-122"/>
                 <a:cs typeface="Times New Roman" pitchFamily="34" charset="-120"/>
               </a:rPr>
-              <a:t>Expected Answer</a:t>
+              <a:t>1. Classification of Rocks according to Origin</a:t>
             </a:r>
             <a:endParaRPr lang="en-US" sz="3600" dirty="0"/>
           </a:p>
@@ -13480,8 +14638,47 @@
         </p:nvSpPr>
         <p:spPr>
           <a:xfrm>
-            <a:off x="5349240" y="1783080"/>
-            <a:ext cx="6522415" cy="4663440"/>
+            <a:off x="5349240" y="1737360"/>
+            <a:ext cx="6522415" cy="457200"/>
+          </a:xfrm>
+          <a:prstGeom prst="rect">
+            <a:avLst/>
+          </a:prstGeom>
+          <a:noFill/>
+          <a:ln/>
+        </p:spPr>
+        <p:txBody>
+          <a:bodyPr wrap="square" lIns="0" tIns="0" rIns="0" bIns="0" rtlCol="0" anchor="ctr"/>
+          <a:lstStyle/>
+          <a:p>
+            <a:pPr algn="l" indent="0" marL="0">
+              <a:buNone/>
+            </a:pPr>
+            <a:r>
+              <a:rPr lang="en-US" sz="3200" b="1" dirty="0">
+                <a:solidFill>
+                  <a:srgbClr val="990011"/>
+                </a:solidFill>
+                <a:latin typeface="Times New Roman" pitchFamily="34" charset="0"/>
+                <a:ea typeface="Times New Roman" pitchFamily="34" charset="-122"/>
+                <a:cs typeface="Times New Roman" pitchFamily="34" charset="-120"/>
+              </a:rPr>
+              <a:t>B) Sedimentary Rocks</a:t>
+            </a:r>
+            <a:endParaRPr lang="en-US" sz="3200" dirty="0"/>
+          </a:p>
+        </p:txBody>
+      </p:sp>
+      <p:sp>
+        <p:nvSpPr>
+          <p:cNvPr id="6" name="Text 3"/>
+          <p:cNvSpPr/>
+          <p:nvPr/>
+        </p:nvSpPr>
+        <p:spPr>
+          <a:xfrm>
+            <a:off x="5349240" y="2240280"/>
+            <a:ext cx="6522415" cy="4206240"/>
           </a:xfrm>
           <a:prstGeom prst="rect">
             <a:avLst/>
@@ -13500,7 +14697,7 @@
               <a:buNone/>
             </a:pPr>
             <a:r>
-              <a:rPr lang="en-US" sz="4000" dirty="0">
+              <a:rPr lang="en-US" sz="4000" b="1" dirty="0">
                 <a:solidFill>
                   <a:srgbClr val="111111"/>
                 </a:solidFill>
@@ -13508,7 +14705,24 @@
                 <a:ea typeface="Times New Roman" pitchFamily="34" charset="-122"/>
                 <a:cs typeface="Times New Roman" pitchFamily="34" charset="-120"/>
               </a:rPr>
-              <a:t>When magma or lava cools and becomes hard.</a:t>
+              <a:t>Layers: </a:t>
+            </a:r>
+            <a:pPr algn="l" indent="0" marL="0">
+              <a:spcAft>
+                <a:spcPts val="800"/>
+              </a:spcAft>
+              <a:buNone/>
+            </a:pPr>
+            <a:r>
+              <a:rPr lang="en-US" sz="4000" dirty="0">
+                <a:solidFill>
+                  <a:srgbClr val="111111"/>
+                </a:solidFill>
+                <a:latin typeface="Times New Roman" pitchFamily="34" charset="0"/>
+                <a:ea typeface="Times New Roman" pitchFamily="34" charset="-122"/>
+                <a:cs typeface="Times New Roman" pitchFamily="34" charset="-120"/>
+              </a:rPr>
+              <a:t>They are arranged in layers called strata.</a:t>
             </a:r>
             <a:endParaRPr lang="en-US" sz="4000" dirty="0"/>
           </a:p>
@@ -13620,15 +14834,156 @@
                 <a:ea typeface="Calibri" pitchFamily="34" charset="-122"/>
                 <a:cs typeface="Calibri" pitchFamily="34" charset="-120"/>
               </a:rPr>
-              <a:t>FORMATIVE EVALUATION</a:t>
+              <a:t>BOARD SUMMARY</a:t>
             </a:r>
             <a:endParaRPr lang="en-US" sz="1400" dirty="0"/>
+          </a:p>
+        </p:txBody>
+      </p:sp>
+      <p:sp>
+        <p:nvSpPr>
+          <p:cNvPr id="3" name="Text 1"/>
+          <p:cNvSpPr/>
+          <p:nvPr/>
+        </p:nvSpPr>
+        <p:spPr>
+          <a:xfrm>
+            <a:off x="365760" y="1005840"/>
+            <a:ext cx="11460175" cy="731520"/>
+          </a:xfrm>
+          <a:prstGeom prst="rect">
+            <a:avLst/>
+          </a:prstGeom>
+          <a:noFill/>
+          <a:ln/>
+        </p:spPr>
+        <p:txBody>
+          <a:bodyPr wrap="square" lIns="0" tIns="0" rIns="0" bIns="0" rtlCol="0" anchor="ctr">
+            <a:normAutofit/>
+          </a:bodyPr>
+          <a:lstStyle/>
+          <a:p>
+            <a:pPr algn="ctr" indent="0" marL="0">
+              <a:buNone/>
+            </a:pPr>
+            <a:r>
+              <a:rPr lang="en-US" sz="3600" b="1" dirty="0">
+                <a:solidFill>
+                  <a:srgbClr val="990011"/>
+                </a:solidFill>
+                <a:latin typeface="Times New Roman" pitchFamily="34" charset="0"/>
+                <a:ea typeface="Times New Roman" pitchFamily="34" charset="-122"/>
+                <a:cs typeface="Times New Roman" pitchFamily="34" charset="-120"/>
+              </a:rPr>
+              <a:t>1. Classification of Rocks according to Origin</a:t>
+            </a:r>
+            <a:endParaRPr lang="en-US" sz="3600" dirty="0"/>
+          </a:p>
+        </p:txBody>
+      </p:sp>
+      <p:sp>
+        <p:nvSpPr>
+          <p:cNvPr id="4" name="Text 2"/>
+          <p:cNvSpPr/>
+          <p:nvPr/>
+        </p:nvSpPr>
+        <p:spPr>
+          <a:xfrm>
+            <a:off x="365760" y="1737360"/>
+            <a:ext cx="5120640" cy="457200"/>
+          </a:xfrm>
+          <a:prstGeom prst="rect">
+            <a:avLst/>
+          </a:prstGeom>
+          <a:noFill/>
+          <a:ln/>
+        </p:spPr>
+        <p:txBody>
+          <a:bodyPr wrap="square" lIns="0" tIns="0" rIns="0" bIns="0" rtlCol="0" anchor="ctr">
+            <a:normAutofit/>
+          </a:bodyPr>
+          <a:lstStyle/>
+          <a:p>
+            <a:pPr algn="l" indent="0" marL="0">
+              <a:buNone/>
+            </a:pPr>
+            <a:r>
+              <a:rPr lang="en-US" sz="3000" b="1" dirty="0">
+                <a:solidFill>
+                  <a:srgbClr val="990011"/>
+                </a:solidFill>
+                <a:latin typeface="Times New Roman" pitchFamily="34" charset="0"/>
+                <a:ea typeface="Times New Roman" pitchFamily="34" charset="-122"/>
+                <a:cs typeface="Times New Roman" pitchFamily="34" charset="-120"/>
+              </a:rPr>
+              <a:t>B) Sedimentary Rocks</a:t>
+            </a:r>
+            <a:endParaRPr lang="en-US" sz="3000" dirty="0"/>
+          </a:p>
+        </p:txBody>
+      </p:sp>
+      <p:sp>
+        <p:nvSpPr>
+          <p:cNvPr id="5" name="Text 3"/>
+          <p:cNvSpPr/>
+          <p:nvPr/>
+        </p:nvSpPr>
+        <p:spPr>
+          <a:xfrm>
+            <a:off x="365760" y="2240280"/>
+            <a:ext cx="4846320" cy="4160520"/>
+          </a:xfrm>
+          <a:prstGeom prst="rect">
+            <a:avLst/>
+          </a:prstGeom>
+          <a:noFill/>
+          <a:ln/>
+        </p:spPr>
+        <p:txBody>
+          <a:bodyPr wrap="square" lIns="0" tIns="0" rIns="0" bIns="0" rtlCol="0" anchor="t"/>
+          <a:lstStyle/>
+          <a:p>
+            <a:pPr algn="l" indent="0" marL="0">
+              <a:spcAft>
+                <a:spcPts val="800"/>
+              </a:spcAft>
+              <a:buNone/>
+            </a:pPr>
+            <a:r>
+              <a:rPr lang="en-US" sz="3600" b="1" dirty="0">
+                <a:solidFill>
+                  <a:srgbClr val="111111"/>
+                </a:solidFill>
+                <a:latin typeface="Times New Roman" pitchFamily="34" charset="0"/>
+                <a:ea typeface="Times New Roman" pitchFamily="34" charset="-122"/>
+                <a:cs typeface="Times New Roman" pitchFamily="34" charset="-120"/>
+              </a:rPr>
+              <a:t>Fossils: </a:t>
+            </a:r>
+            <a:pPr algn="l" indent="0" marL="0">
+              <a:spcAft>
+                <a:spcPts val="800"/>
+              </a:spcAft>
+              <a:buNone/>
+            </a:pPr>
+            <a:r>
+              <a:rPr lang="en-US" sz="3600" dirty="0">
+                <a:solidFill>
+                  <a:srgbClr val="111111"/>
+                </a:solidFill>
+                <a:latin typeface="Times New Roman" pitchFamily="34" charset="0"/>
+                <a:ea typeface="Times New Roman" pitchFamily="34" charset="-122"/>
+                <a:cs typeface="Times New Roman" pitchFamily="34" charset="-120"/>
+              </a:rPr>
+              <a:t>They often contain fossils of plants and animals.</a:t>
+            </a:r>
+            <a:endParaRPr lang="en-US" sz="3600" dirty="0"/>
           </a:p>
         </p:txBody>
       </p:sp>
       <p:pic>
         <p:nvPicPr>
-          <p:cNvPr id="3" name="Image 0" descr="/home/claude/f4/img/minesec_sheet.png">    </p:cNvPr>
+          <p:cNvPr id="6" name="Image 0" descr="/home/claude/f4/img/v2/f4_fossil.jpg">    </p:cNvPr>
           <p:cNvPicPr>
             <a:picLocks noChangeAspect="1"/>
           </p:cNvPicPr>
@@ -13642,8 +14997,8 @@
         </p:blipFill>
         <p:spPr>
           <a:xfrm>
-            <a:off x="0" y="658368"/>
-            <a:ext cx="5120640" cy="5833872"/>
+            <a:off x="5349240" y="2071212"/>
+            <a:ext cx="6659575" cy="3693983"/>
           </a:xfrm>
           <a:prstGeom prst="rect">
             <a:avLst/>
@@ -13652,14 +15007,14 @@
       </p:pic>
       <p:sp>
         <p:nvSpPr>
-          <p:cNvPr id="4" name="Text 1"/>
+          <p:cNvPr id="7" name="Text 4"/>
           <p:cNvSpPr/>
           <p:nvPr/>
         </p:nvSpPr>
         <p:spPr>
           <a:xfrm>
-            <a:off x="5349240" y="1005840"/>
-            <a:ext cx="6522415" cy="731520"/>
+            <a:off x="5349240" y="6089904"/>
+            <a:ext cx="6659575" cy="347472"/>
           </a:xfrm>
           <a:prstGeom prst="rect">
             <a:avLst/>
@@ -13668,68 +15023,24 @@
           <a:ln/>
         </p:spPr>
         <p:txBody>
-          <a:bodyPr wrap="square" lIns="0" tIns="0" rIns="0" bIns="0" rtlCol="0" anchor="ctr">
-            <a:normAutofit/>
-          </a:bodyPr>
+          <a:bodyPr wrap="square" lIns="0" tIns="0" rIns="0" bIns="0" rtlCol="0" anchor="ctr"/>
           <a:lstStyle/>
           <a:p>
             <a:pPr algn="ctr" indent="0" marL="0">
               <a:buNone/>
             </a:pPr>
             <a:r>
-              <a:rPr lang="en-US" sz="3600" b="1" dirty="0">
-                <a:solidFill>
-                  <a:srgbClr val="990011"/>
+              <a:rPr lang="en-US" sz="1600" i="1" dirty="0">
+                <a:solidFill>
+                  <a:srgbClr val="555555"/>
                 </a:solidFill>
                 <a:latin typeface="Times New Roman" pitchFamily="34" charset="0"/>
                 <a:ea typeface="Times New Roman" pitchFamily="34" charset="-122"/>
                 <a:cs typeface="Times New Roman" pitchFamily="34" charset="-120"/>
               </a:rPr>
-              <a:t>Evaluation 2</a:t>
-            </a:r>
-            <a:endParaRPr lang="en-US" sz="3600" dirty="0"/>
-          </a:p>
-        </p:txBody>
-      </p:sp>
-      <p:sp>
-        <p:nvSpPr>
-          <p:cNvPr id="5" name="Text 2"/>
-          <p:cNvSpPr/>
-          <p:nvPr/>
-        </p:nvSpPr>
-        <p:spPr>
-          <a:xfrm>
-            <a:off x="5349240" y="1783080"/>
-            <a:ext cx="6522415" cy="4663440"/>
-          </a:xfrm>
-          <a:prstGeom prst="rect">
-            <a:avLst/>
-          </a:prstGeom>
-          <a:noFill/>
-          <a:ln/>
-        </p:spPr>
-        <p:txBody>
-          <a:bodyPr wrap="square" lIns="0" tIns="0" rIns="0" bIns="0" rtlCol="0" anchor="t"/>
-          <a:lstStyle/>
-          <a:p>
-            <a:pPr algn="l" indent="0" marL="0">
-              <a:spcAft>
-                <a:spcPts val="800"/>
-              </a:spcAft>
-              <a:buNone/>
-            </a:pPr>
-            <a:r>
-              <a:rPr lang="en-US" sz="4000" dirty="0">
-                <a:solidFill>
-                  <a:srgbClr val="111111"/>
-                </a:solidFill>
-                <a:latin typeface="Times New Roman" pitchFamily="34" charset="0"/>
-                <a:ea typeface="Times New Roman" pitchFamily="34" charset="-122"/>
-                <a:cs typeface="Times New Roman" pitchFamily="34" charset="-120"/>
-              </a:rPr>
-              <a:t>Give one example of a metamorphic rock.</a:t>
-            </a:r>
-            <a:endParaRPr lang="en-US" sz="4000" dirty="0"/>
+              <a:t>Illustration: a fossil in rock</a:t>
+            </a:r>
+            <a:endParaRPr lang="en-US" sz="1600" dirty="0"/>
           </a:p>
         </p:txBody>
       </p:sp>
@@ -13839,7 +15150,7 @@
                 <a:ea typeface="Calibri" pitchFamily="34" charset="-122"/>
                 <a:cs typeface="Calibri" pitchFamily="34" charset="-120"/>
               </a:rPr>
-              <a:t>FORMATIVE EVALUATION</a:t>
+              <a:t>BOARD SUMMARY</a:t>
             </a:r>
             <a:endParaRPr lang="en-US" sz="1400" dirty="0"/>
           </a:p>
@@ -13862,7 +15173,7 @@
         <p:spPr>
           <a:xfrm>
             <a:off x="0" y="658368"/>
-            <a:ext cx="5120640" cy="5833872"/>
+            <a:ext cx="1463040" cy="5833872"/>
           </a:xfrm>
           <a:prstGeom prst="rect">
             <a:avLst/>
@@ -13877,8 +15188,8 @@
         </p:nvSpPr>
         <p:spPr>
           <a:xfrm>
-            <a:off x="5349240" y="1005840"/>
-            <a:ext cx="6522415" cy="731520"/>
+            <a:off x="1691640" y="1005840"/>
+            <a:ext cx="10180015" cy="731520"/>
           </a:xfrm>
           <a:prstGeom prst="rect">
             <a:avLst/>
@@ -13904,7 +15215,7 @@
                 <a:ea typeface="Times New Roman" pitchFamily="34" charset="-122"/>
                 <a:cs typeface="Times New Roman" pitchFamily="34" charset="-120"/>
               </a:rPr>
-              <a:t>Expected Answer</a:t>
+              <a:t>1. Classification of Rocks according to Origin</a:t>
             </a:r>
             <a:endParaRPr lang="en-US" sz="3600" dirty="0"/>
           </a:p>
@@ -13918,8 +15229,47 @@
         </p:nvSpPr>
         <p:spPr>
           <a:xfrm>
-            <a:off x="5349240" y="1783080"/>
-            <a:ext cx="6522415" cy="4663440"/>
+            <a:off x="1691640" y="1737360"/>
+            <a:ext cx="10180015" cy="457200"/>
+          </a:xfrm>
+          <a:prstGeom prst="rect">
+            <a:avLst/>
+          </a:prstGeom>
+          <a:noFill/>
+          <a:ln/>
+        </p:spPr>
+        <p:txBody>
+          <a:bodyPr wrap="square" lIns="0" tIns="0" rIns="0" bIns="0" rtlCol="0" anchor="ctr"/>
+          <a:lstStyle/>
+          <a:p>
+            <a:pPr algn="l" indent="0" marL="0">
+              <a:buNone/>
+            </a:pPr>
+            <a:r>
+              <a:rPr lang="en-US" sz="3200" b="1" dirty="0">
+                <a:solidFill>
+                  <a:srgbClr val="990011"/>
+                </a:solidFill>
+                <a:latin typeface="Times New Roman" pitchFamily="34" charset="0"/>
+                <a:ea typeface="Times New Roman" pitchFamily="34" charset="-122"/>
+                <a:cs typeface="Times New Roman" pitchFamily="34" charset="-120"/>
+              </a:rPr>
+              <a:t>B) Sedimentary Rocks</a:t>
+            </a:r>
+            <a:endParaRPr lang="en-US" sz="3200" dirty="0"/>
+          </a:p>
+        </p:txBody>
+      </p:sp>
+      <p:sp>
+        <p:nvSpPr>
+          <p:cNvPr id="6" name="Text 3"/>
+          <p:cNvSpPr/>
+          <p:nvPr/>
+        </p:nvSpPr>
+        <p:spPr>
+          <a:xfrm>
+            <a:off x="1691640" y="2240280"/>
+            <a:ext cx="10180015" cy="4206240"/>
           </a:xfrm>
           <a:prstGeom prst="rect">
             <a:avLst/>
@@ -13938,7 +15288,7 @@
               <a:buNone/>
             </a:pPr>
             <a:r>
-              <a:rPr lang="en-US" sz="4000" dirty="0">
+              <a:rPr lang="en-US" sz="4000" b="1" dirty="0">
                 <a:solidFill>
                   <a:srgbClr val="111111"/>
                 </a:solidFill>
@@ -13946,7 +15296,61 @@
                 <a:ea typeface="Times New Roman" pitchFamily="34" charset="-122"/>
                 <a:cs typeface="Times New Roman" pitchFamily="34" charset="-120"/>
               </a:rPr>
-              <a:t>Marble (or slate, gneiss).</a:t>
+              <a:t>Mechanically formed examples: </a:t>
+            </a:r>
+            <a:pPr algn="l" indent="0" marL="0">
+              <a:spcAft>
+                <a:spcPts val="800"/>
+              </a:spcAft>
+              <a:buNone/>
+            </a:pPr>
+            <a:r>
+              <a:rPr lang="en-US" sz="4000" dirty="0">
+                <a:solidFill>
+                  <a:srgbClr val="111111"/>
+                </a:solidFill>
+                <a:latin typeface="Times New Roman" pitchFamily="34" charset="0"/>
+                <a:ea typeface="Times New Roman" pitchFamily="34" charset="-122"/>
+                <a:cs typeface="Times New Roman" pitchFamily="34" charset="-120"/>
+              </a:rPr>
+              <a:t>Sandstone, clay and conglomerate are made of rock fragments.</a:t>
+            </a:r>
+            <a:endParaRPr lang="en-US" sz="4000" dirty="0"/>
+          </a:p>
+          <a:p>
+            <a:pPr algn="l" indent="0" marL="0">
+              <a:spcAft>
+                <a:spcPts val="800"/>
+              </a:spcAft>
+              <a:buNone/>
+            </a:pPr>
+            <a:r>
+              <a:rPr lang="en-US" sz="4000" b="1" dirty="0">
+                <a:solidFill>
+                  <a:srgbClr val="111111"/>
+                </a:solidFill>
+                <a:latin typeface="Times New Roman" pitchFamily="34" charset="0"/>
+                <a:ea typeface="Times New Roman" pitchFamily="34" charset="-122"/>
+                <a:cs typeface="Times New Roman" pitchFamily="34" charset="-120"/>
+              </a:rPr>
+              <a:t>Organically and chemically formed examples: </a:t>
+            </a:r>
+            <a:pPr algn="l" indent="0" marL="0">
+              <a:spcAft>
+                <a:spcPts val="800"/>
+              </a:spcAft>
+              <a:buNone/>
+            </a:pPr>
+            <a:r>
+              <a:rPr lang="en-US" sz="4000" dirty="0">
+                <a:solidFill>
+                  <a:srgbClr val="111111"/>
+                </a:solidFill>
+                <a:latin typeface="Times New Roman" pitchFamily="34" charset="0"/>
+                <a:ea typeface="Times New Roman" pitchFamily="34" charset="-122"/>
+                <a:cs typeface="Times New Roman" pitchFamily="34" charset="-120"/>
+              </a:rPr>
+              <a:t>Limestone, coal and rock salt come from living things or from chemical deposits.</a:t>
             </a:r>
             <a:endParaRPr lang="en-US" sz="4000" dirty="0"/>
           </a:p>
@@ -14058,15 +15462,176 @@
                 <a:ea typeface="Calibri" pitchFamily="34" charset="-122"/>
                 <a:cs typeface="Calibri" pitchFamily="34" charset="-120"/>
               </a:rPr>
-              <a:t>REMEDIATION</a:t>
+              <a:t>BOARD SUMMARY</a:t>
             </a:r>
             <a:endParaRPr lang="en-US" sz="1400" dirty="0"/>
+          </a:p>
+        </p:txBody>
+      </p:sp>
+      <p:sp>
+        <p:nvSpPr>
+          <p:cNvPr id="3" name="Text 1"/>
+          <p:cNvSpPr/>
+          <p:nvPr/>
+        </p:nvSpPr>
+        <p:spPr>
+          <a:xfrm>
+            <a:off x="365760" y="1005840"/>
+            <a:ext cx="11460175" cy="731520"/>
+          </a:xfrm>
+          <a:prstGeom prst="rect">
+            <a:avLst/>
+          </a:prstGeom>
+          <a:noFill/>
+          <a:ln/>
+        </p:spPr>
+        <p:txBody>
+          <a:bodyPr wrap="square" lIns="0" tIns="0" rIns="0" bIns="0" rtlCol="0" anchor="ctr">
+            <a:normAutofit/>
+          </a:bodyPr>
+          <a:lstStyle/>
+          <a:p>
+            <a:pPr algn="ctr" indent="0" marL="0">
+              <a:buNone/>
+            </a:pPr>
+            <a:r>
+              <a:rPr lang="en-US" sz="3600" b="1" dirty="0">
+                <a:solidFill>
+                  <a:srgbClr val="990011"/>
+                </a:solidFill>
+                <a:latin typeface="Times New Roman" pitchFamily="34" charset="0"/>
+                <a:ea typeface="Times New Roman" pitchFamily="34" charset="-122"/>
+                <a:cs typeface="Times New Roman" pitchFamily="34" charset="-120"/>
+              </a:rPr>
+              <a:t>1. Classification of Rocks according to Origin</a:t>
+            </a:r>
+            <a:endParaRPr lang="en-US" sz="3600" dirty="0"/>
+          </a:p>
+        </p:txBody>
+      </p:sp>
+      <p:sp>
+        <p:nvSpPr>
+          <p:cNvPr id="4" name="Text 2"/>
+          <p:cNvSpPr/>
+          <p:nvPr/>
+        </p:nvSpPr>
+        <p:spPr>
+          <a:xfrm>
+            <a:off x="365760" y="1737360"/>
+            <a:ext cx="5120640" cy="457200"/>
+          </a:xfrm>
+          <a:prstGeom prst="rect">
+            <a:avLst/>
+          </a:prstGeom>
+          <a:noFill/>
+          <a:ln/>
+        </p:spPr>
+        <p:txBody>
+          <a:bodyPr wrap="square" lIns="0" tIns="0" rIns="0" bIns="0" rtlCol="0" anchor="ctr">
+            <a:normAutofit/>
+          </a:bodyPr>
+          <a:lstStyle/>
+          <a:p>
+            <a:pPr algn="l" indent="0" marL="0">
+              <a:buNone/>
+            </a:pPr>
+            <a:r>
+              <a:rPr lang="en-US" sz="3000" b="1" dirty="0">
+                <a:solidFill>
+                  <a:srgbClr val="990011"/>
+                </a:solidFill>
+                <a:latin typeface="Times New Roman" pitchFamily="34" charset="0"/>
+                <a:ea typeface="Times New Roman" pitchFamily="34" charset="-122"/>
+                <a:cs typeface="Times New Roman" pitchFamily="34" charset="-120"/>
+              </a:rPr>
+              <a:t>C) Metamorphic Rocks</a:t>
+            </a:r>
+            <a:endParaRPr lang="en-US" sz="3000" dirty="0"/>
+          </a:p>
+        </p:txBody>
+      </p:sp>
+      <p:sp>
+        <p:nvSpPr>
+          <p:cNvPr id="5" name="Text 3"/>
+          <p:cNvSpPr/>
+          <p:nvPr/>
+        </p:nvSpPr>
+        <p:spPr>
+          <a:xfrm>
+            <a:off x="365760" y="2240280"/>
+            <a:ext cx="4846320" cy="4160520"/>
+          </a:xfrm>
+          <a:prstGeom prst="rect">
+            <a:avLst/>
+          </a:prstGeom>
+          <a:noFill/>
+          <a:ln/>
+        </p:spPr>
+        <p:txBody>
+          <a:bodyPr wrap="square" lIns="0" tIns="0" rIns="0" bIns="0" rtlCol="0" anchor="t"/>
+          <a:lstStyle/>
+          <a:p>
+            <a:pPr algn="l" indent="0" marL="0">
+              <a:spcAft>
+                <a:spcPts val="800"/>
+              </a:spcAft>
+              <a:buNone/>
+            </a:pPr>
+            <a:r>
+              <a:rPr lang="en-US" sz="3200" i="1" dirty="0">
+                <a:solidFill>
+                  <a:srgbClr val="111111"/>
+                </a:solidFill>
+                <a:latin typeface="Times New Roman" pitchFamily="34" charset="0"/>
+                <a:ea typeface="Times New Roman" pitchFamily="34" charset="-122"/>
+                <a:cs typeface="Times New Roman" pitchFamily="34" charset="-120"/>
+              </a:rPr>
+              <a:t>Metamorphic rocks have the following characteristics and examples:</a:t>
+            </a:r>
+            <a:endParaRPr lang="en-US" sz="3200" dirty="0"/>
+          </a:p>
+          <a:p>
+            <a:pPr algn="l" indent="0" marL="0">
+              <a:spcAft>
+                <a:spcPts val="800"/>
+              </a:spcAft>
+              <a:buNone/>
+            </a:pPr>
+            <a:r>
+              <a:rPr lang="en-US" sz="3200" b="1" dirty="0">
+                <a:solidFill>
+                  <a:srgbClr val="111111"/>
+                </a:solidFill>
+                <a:latin typeface="Times New Roman" pitchFamily="34" charset="0"/>
+                <a:ea typeface="Times New Roman" pitchFamily="34" charset="-122"/>
+                <a:cs typeface="Times New Roman" pitchFamily="34" charset="-120"/>
+              </a:rPr>
+              <a:t>Formation: </a:t>
+            </a:r>
+            <a:pPr algn="l" indent="0" marL="0">
+              <a:spcAft>
+                <a:spcPts val="800"/>
+              </a:spcAft>
+              <a:buNone/>
+            </a:pPr>
+            <a:r>
+              <a:rPr lang="en-US" sz="3200" dirty="0">
+                <a:solidFill>
+                  <a:srgbClr val="111111"/>
+                </a:solidFill>
+                <a:latin typeface="Times New Roman" pitchFamily="34" charset="0"/>
+                <a:ea typeface="Times New Roman" pitchFamily="34" charset="-122"/>
+                <a:cs typeface="Times New Roman" pitchFamily="34" charset="-120"/>
+              </a:rPr>
+              <a:t>They are formed when igneous or sedimentary rocks are changed by great heat and pressure.</a:t>
+            </a:r>
+            <a:endParaRPr lang="en-US" sz="3200" dirty="0"/>
           </a:p>
         </p:txBody>
       </p:sp>
       <p:pic>
         <p:nvPicPr>
-          <p:cNvPr id="3" name="Image 0" descr="/home/claude/f4/img/minesec_sheet.png">    </p:cNvPr>
+          <p:cNvPr id="6" name="Image 0" descr="/home/claude/f4/img/v2/f4_marble.jpg">    </p:cNvPr>
           <p:cNvPicPr>
             <a:picLocks noChangeAspect="1"/>
           </p:cNvPicPr>
@@ -14080,8 +15645,8 @@
         </p:blipFill>
         <p:spPr>
           <a:xfrm>
-            <a:off x="0" y="658368"/>
-            <a:ext cx="5120640" cy="5833872"/>
+            <a:off x="5349240" y="2071212"/>
+            <a:ext cx="6659575" cy="3693983"/>
           </a:xfrm>
           <a:prstGeom prst="rect">
             <a:avLst/>
@@ -14090,14 +15655,14 @@
       </p:pic>
       <p:sp>
         <p:nvSpPr>
-          <p:cNvPr id="4" name="Text 1"/>
+          <p:cNvPr id="7" name="Text 4"/>
           <p:cNvSpPr/>
           <p:nvPr/>
         </p:nvSpPr>
         <p:spPr>
           <a:xfrm>
-            <a:off x="5349240" y="1005840"/>
-            <a:ext cx="6522415" cy="731520"/>
+            <a:off x="5349240" y="6089904"/>
+            <a:ext cx="6659575" cy="347472"/>
           </a:xfrm>
           <a:prstGeom prst="rect">
             <a:avLst/>
@@ -14106,134 +15671,24 @@
           <a:ln/>
         </p:spPr>
         <p:txBody>
-          <a:bodyPr wrap="square" lIns="0" tIns="0" rIns="0" bIns="0" rtlCol="0" anchor="ctr">
-            <a:normAutofit/>
-          </a:bodyPr>
+          <a:bodyPr wrap="square" lIns="0" tIns="0" rIns="0" bIns="0" rtlCol="0" anchor="ctr"/>
           <a:lstStyle/>
           <a:p>
             <a:pPr algn="ctr" indent="0" marL="0">
               <a:buNone/>
             </a:pPr>
             <a:r>
-              <a:rPr lang="en-US" sz="3600" b="1" dirty="0">
-                <a:solidFill>
-                  <a:srgbClr val="990011"/>
+              <a:rPr lang="en-US" sz="1600" i="1" dirty="0">
+                <a:solidFill>
+                  <a:srgbClr val="555555"/>
                 </a:solidFill>
                 <a:latin typeface="Times New Roman" pitchFamily="34" charset="0"/>
                 <a:ea typeface="Times New Roman" pitchFamily="34" charset="-122"/>
                 <a:cs typeface="Times New Roman" pitchFamily="34" charset="-120"/>
               </a:rPr>
-              <a:t>Remediation</a:t>
-            </a:r>
-            <a:endParaRPr lang="en-US" sz="3600" dirty="0"/>
-          </a:p>
-        </p:txBody>
-      </p:sp>
-      <p:sp>
-        <p:nvSpPr>
-          <p:cNvPr id="5" name="Text 2"/>
-          <p:cNvSpPr/>
-          <p:nvPr/>
-        </p:nvSpPr>
-        <p:spPr>
-          <a:xfrm>
-            <a:off x="5349240" y="1783080"/>
-            <a:ext cx="6522415" cy="4663440"/>
-          </a:xfrm>
-          <a:prstGeom prst="rect">
-            <a:avLst/>
-          </a:prstGeom>
-          <a:noFill/>
-          <a:ln/>
-        </p:spPr>
-        <p:txBody>
-          <a:bodyPr wrap="square" lIns="0" tIns="0" rIns="0" bIns="0" rtlCol="0" anchor="t"/>
-          <a:lstStyle/>
-          <a:p>
-            <a:pPr algn="l" indent="0" marL="0">
-              <a:spcAft>
-                <a:spcPts val="800"/>
-              </a:spcAft>
-              <a:buNone/>
-            </a:pPr>
-            <a:r>
-              <a:rPr lang="en-US" sz="4000" b="1" dirty="0">
-                <a:solidFill>
-                  <a:srgbClr val="111111"/>
-                </a:solidFill>
-                <a:latin typeface="Times New Roman" pitchFamily="34" charset="0"/>
-                <a:ea typeface="Times New Roman" pitchFamily="34" charset="-122"/>
-                <a:cs typeface="Times New Roman" pitchFamily="34" charset="-120"/>
-              </a:rPr>
-              <a:t>Fill in the blanks:</a:t>
-            </a:r>
-            <a:endParaRPr lang="en-US" sz="4000" dirty="0"/>
-          </a:p>
-          <a:p>
-            <a:pPr algn="l" marL="342900" indent="-342900">
-              <a:spcAft>
-                <a:spcPts val="800"/>
-              </a:spcAft>
-              <a:buSzPct val="100000"/>
-              <a:buFont typeface="+mj-lt"/>
-              <a:buAutoNum type="arabicPeriod" startAt="1"/>
-            </a:pPr>
-            <a:r>
-              <a:rPr lang="en-US" sz="4000" dirty="0">
-                <a:solidFill>
-                  <a:srgbClr val="111111"/>
-                </a:solidFill>
-                <a:latin typeface="Times New Roman" pitchFamily="34" charset="0"/>
-                <a:ea typeface="Times New Roman" pitchFamily="34" charset="-122"/>
-                <a:cs typeface="Times New Roman" pitchFamily="34" charset="-120"/>
-              </a:rPr>
-              <a:t>Granite is an ______ rock.</a:t>
-            </a:r>
-            <a:endParaRPr lang="en-US" sz="4000" dirty="0"/>
-          </a:p>
-          <a:p>
-            <a:pPr algn="l" marL="342900" indent="-342900">
-              <a:spcAft>
-                <a:spcPts val="800"/>
-              </a:spcAft>
-              <a:buSzPct val="100000"/>
-              <a:buFont typeface="+mj-lt"/>
-              <a:buAutoNum type="arabicPeriod" startAt="1"/>
-            </a:pPr>
-            <a:r>
-              <a:rPr lang="en-US" sz="4000" dirty="0">
-                <a:solidFill>
-                  <a:srgbClr val="111111"/>
-                </a:solidFill>
-                <a:latin typeface="Times New Roman" pitchFamily="34" charset="0"/>
-                <a:ea typeface="Times New Roman" pitchFamily="34" charset="-122"/>
-                <a:cs typeface="Times New Roman" pitchFamily="34" charset="-120"/>
-              </a:rPr>
-              <a:t>Rocks formed from layers are ______ rocks.</a:t>
-            </a:r>
-            <a:endParaRPr lang="en-US" sz="4000" dirty="0"/>
-          </a:p>
-          <a:p>
-            <a:pPr algn="l" marL="342900" indent="-342900">
-              <a:spcAft>
-                <a:spcPts val="800"/>
-              </a:spcAft>
-              <a:buSzPct val="100000"/>
-              <a:buFont typeface="+mj-lt"/>
-              <a:buAutoNum type="arabicPeriod" startAt="1"/>
-            </a:pPr>
-            <a:r>
-              <a:rPr lang="en-US" sz="4000" dirty="0">
-                <a:solidFill>
-                  <a:srgbClr val="111111"/>
-                </a:solidFill>
-                <a:latin typeface="Times New Roman" pitchFamily="34" charset="0"/>
-                <a:ea typeface="Times New Roman" pitchFamily="34" charset="-122"/>
-                <a:cs typeface="Times New Roman" pitchFamily="34" charset="-120"/>
-              </a:rPr>
-              <a:t>Heat and pressure make ______ rocks.</a:t>
-            </a:r>
-            <a:endParaRPr lang="en-US" sz="4000" dirty="0"/>
+              <a:t>Illustration: marble, a metamorphic rock</a:t>
+            </a:r>
+            <a:endParaRPr lang="en-US" sz="1600" dirty="0"/>
           </a:p>
         </p:txBody>
       </p:sp>
@@ -14582,7 +16037,7 @@
                 <a:ea typeface="Calibri" pitchFamily="34" charset="-122"/>
                 <a:cs typeface="Calibri" pitchFamily="34" charset="-120"/>
               </a:rPr>
-              <a:t>HOMEWORK</a:t>
+              <a:t>BOARD SUMMARY</a:t>
             </a:r>
             <a:endParaRPr lang="en-US" sz="1400" dirty="0"/>
           </a:p>
@@ -14647,7 +16102,7 @@
                 <a:ea typeface="Times New Roman" pitchFamily="34" charset="-122"/>
                 <a:cs typeface="Times New Roman" pitchFamily="34" charset="-120"/>
               </a:rPr>
-              <a:t>Homework</a:t>
+              <a:t>1. Classification of Rocks according to Origin</a:t>
             </a:r>
             <a:endParaRPr lang="en-US" sz="3600" dirty="0"/>
           </a:p>
@@ -14661,8 +16116,47 @@
         </p:nvSpPr>
         <p:spPr>
           <a:xfrm>
-            <a:off x="5349240" y="1783080"/>
-            <a:ext cx="6522415" cy="4663440"/>
+            <a:off x="5349240" y="1737360"/>
+            <a:ext cx="6522415" cy="457200"/>
+          </a:xfrm>
+          <a:prstGeom prst="rect">
+            <a:avLst/>
+          </a:prstGeom>
+          <a:noFill/>
+          <a:ln/>
+        </p:spPr>
+        <p:txBody>
+          <a:bodyPr wrap="square" lIns="0" tIns="0" rIns="0" bIns="0" rtlCol="0" anchor="ctr"/>
+          <a:lstStyle/>
+          <a:p>
+            <a:pPr algn="l" indent="0" marL="0">
+              <a:buNone/>
+            </a:pPr>
+            <a:r>
+              <a:rPr lang="en-US" sz="3200" b="1" dirty="0">
+                <a:solidFill>
+                  <a:srgbClr val="990011"/>
+                </a:solidFill>
+                <a:latin typeface="Times New Roman" pitchFamily="34" charset="0"/>
+                <a:ea typeface="Times New Roman" pitchFamily="34" charset="-122"/>
+                <a:cs typeface="Times New Roman" pitchFamily="34" charset="-120"/>
+              </a:rPr>
+              <a:t>C) Metamorphic Rocks</a:t>
+            </a:r>
+            <a:endParaRPr lang="en-US" sz="3200" dirty="0"/>
+          </a:p>
+        </p:txBody>
+      </p:sp>
+      <p:sp>
+        <p:nvSpPr>
+          <p:cNvPr id="6" name="Text 3"/>
+          <p:cNvSpPr/>
+          <p:nvPr/>
+        </p:nvSpPr>
+        <p:spPr>
+          <a:xfrm>
+            <a:off x="5349240" y="2240280"/>
+            <a:ext cx="6522415" cy="4206240"/>
           </a:xfrm>
           <a:prstGeom prst="rect">
             <a:avLst/>
@@ -14681,7 +16175,7 @@
               <a:buNone/>
             </a:pPr>
             <a:r>
-              <a:rPr lang="en-US" sz="4000" dirty="0">
+              <a:rPr lang="en-US" sz="4000" b="1" dirty="0">
                 <a:solidFill>
                   <a:srgbClr val="111111"/>
                 </a:solidFill>
@@ -14689,7 +16183,61 @@
                 <a:ea typeface="Times New Roman" pitchFamily="34" charset="-122"/>
                 <a:cs typeface="Times New Roman" pitchFamily="34" charset="-120"/>
               </a:rPr>
-              <a:t>Look at a map of the world. Cut out, or trace, Africa and South America and try to fit their coasts together. Write what you notice.</a:t>
+              <a:t>Hardness: </a:t>
+            </a:r>
+            <a:pPr algn="l" indent="0" marL="0">
+              <a:spcAft>
+                <a:spcPts val="800"/>
+              </a:spcAft>
+              <a:buNone/>
+            </a:pPr>
+            <a:r>
+              <a:rPr lang="en-US" sz="4000" dirty="0">
+                <a:solidFill>
+                  <a:srgbClr val="111111"/>
+                </a:solidFill>
+                <a:latin typeface="Times New Roman" pitchFamily="34" charset="0"/>
+                <a:ea typeface="Times New Roman" pitchFamily="34" charset="-122"/>
+                <a:cs typeface="Times New Roman" pitchFamily="34" charset="-120"/>
+              </a:rPr>
+              <a:t>They are usually harder and more compact than the original rock.</a:t>
+            </a:r>
+            <a:endParaRPr lang="en-US" sz="4000" dirty="0"/>
+          </a:p>
+          <a:p>
+            <a:pPr algn="l" indent="0" marL="0">
+              <a:spcAft>
+                <a:spcPts val="800"/>
+              </a:spcAft>
+              <a:buNone/>
+            </a:pPr>
+            <a:r>
+              <a:rPr lang="en-US" sz="4000" b="1" dirty="0">
+                <a:solidFill>
+                  <a:srgbClr val="111111"/>
+                </a:solidFill>
+                <a:latin typeface="Times New Roman" pitchFamily="34" charset="0"/>
+                <a:ea typeface="Times New Roman" pitchFamily="34" charset="-122"/>
+                <a:cs typeface="Times New Roman" pitchFamily="34" charset="-120"/>
+              </a:rPr>
+              <a:t>Bands: </a:t>
+            </a:r>
+            <a:pPr algn="l" indent="0" marL="0">
+              <a:spcAft>
+                <a:spcPts val="800"/>
+              </a:spcAft>
+              <a:buNone/>
+            </a:pPr>
+            <a:r>
+              <a:rPr lang="en-US" sz="4000" dirty="0">
+                <a:solidFill>
+                  <a:srgbClr val="111111"/>
+                </a:solidFill>
+                <a:latin typeface="Times New Roman" pitchFamily="34" charset="0"/>
+                <a:ea typeface="Times New Roman" pitchFamily="34" charset="-122"/>
+                <a:cs typeface="Times New Roman" pitchFamily="34" charset="-120"/>
+              </a:rPr>
+              <a:t>Many of them show bands or thin sheets.</a:t>
             </a:r>
             <a:endParaRPr lang="en-US" sz="4000" dirty="0"/>
           </a:p>
@@ -14801,7 +16349,7 @@
                 <a:ea typeface="Calibri" pitchFamily="34" charset="-122"/>
                 <a:cs typeface="Calibri" pitchFamily="34" charset="-120"/>
               </a:rPr>
-              <a:t>NEXT LESSON</a:t>
+              <a:t>BOARD SUMMARY</a:t>
             </a:r>
             <a:endParaRPr lang="en-US" sz="1400" dirty="0"/>
           </a:p>
@@ -14866,7 +16414,7 @@
                 <a:ea typeface="Times New Roman" pitchFamily="34" charset="-122"/>
                 <a:cs typeface="Times New Roman" pitchFamily="34" charset="-120"/>
               </a:rPr>
-              <a:t>Next Lesson</a:t>
+              <a:t>1. Classification of Rocks according to Origin</a:t>
             </a:r>
             <a:endParaRPr lang="en-US" sz="3600" dirty="0"/>
           </a:p>
@@ -14880,8 +16428,8 @@
         </p:nvSpPr>
         <p:spPr>
           <a:xfrm>
-            <a:off x="5349240" y="1783080"/>
-            <a:ext cx="6522415" cy="4663440"/>
+            <a:off x="5349240" y="1737360"/>
+            <a:ext cx="6522415" cy="457200"/>
           </a:xfrm>
           <a:prstGeom prst="rect">
             <a:avLst/>
@@ -14893,7 +16441,46 @@
           <a:bodyPr wrap="square" lIns="0" tIns="0" rIns="0" bIns="0" rtlCol="0" anchor="ctr"/>
           <a:lstStyle/>
           <a:p>
-            <a:pPr algn="ctr" indent="0" marL="0">
+            <a:pPr algn="l" indent="0" marL="0">
+              <a:buNone/>
+            </a:pPr>
+            <a:r>
+              <a:rPr lang="en-US" sz="3200" b="1" dirty="0">
+                <a:solidFill>
+                  <a:srgbClr val="990011"/>
+                </a:solidFill>
+                <a:latin typeface="Times New Roman" pitchFamily="34" charset="0"/>
+                <a:ea typeface="Times New Roman" pitchFamily="34" charset="-122"/>
+                <a:cs typeface="Times New Roman" pitchFamily="34" charset="-120"/>
+              </a:rPr>
+              <a:t>C) Metamorphic Rocks (continued)</a:t>
+            </a:r>
+            <a:endParaRPr lang="en-US" sz="3200" dirty="0"/>
+          </a:p>
+        </p:txBody>
+      </p:sp>
+      <p:sp>
+        <p:nvSpPr>
+          <p:cNvPr id="6" name="Text 3"/>
+          <p:cNvSpPr/>
+          <p:nvPr/>
+        </p:nvSpPr>
+        <p:spPr>
+          <a:xfrm>
+            <a:off x="5349240" y="2240280"/>
+            <a:ext cx="6522415" cy="4206240"/>
+          </a:xfrm>
+          <a:prstGeom prst="rect">
+            <a:avLst/>
+          </a:prstGeom>
+          <a:noFill/>
+          <a:ln/>
+        </p:spPr>
+        <p:txBody>
+          <a:bodyPr wrap="square" lIns="0" tIns="0" rIns="0" bIns="0" rtlCol="0" anchor="t"/>
+          <a:lstStyle/>
+          <a:p>
+            <a:pPr algn="l" indent="0" marL="0">
               <a:spcAft>
                 <a:spcPts val="800"/>
               </a:spcAft>
@@ -14908,27 +16495,24 @@
                 <a:ea typeface="Times New Roman" pitchFamily="34" charset="-122"/>
                 <a:cs typeface="Times New Roman" pitchFamily="34" charset="-120"/>
               </a:rPr>
-              <a:t>Our next lesson will be on:</a:t>
-            </a:r>
-            <a:endParaRPr lang="en-US" sz="4000" dirty="0"/>
-          </a:p>
-          <a:p>
-            <a:pPr algn="ctr" indent="0" marL="0">
+              <a:t>Examples: </a:t>
+            </a:r>
+            <a:pPr algn="l" indent="0" marL="0">
               <a:spcAft>
                 <a:spcPts val="800"/>
               </a:spcAft>
               <a:buNone/>
             </a:pPr>
             <a:r>
-              <a:rPr lang="en-US" sz="4000" b="1" dirty="0">
-                <a:solidFill>
-                  <a:srgbClr val="990011"/>
+              <a:rPr lang="en-US" sz="4000" dirty="0">
+                <a:solidFill>
+                  <a:srgbClr val="111111"/>
                 </a:solidFill>
                 <a:latin typeface="Times New Roman" pitchFamily="34" charset="0"/>
                 <a:ea typeface="Times New Roman" pitchFamily="34" charset="-122"/>
                 <a:cs typeface="Times New Roman" pitchFamily="34" charset="-120"/>
               </a:rPr>
-              <a:t>Lesson 9: The Theories of the Earth's Structure: Continental Drift</a:t>
+              <a:t>Limestone becomes marble, clay becomes slate, sandstone becomes quartzite and granite becomes gneiss.</a:t>
             </a:r>
             <a:endParaRPr lang="en-US" sz="4000" dirty="0"/>
           </a:p>
@@ -15040,7 +16624,7 @@
                 <a:ea typeface="Calibri" pitchFamily="34" charset="-122"/>
                 <a:cs typeface="Calibri" pitchFamily="34" charset="-120"/>
               </a:rPr>
-              <a:t>BILINGUAL GAME</a:t>
+              <a:t>BOARD SUMMARY</a:t>
             </a:r>
             <a:endParaRPr lang="en-US" sz="1400" dirty="0"/>
           </a:p>
@@ -15054,8 +16638,8 @@
         </p:nvSpPr>
         <p:spPr>
           <a:xfrm>
-            <a:off x="457200" y="1005840"/>
-            <a:ext cx="11277295" cy="731520"/>
+            <a:off x="365760" y="1005840"/>
+            <a:ext cx="11460175" cy="731520"/>
           </a:xfrm>
           <a:prstGeom prst="rect">
             <a:avLst/>
@@ -15064,7 +16648,9 @@
           <a:ln/>
         </p:spPr>
         <p:txBody>
-          <a:bodyPr wrap="square" lIns="0" tIns="0" rIns="0" bIns="0" rtlCol="0" anchor="ctr"/>
+          <a:bodyPr wrap="square" lIns="0" tIns="0" rIns="0" bIns="0" rtlCol="0" anchor="ctr">
+            <a:normAutofit/>
+          </a:bodyPr>
           <a:lstStyle/>
           <a:p>
             <a:pPr algn="ctr" indent="0" marL="0">
@@ -15079,6 +16665,2137 @@
                 <a:ea typeface="Times New Roman" pitchFamily="34" charset="-122"/>
                 <a:cs typeface="Times New Roman" pitchFamily="34" charset="-120"/>
               </a:rPr>
+              <a:t>2. The Rock Cycle</a:t>
+            </a:r>
+            <a:endParaRPr lang="en-US" sz="3600" dirty="0"/>
+          </a:p>
+        </p:txBody>
+      </p:sp>
+      <p:sp>
+        <p:nvSpPr>
+          <p:cNvPr id="4" name="Text 2"/>
+          <p:cNvSpPr/>
+          <p:nvPr/>
+        </p:nvSpPr>
+        <p:spPr>
+          <a:xfrm>
+            <a:off x="365760" y="1783080"/>
+            <a:ext cx="4846320" cy="4617720"/>
+          </a:xfrm>
+          <a:prstGeom prst="rect">
+            <a:avLst/>
+          </a:prstGeom>
+          <a:noFill/>
+          <a:ln/>
+        </p:spPr>
+        <p:txBody>
+          <a:bodyPr wrap="square" lIns="0" tIns="0" rIns="0" bIns="0" rtlCol="0" anchor="t"/>
+          <a:lstStyle/>
+          <a:p>
+            <a:pPr algn="l" indent="0" marL="0">
+              <a:spcAft>
+                <a:spcPts val="800"/>
+              </a:spcAft>
+              <a:buNone/>
+            </a:pPr>
+            <a:r>
+              <a:rPr lang="en-US" sz="3600" i="1" dirty="0">
+                <a:solidFill>
+                  <a:srgbClr val="111111"/>
+                </a:solidFill>
+                <a:latin typeface="Times New Roman" pitchFamily="34" charset="0"/>
+                <a:ea typeface="Times New Roman" pitchFamily="34" charset="-122"/>
+                <a:cs typeface="Times New Roman" pitchFamily="34" charset="-120"/>
+              </a:rPr>
+              <a:t>The rock cycle is illustrated as follows:</a:t>
+            </a:r>
+            <a:endParaRPr lang="en-US" sz="3600" dirty="0"/>
+          </a:p>
+          <a:p>
+            <a:pPr algn="l" indent="0" marL="0">
+              <a:spcAft>
+                <a:spcPts val="800"/>
+              </a:spcAft>
+              <a:buNone/>
+            </a:pPr>
+            <a:r>
+              <a:rPr lang="en-US" sz="3600" b="1" dirty="0">
+                <a:solidFill>
+                  <a:srgbClr val="111111"/>
+                </a:solidFill>
+                <a:latin typeface="Times New Roman" pitchFamily="34" charset="0"/>
+                <a:ea typeface="Times New Roman" pitchFamily="34" charset="-122"/>
+                <a:cs typeface="Times New Roman" pitchFamily="34" charset="-120"/>
+              </a:rPr>
+              <a:t>Rock cycle: </a:t>
+            </a:r>
+            <a:pPr algn="l" indent="0" marL="0">
+              <a:spcAft>
+                <a:spcPts val="800"/>
+              </a:spcAft>
+              <a:buNone/>
+            </a:pPr>
+            <a:r>
+              <a:rPr lang="en-US" sz="3600" dirty="0">
+                <a:solidFill>
+                  <a:srgbClr val="111111"/>
+                </a:solidFill>
+                <a:latin typeface="Times New Roman" pitchFamily="34" charset="0"/>
+                <a:ea typeface="Times New Roman" pitchFamily="34" charset="-122"/>
+                <a:cs typeface="Times New Roman" pitchFamily="34" charset="-120"/>
+              </a:rPr>
+              <a:t>It is the slow process by which one type of rock changes into another type.</a:t>
+            </a:r>
+            <a:endParaRPr lang="en-US" sz="3600" dirty="0"/>
+          </a:p>
+        </p:txBody>
+      </p:sp>
+      <p:pic>
+        <p:nvPicPr>
+          <p:cNvPr id="5" name="Image 0" descr="/home/claude/f4/img/v2/rock_cycle_big.png">    </p:cNvPr>
+          <p:cNvPicPr>
+            <a:picLocks noChangeAspect="1"/>
+          </p:cNvPicPr>
+          <p:nvPr/>
+        </p:nvPicPr>
+        <p:blipFill>
+          <a:blip r:embed="rId1"/>
+          <a:stretch>
+            <a:fillRect/>
+          </a:stretch>
+        </p:blipFill>
+        <p:spPr>
+          <a:xfrm>
+            <a:off x="5349240" y="2617506"/>
+            <a:ext cx="6659575" cy="2601397"/>
+          </a:xfrm>
+          <a:prstGeom prst="rect">
+            <a:avLst/>
+          </a:prstGeom>
+        </p:spPr>
+      </p:pic>
+      <p:sp>
+        <p:nvSpPr>
+          <p:cNvPr id="6" name="Text 3"/>
+          <p:cNvSpPr/>
+          <p:nvPr/>
+        </p:nvSpPr>
+        <p:spPr>
+          <a:xfrm>
+            <a:off x="5349240" y="6089904"/>
+            <a:ext cx="6659575" cy="347472"/>
+          </a:xfrm>
+          <a:prstGeom prst="rect">
+            <a:avLst/>
+          </a:prstGeom>
+          <a:noFill/>
+          <a:ln/>
+        </p:spPr>
+        <p:txBody>
+          <a:bodyPr wrap="square" lIns="0" tIns="0" rIns="0" bIns="0" rtlCol="0" anchor="ctr"/>
+          <a:lstStyle/>
+          <a:p>
+            <a:pPr algn="ctr" indent="0" marL="0">
+              <a:buNone/>
+            </a:pPr>
+            <a:r>
+              <a:rPr lang="en-US" sz="1600" i="1" dirty="0">
+                <a:solidFill>
+                  <a:srgbClr val="555555"/>
+                </a:solidFill>
+                <a:latin typeface="Times New Roman" pitchFamily="34" charset="0"/>
+                <a:ea typeface="Times New Roman" pitchFamily="34" charset="-122"/>
+                <a:cs typeface="Times New Roman" pitchFamily="34" charset="-120"/>
+              </a:rPr>
+              <a:t>Illustration: the rock cycle</a:t>
+            </a:r>
+            <a:endParaRPr lang="en-US" sz="1600" dirty="0"/>
+          </a:p>
+        </p:txBody>
+      </p:sp>
+      <p:sp>
+        <p:nvSpPr>
+          <p:cNvPr id="25" name="Slide Number Placeholder 0"/>
+          <p:cNvSpPr>
+            <a:spLocks noGrp="1"/>
+          </p:cNvSpPr>
+          <p:nvPr>
+            <p:ph type="sldNum" sz="quarter" idx="4294967295"/>
+          </p:nvPr>
+        </p:nvSpPr>
+        <p:spPr>
+          <a:xfrm>
+            <a:off x="27432" y="91440"/>
+            <a:ext cx="585216" cy="475488"/>
+          </a:xfrm>
+          <a:prstGeom prst="rect">
+            <a:avLst/>
+          </a:prstGeom>
+          <a:extLst>
+            <a:ext uri="{C572A759-6A51-4108-AA02-DFA0A04FC94B}">
+              <ma14:wrappingTextBoxFlag xmlns:ma14="http://schemas.microsoft.com/office/mac/drawingml/2011/main" val="0"/>
+            </a:ext>
+          </a:extLst>
+        </p:spPr>
+        <p:txBody>
+          <a:bodyPr/>
+          <a:lstStyle>
+            <a:lvl1pPr>
+              <a:defRPr sz="2000">
+                <a:solidFill>
+                  <a:srgbClr val="FFFFFF"/>
+                </a:solidFill>
+                <a:latin typeface="Calibri"/>
+                <a:ea typeface="Calibri"/>
+                <a:cs typeface="Calibri"/>
+              </a:defRPr>
+            </a:lvl1pPr>
+          </a:lstStyle>
+          <a:p>
+            <a:pPr algn="ctr"/>
+            <a:fld id="{F7021451-1387-4CA6-816F-3879F97B5CBC}" type="slidenum">
+              <a:rPr b="1" lang="en-US"/>
+              <a:t>42</a:t>
+            </a:fld>
+            <a:endParaRPr lang="en-US"/>
+          </a:p>
+        </p:txBody>
+      </p:sp>
+    </p:spTree>
+  </p:cSld>
+  <p:clrMapOvr>
+    <a:masterClrMapping/>
+  </p:clrMapOvr>
+</p:sld>
+</file>
+
+<file path=ppt/slides/slide43.xml><?xml version="1.0" encoding="utf-8"?>
+<p:sld xmlns:a="http://schemas.openxmlformats.org/drawingml/2006/main" xmlns:r="http://schemas.openxmlformats.org/officeDocument/2006/relationships" xmlns:p="http://schemas.openxmlformats.org/presentationml/2006/main">
+  <p:cSld name="Slide 43">
+    <p:spTree>
+      <p:nvGrpSpPr>
+        <p:cNvPr id="1" name=""/>
+        <p:cNvGrpSpPr/>
+        <p:nvPr/>
+      </p:nvGrpSpPr>
+      <p:grpSpPr>
+        <a:xfrm>
+          <a:off x="0" y="0"/>
+          <a:ext cx="0" cy="0"/>
+          <a:chOff x="0" y="0"/>
+          <a:chExt cx="0" cy="0"/>
+        </a:xfrm>
+      </p:grpSpPr>
+      <p:sp>
+        <p:nvSpPr>
+          <p:cNvPr id="2" name="Text 0"/>
+          <p:cNvSpPr/>
+          <p:nvPr/>
+        </p:nvSpPr>
+        <p:spPr>
+          <a:xfrm>
+            <a:off x="457200" y="713232"/>
+            <a:ext cx="11368735" cy="274320"/>
+          </a:xfrm>
+          <a:prstGeom prst="rect">
+            <a:avLst/>
+          </a:prstGeom>
+          <a:noFill/>
+          <a:ln/>
+        </p:spPr>
+        <p:txBody>
+          <a:bodyPr wrap="square" lIns="0" tIns="0" rIns="0" bIns="0" rtlCol="0" anchor="ctr"/>
+          <a:lstStyle/>
+          <a:p>
+            <a:pPr algn="r" indent="0" marL="0">
+              <a:buNone/>
+            </a:pPr>
+            <a:r>
+              <a:rPr lang="en-US" sz="1400" b="1" dirty="0">
+                <a:solidFill>
+                  <a:srgbClr val="1C3F6E"/>
+                </a:solidFill>
+                <a:latin typeface="Calibri" pitchFamily="34" charset="0"/>
+                <a:ea typeface="Calibri" pitchFamily="34" charset="-122"/>
+                <a:cs typeface="Calibri" pitchFamily="34" charset="-120"/>
+              </a:rPr>
+              <a:t>FORMATIVE EVALUATION</a:t>
+            </a:r>
+            <a:endParaRPr lang="en-US" sz="1400" dirty="0"/>
+          </a:p>
+        </p:txBody>
+      </p:sp>
+      <p:pic>
+        <p:nvPicPr>
+          <p:cNvPr id="3" name="Image 0" descr="/home/claude/f4/img/minesec_sheet.png">    </p:cNvPr>
+          <p:cNvPicPr>
+            <a:picLocks noChangeAspect="1"/>
+          </p:cNvPicPr>
+          <p:nvPr/>
+        </p:nvPicPr>
+        <p:blipFill>
+          <a:blip r:embed="rId1"/>
+          <a:stretch>
+            <a:fillRect/>
+          </a:stretch>
+        </p:blipFill>
+        <p:spPr>
+          <a:xfrm>
+            <a:off x="0" y="658368"/>
+            <a:ext cx="5120640" cy="5833872"/>
+          </a:xfrm>
+          <a:prstGeom prst="rect">
+            <a:avLst/>
+          </a:prstGeom>
+        </p:spPr>
+      </p:pic>
+      <p:sp>
+        <p:nvSpPr>
+          <p:cNvPr id="4" name="Text 1"/>
+          <p:cNvSpPr/>
+          <p:nvPr/>
+        </p:nvSpPr>
+        <p:spPr>
+          <a:xfrm>
+            <a:off x="5349240" y="1005840"/>
+            <a:ext cx="6522415" cy="731520"/>
+          </a:xfrm>
+          <a:prstGeom prst="rect">
+            <a:avLst/>
+          </a:prstGeom>
+          <a:noFill/>
+          <a:ln/>
+        </p:spPr>
+        <p:txBody>
+          <a:bodyPr wrap="square" lIns="0" tIns="0" rIns="0" bIns="0" rtlCol="0" anchor="ctr">
+            <a:normAutofit/>
+          </a:bodyPr>
+          <a:lstStyle/>
+          <a:p>
+            <a:pPr algn="ctr" indent="0" marL="0">
+              <a:buNone/>
+            </a:pPr>
+            <a:r>
+              <a:rPr lang="en-US" sz="3600" b="1" dirty="0">
+                <a:solidFill>
+                  <a:srgbClr val="990011"/>
+                </a:solidFill>
+                <a:latin typeface="Times New Roman" pitchFamily="34" charset="0"/>
+                <a:ea typeface="Times New Roman" pitchFamily="34" charset="-122"/>
+                <a:cs typeface="Times New Roman" pitchFamily="34" charset="-120"/>
+              </a:rPr>
+              <a:t>Evaluation 1</a:t>
+            </a:r>
+            <a:endParaRPr lang="en-US" sz="3600" dirty="0"/>
+          </a:p>
+        </p:txBody>
+      </p:sp>
+      <p:sp>
+        <p:nvSpPr>
+          <p:cNvPr id="5" name="Text 2"/>
+          <p:cNvSpPr/>
+          <p:nvPr/>
+        </p:nvSpPr>
+        <p:spPr>
+          <a:xfrm>
+            <a:off x="5349240" y="1783080"/>
+            <a:ext cx="6522415" cy="4663440"/>
+          </a:xfrm>
+          <a:prstGeom prst="rect">
+            <a:avLst/>
+          </a:prstGeom>
+          <a:noFill/>
+          <a:ln/>
+        </p:spPr>
+        <p:txBody>
+          <a:bodyPr wrap="square" lIns="0" tIns="0" rIns="0" bIns="0" rtlCol="0" anchor="t"/>
+          <a:lstStyle/>
+          <a:p>
+            <a:pPr algn="l" indent="0" marL="0">
+              <a:spcAft>
+                <a:spcPts val="800"/>
+              </a:spcAft>
+              <a:buNone/>
+            </a:pPr>
+            <a:r>
+              <a:rPr lang="en-US" sz="4000" dirty="0">
+                <a:solidFill>
+                  <a:srgbClr val="111111"/>
+                </a:solidFill>
+                <a:latin typeface="Times New Roman" pitchFamily="34" charset="0"/>
+                <a:ea typeface="Times New Roman" pitchFamily="34" charset="-122"/>
+                <a:cs typeface="Times New Roman" pitchFamily="34" charset="-120"/>
+              </a:rPr>
+              <a:t>How are igneous rocks formed?</a:t>
+            </a:r>
+            <a:endParaRPr lang="en-US" sz="4000" dirty="0"/>
+          </a:p>
+        </p:txBody>
+      </p:sp>
+      <p:sp>
+        <p:nvSpPr>
+          <p:cNvPr id="25" name="Slide Number Placeholder 0"/>
+          <p:cNvSpPr>
+            <a:spLocks noGrp="1"/>
+          </p:cNvSpPr>
+          <p:nvPr>
+            <p:ph type="sldNum" sz="quarter" idx="4294967295"/>
+          </p:nvPr>
+        </p:nvSpPr>
+        <p:spPr>
+          <a:xfrm>
+            <a:off x="27432" y="91440"/>
+            <a:ext cx="585216" cy="475488"/>
+          </a:xfrm>
+          <a:prstGeom prst="rect">
+            <a:avLst/>
+          </a:prstGeom>
+          <a:extLst>
+            <a:ext uri="{C572A759-6A51-4108-AA02-DFA0A04FC94B}">
+              <ma14:wrappingTextBoxFlag xmlns:ma14="http://schemas.microsoft.com/office/mac/drawingml/2011/main" val="0"/>
+            </a:ext>
+          </a:extLst>
+        </p:spPr>
+        <p:txBody>
+          <a:bodyPr/>
+          <a:lstStyle>
+            <a:lvl1pPr>
+              <a:defRPr sz="2000">
+                <a:solidFill>
+                  <a:srgbClr val="FFFFFF"/>
+                </a:solidFill>
+                <a:latin typeface="Calibri"/>
+                <a:ea typeface="Calibri"/>
+                <a:cs typeface="Calibri"/>
+              </a:defRPr>
+            </a:lvl1pPr>
+          </a:lstStyle>
+          <a:p>
+            <a:pPr algn="ctr"/>
+            <a:fld id="{F7021451-1387-4CA6-816F-3879F97B5CBC}" type="slidenum">
+              <a:rPr b="1" lang="en-US"/>
+              <a:t>43</a:t>
+            </a:fld>
+            <a:endParaRPr lang="en-US"/>
+          </a:p>
+        </p:txBody>
+      </p:sp>
+    </p:spTree>
+  </p:cSld>
+  <p:clrMapOvr>
+    <a:masterClrMapping/>
+  </p:clrMapOvr>
+</p:sld>
+</file>
+
+<file path=ppt/slides/slide44.xml><?xml version="1.0" encoding="utf-8"?>
+<p:sld xmlns:a="http://schemas.openxmlformats.org/drawingml/2006/main" xmlns:r="http://schemas.openxmlformats.org/officeDocument/2006/relationships" xmlns:p="http://schemas.openxmlformats.org/presentationml/2006/main">
+  <p:cSld name="Slide 44">
+    <p:spTree>
+      <p:nvGrpSpPr>
+        <p:cNvPr id="1" name=""/>
+        <p:cNvGrpSpPr/>
+        <p:nvPr/>
+      </p:nvGrpSpPr>
+      <p:grpSpPr>
+        <a:xfrm>
+          <a:off x="0" y="0"/>
+          <a:ext cx="0" cy="0"/>
+          <a:chOff x="0" y="0"/>
+          <a:chExt cx="0" cy="0"/>
+        </a:xfrm>
+      </p:grpSpPr>
+      <p:sp>
+        <p:nvSpPr>
+          <p:cNvPr id="2" name="Text 0"/>
+          <p:cNvSpPr/>
+          <p:nvPr/>
+        </p:nvSpPr>
+        <p:spPr>
+          <a:xfrm>
+            <a:off x="457200" y="713232"/>
+            <a:ext cx="11368735" cy="274320"/>
+          </a:xfrm>
+          <a:prstGeom prst="rect">
+            <a:avLst/>
+          </a:prstGeom>
+          <a:noFill/>
+          <a:ln/>
+        </p:spPr>
+        <p:txBody>
+          <a:bodyPr wrap="square" lIns="0" tIns="0" rIns="0" bIns="0" rtlCol="0" anchor="ctr"/>
+          <a:lstStyle/>
+          <a:p>
+            <a:pPr algn="r" indent="0" marL="0">
+              <a:buNone/>
+            </a:pPr>
+            <a:r>
+              <a:rPr lang="en-US" sz="1400" b="1" dirty="0">
+                <a:solidFill>
+                  <a:srgbClr val="1C3F6E"/>
+                </a:solidFill>
+                <a:latin typeface="Calibri" pitchFamily="34" charset="0"/>
+                <a:ea typeface="Calibri" pitchFamily="34" charset="-122"/>
+                <a:cs typeface="Calibri" pitchFamily="34" charset="-120"/>
+              </a:rPr>
+              <a:t>FORMATIVE EVALUATION</a:t>
+            </a:r>
+            <a:endParaRPr lang="en-US" sz="1400" dirty="0"/>
+          </a:p>
+        </p:txBody>
+      </p:sp>
+      <p:pic>
+        <p:nvPicPr>
+          <p:cNvPr id="3" name="Image 0" descr="/home/claude/f4/img/minesec_sheet.png">    </p:cNvPr>
+          <p:cNvPicPr>
+            <a:picLocks noChangeAspect="1"/>
+          </p:cNvPicPr>
+          <p:nvPr/>
+        </p:nvPicPr>
+        <p:blipFill>
+          <a:blip r:embed="rId1"/>
+          <a:stretch>
+            <a:fillRect/>
+          </a:stretch>
+        </p:blipFill>
+        <p:spPr>
+          <a:xfrm>
+            <a:off x="0" y="658368"/>
+            <a:ext cx="5120640" cy="5833872"/>
+          </a:xfrm>
+          <a:prstGeom prst="rect">
+            <a:avLst/>
+          </a:prstGeom>
+        </p:spPr>
+      </p:pic>
+      <p:sp>
+        <p:nvSpPr>
+          <p:cNvPr id="4" name="Text 1"/>
+          <p:cNvSpPr/>
+          <p:nvPr/>
+        </p:nvSpPr>
+        <p:spPr>
+          <a:xfrm>
+            <a:off x="5349240" y="1005840"/>
+            <a:ext cx="6522415" cy="731520"/>
+          </a:xfrm>
+          <a:prstGeom prst="rect">
+            <a:avLst/>
+          </a:prstGeom>
+          <a:noFill/>
+          <a:ln/>
+        </p:spPr>
+        <p:txBody>
+          <a:bodyPr wrap="square" lIns="0" tIns="0" rIns="0" bIns="0" rtlCol="0" anchor="ctr">
+            <a:normAutofit/>
+          </a:bodyPr>
+          <a:lstStyle/>
+          <a:p>
+            <a:pPr algn="ctr" indent="0" marL="0">
+              <a:buNone/>
+            </a:pPr>
+            <a:r>
+              <a:rPr lang="en-US" sz="3600" b="1" dirty="0">
+                <a:solidFill>
+                  <a:srgbClr val="990011"/>
+                </a:solidFill>
+                <a:latin typeface="Times New Roman" pitchFamily="34" charset="0"/>
+                <a:ea typeface="Times New Roman" pitchFamily="34" charset="-122"/>
+                <a:cs typeface="Times New Roman" pitchFamily="34" charset="-120"/>
+              </a:rPr>
+              <a:t>Expected Answer</a:t>
+            </a:r>
+            <a:endParaRPr lang="en-US" sz="3600" dirty="0"/>
+          </a:p>
+        </p:txBody>
+      </p:sp>
+      <p:sp>
+        <p:nvSpPr>
+          <p:cNvPr id="5" name="Text 2"/>
+          <p:cNvSpPr/>
+          <p:nvPr/>
+        </p:nvSpPr>
+        <p:spPr>
+          <a:xfrm>
+            <a:off x="5349240" y="1783080"/>
+            <a:ext cx="6522415" cy="4663440"/>
+          </a:xfrm>
+          <a:prstGeom prst="rect">
+            <a:avLst/>
+          </a:prstGeom>
+          <a:noFill/>
+          <a:ln/>
+        </p:spPr>
+        <p:txBody>
+          <a:bodyPr wrap="square" lIns="0" tIns="0" rIns="0" bIns="0" rtlCol="0" anchor="t"/>
+          <a:lstStyle/>
+          <a:p>
+            <a:pPr algn="l" indent="0" marL="0">
+              <a:spcAft>
+                <a:spcPts val="800"/>
+              </a:spcAft>
+              <a:buNone/>
+            </a:pPr>
+            <a:r>
+              <a:rPr lang="en-US" sz="4000" dirty="0">
+                <a:solidFill>
+                  <a:srgbClr val="111111"/>
+                </a:solidFill>
+                <a:latin typeface="Times New Roman" pitchFamily="34" charset="0"/>
+                <a:ea typeface="Times New Roman" pitchFamily="34" charset="-122"/>
+                <a:cs typeface="Times New Roman" pitchFamily="34" charset="-120"/>
+              </a:rPr>
+              <a:t>When magma or lava cools and becomes hard.</a:t>
+            </a:r>
+            <a:endParaRPr lang="en-US" sz="4000" dirty="0"/>
+          </a:p>
+        </p:txBody>
+      </p:sp>
+      <p:sp>
+        <p:nvSpPr>
+          <p:cNvPr id="25" name="Slide Number Placeholder 0"/>
+          <p:cNvSpPr>
+            <a:spLocks noGrp="1"/>
+          </p:cNvSpPr>
+          <p:nvPr>
+            <p:ph type="sldNum" sz="quarter" idx="4294967295"/>
+          </p:nvPr>
+        </p:nvSpPr>
+        <p:spPr>
+          <a:xfrm>
+            <a:off x="27432" y="91440"/>
+            <a:ext cx="585216" cy="475488"/>
+          </a:xfrm>
+          <a:prstGeom prst="rect">
+            <a:avLst/>
+          </a:prstGeom>
+          <a:extLst>
+            <a:ext uri="{C572A759-6A51-4108-AA02-DFA0A04FC94B}">
+              <ma14:wrappingTextBoxFlag xmlns:ma14="http://schemas.microsoft.com/office/mac/drawingml/2011/main" val="0"/>
+            </a:ext>
+          </a:extLst>
+        </p:spPr>
+        <p:txBody>
+          <a:bodyPr/>
+          <a:lstStyle>
+            <a:lvl1pPr>
+              <a:defRPr sz="2000">
+                <a:solidFill>
+                  <a:srgbClr val="FFFFFF"/>
+                </a:solidFill>
+                <a:latin typeface="Calibri"/>
+                <a:ea typeface="Calibri"/>
+                <a:cs typeface="Calibri"/>
+              </a:defRPr>
+            </a:lvl1pPr>
+          </a:lstStyle>
+          <a:p>
+            <a:pPr algn="ctr"/>
+            <a:fld id="{F7021451-1387-4CA6-816F-3879F97B5CBC}" type="slidenum">
+              <a:rPr b="1" lang="en-US"/>
+              <a:t>44</a:t>
+            </a:fld>
+            <a:endParaRPr lang="en-US"/>
+          </a:p>
+        </p:txBody>
+      </p:sp>
+    </p:spTree>
+  </p:cSld>
+  <p:clrMapOvr>
+    <a:masterClrMapping/>
+  </p:clrMapOvr>
+</p:sld>
+</file>
+
+<file path=ppt/slides/slide45.xml><?xml version="1.0" encoding="utf-8"?>
+<p:sld xmlns:a="http://schemas.openxmlformats.org/drawingml/2006/main" xmlns:r="http://schemas.openxmlformats.org/officeDocument/2006/relationships" xmlns:p="http://schemas.openxmlformats.org/presentationml/2006/main">
+  <p:cSld name="Slide 45">
+    <p:spTree>
+      <p:nvGrpSpPr>
+        <p:cNvPr id="1" name=""/>
+        <p:cNvGrpSpPr/>
+        <p:nvPr/>
+      </p:nvGrpSpPr>
+      <p:grpSpPr>
+        <a:xfrm>
+          <a:off x="0" y="0"/>
+          <a:ext cx="0" cy="0"/>
+          <a:chOff x="0" y="0"/>
+          <a:chExt cx="0" cy="0"/>
+        </a:xfrm>
+      </p:grpSpPr>
+      <p:sp>
+        <p:nvSpPr>
+          <p:cNvPr id="2" name="Text 0"/>
+          <p:cNvSpPr/>
+          <p:nvPr/>
+        </p:nvSpPr>
+        <p:spPr>
+          <a:xfrm>
+            <a:off x="457200" y="713232"/>
+            <a:ext cx="11368735" cy="274320"/>
+          </a:xfrm>
+          <a:prstGeom prst="rect">
+            <a:avLst/>
+          </a:prstGeom>
+          <a:noFill/>
+          <a:ln/>
+        </p:spPr>
+        <p:txBody>
+          <a:bodyPr wrap="square" lIns="0" tIns="0" rIns="0" bIns="0" rtlCol="0" anchor="ctr"/>
+          <a:lstStyle/>
+          <a:p>
+            <a:pPr algn="r" indent="0" marL="0">
+              <a:buNone/>
+            </a:pPr>
+            <a:r>
+              <a:rPr lang="en-US" sz="1400" b="1" dirty="0">
+                <a:solidFill>
+                  <a:srgbClr val="1C3F6E"/>
+                </a:solidFill>
+                <a:latin typeface="Calibri" pitchFamily="34" charset="0"/>
+                <a:ea typeface="Calibri" pitchFamily="34" charset="-122"/>
+                <a:cs typeface="Calibri" pitchFamily="34" charset="-120"/>
+              </a:rPr>
+              <a:t>FORMATIVE EVALUATION</a:t>
+            </a:r>
+            <a:endParaRPr lang="en-US" sz="1400" dirty="0"/>
+          </a:p>
+        </p:txBody>
+      </p:sp>
+      <p:pic>
+        <p:nvPicPr>
+          <p:cNvPr id="3" name="Image 0" descr="/home/claude/f4/img/minesec_sheet.png">    </p:cNvPr>
+          <p:cNvPicPr>
+            <a:picLocks noChangeAspect="1"/>
+          </p:cNvPicPr>
+          <p:nvPr/>
+        </p:nvPicPr>
+        <p:blipFill>
+          <a:blip r:embed="rId1"/>
+          <a:stretch>
+            <a:fillRect/>
+          </a:stretch>
+        </p:blipFill>
+        <p:spPr>
+          <a:xfrm>
+            <a:off x="0" y="658368"/>
+            <a:ext cx="5120640" cy="5833872"/>
+          </a:xfrm>
+          <a:prstGeom prst="rect">
+            <a:avLst/>
+          </a:prstGeom>
+        </p:spPr>
+      </p:pic>
+      <p:sp>
+        <p:nvSpPr>
+          <p:cNvPr id="4" name="Text 1"/>
+          <p:cNvSpPr/>
+          <p:nvPr/>
+        </p:nvSpPr>
+        <p:spPr>
+          <a:xfrm>
+            <a:off x="5349240" y="1005840"/>
+            <a:ext cx="6522415" cy="731520"/>
+          </a:xfrm>
+          <a:prstGeom prst="rect">
+            <a:avLst/>
+          </a:prstGeom>
+          <a:noFill/>
+          <a:ln/>
+        </p:spPr>
+        <p:txBody>
+          <a:bodyPr wrap="square" lIns="0" tIns="0" rIns="0" bIns="0" rtlCol="0" anchor="ctr">
+            <a:normAutofit/>
+          </a:bodyPr>
+          <a:lstStyle/>
+          <a:p>
+            <a:pPr algn="ctr" indent="0" marL="0">
+              <a:buNone/>
+            </a:pPr>
+            <a:r>
+              <a:rPr lang="en-US" sz="3600" b="1" dirty="0">
+                <a:solidFill>
+                  <a:srgbClr val="990011"/>
+                </a:solidFill>
+                <a:latin typeface="Times New Roman" pitchFamily="34" charset="0"/>
+                <a:ea typeface="Times New Roman" pitchFamily="34" charset="-122"/>
+                <a:cs typeface="Times New Roman" pitchFamily="34" charset="-120"/>
+              </a:rPr>
+              <a:t>Evaluation 2</a:t>
+            </a:r>
+            <a:endParaRPr lang="en-US" sz="3600" dirty="0"/>
+          </a:p>
+        </p:txBody>
+      </p:sp>
+      <p:sp>
+        <p:nvSpPr>
+          <p:cNvPr id="5" name="Text 2"/>
+          <p:cNvSpPr/>
+          <p:nvPr/>
+        </p:nvSpPr>
+        <p:spPr>
+          <a:xfrm>
+            <a:off x="5349240" y="1783080"/>
+            <a:ext cx="6522415" cy="4663440"/>
+          </a:xfrm>
+          <a:prstGeom prst="rect">
+            <a:avLst/>
+          </a:prstGeom>
+          <a:noFill/>
+          <a:ln/>
+        </p:spPr>
+        <p:txBody>
+          <a:bodyPr wrap="square" lIns="0" tIns="0" rIns="0" bIns="0" rtlCol="0" anchor="t"/>
+          <a:lstStyle/>
+          <a:p>
+            <a:pPr algn="l" indent="0" marL="0">
+              <a:spcAft>
+                <a:spcPts val="800"/>
+              </a:spcAft>
+              <a:buNone/>
+            </a:pPr>
+            <a:r>
+              <a:rPr lang="en-US" sz="4000" dirty="0">
+                <a:solidFill>
+                  <a:srgbClr val="111111"/>
+                </a:solidFill>
+                <a:latin typeface="Times New Roman" pitchFamily="34" charset="0"/>
+                <a:ea typeface="Times New Roman" pitchFamily="34" charset="-122"/>
+                <a:cs typeface="Times New Roman" pitchFamily="34" charset="-120"/>
+              </a:rPr>
+              <a:t>Give one example of a metamorphic rock.</a:t>
+            </a:r>
+            <a:endParaRPr lang="en-US" sz="4000" dirty="0"/>
+          </a:p>
+        </p:txBody>
+      </p:sp>
+      <p:sp>
+        <p:nvSpPr>
+          <p:cNvPr id="25" name="Slide Number Placeholder 0"/>
+          <p:cNvSpPr>
+            <a:spLocks noGrp="1"/>
+          </p:cNvSpPr>
+          <p:nvPr>
+            <p:ph type="sldNum" sz="quarter" idx="4294967295"/>
+          </p:nvPr>
+        </p:nvSpPr>
+        <p:spPr>
+          <a:xfrm>
+            <a:off x="27432" y="91440"/>
+            <a:ext cx="585216" cy="475488"/>
+          </a:xfrm>
+          <a:prstGeom prst="rect">
+            <a:avLst/>
+          </a:prstGeom>
+          <a:extLst>
+            <a:ext uri="{C572A759-6A51-4108-AA02-DFA0A04FC94B}">
+              <ma14:wrappingTextBoxFlag xmlns:ma14="http://schemas.microsoft.com/office/mac/drawingml/2011/main" val="0"/>
+            </a:ext>
+          </a:extLst>
+        </p:spPr>
+        <p:txBody>
+          <a:bodyPr/>
+          <a:lstStyle>
+            <a:lvl1pPr>
+              <a:defRPr sz="2000">
+                <a:solidFill>
+                  <a:srgbClr val="FFFFFF"/>
+                </a:solidFill>
+                <a:latin typeface="Calibri"/>
+                <a:ea typeface="Calibri"/>
+                <a:cs typeface="Calibri"/>
+              </a:defRPr>
+            </a:lvl1pPr>
+          </a:lstStyle>
+          <a:p>
+            <a:pPr algn="ctr"/>
+            <a:fld id="{F7021451-1387-4CA6-816F-3879F97B5CBC}" type="slidenum">
+              <a:rPr b="1" lang="en-US"/>
+              <a:t>45</a:t>
+            </a:fld>
+            <a:endParaRPr lang="en-US"/>
+          </a:p>
+        </p:txBody>
+      </p:sp>
+    </p:spTree>
+  </p:cSld>
+  <p:clrMapOvr>
+    <a:masterClrMapping/>
+  </p:clrMapOvr>
+</p:sld>
+</file>
+
+<file path=ppt/slides/slide46.xml><?xml version="1.0" encoding="utf-8"?>
+<p:sld xmlns:a="http://schemas.openxmlformats.org/drawingml/2006/main" xmlns:r="http://schemas.openxmlformats.org/officeDocument/2006/relationships" xmlns:p="http://schemas.openxmlformats.org/presentationml/2006/main">
+  <p:cSld name="Slide 46">
+    <p:spTree>
+      <p:nvGrpSpPr>
+        <p:cNvPr id="1" name=""/>
+        <p:cNvGrpSpPr/>
+        <p:nvPr/>
+      </p:nvGrpSpPr>
+      <p:grpSpPr>
+        <a:xfrm>
+          <a:off x="0" y="0"/>
+          <a:ext cx="0" cy="0"/>
+          <a:chOff x="0" y="0"/>
+          <a:chExt cx="0" cy="0"/>
+        </a:xfrm>
+      </p:grpSpPr>
+      <p:sp>
+        <p:nvSpPr>
+          <p:cNvPr id="2" name="Text 0"/>
+          <p:cNvSpPr/>
+          <p:nvPr/>
+        </p:nvSpPr>
+        <p:spPr>
+          <a:xfrm>
+            <a:off x="457200" y="713232"/>
+            <a:ext cx="11368735" cy="274320"/>
+          </a:xfrm>
+          <a:prstGeom prst="rect">
+            <a:avLst/>
+          </a:prstGeom>
+          <a:noFill/>
+          <a:ln/>
+        </p:spPr>
+        <p:txBody>
+          <a:bodyPr wrap="square" lIns="0" tIns="0" rIns="0" bIns="0" rtlCol="0" anchor="ctr"/>
+          <a:lstStyle/>
+          <a:p>
+            <a:pPr algn="r" indent="0" marL="0">
+              <a:buNone/>
+            </a:pPr>
+            <a:r>
+              <a:rPr lang="en-US" sz="1400" b="1" dirty="0">
+                <a:solidFill>
+                  <a:srgbClr val="1C3F6E"/>
+                </a:solidFill>
+                <a:latin typeface="Calibri" pitchFamily="34" charset="0"/>
+                <a:ea typeface="Calibri" pitchFamily="34" charset="-122"/>
+                <a:cs typeface="Calibri" pitchFamily="34" charset="-120"/>
+              </a:rPr>
+              <a:t>FORMATIVE EVALUATION</a:t>
+            </a:r>
+            <a:endParaRPr lang="en-US" sz="1400" dirty="0"/>
+          </a:p>
+        </p:txBody>
+      </p:sp>
+      <p:pic>
+        <p:nvPicPr>
+          <p:cNvPr id="3" name="Image 0" descr="/home/claude/f4/img/minesec_sheet.png">    </p:cNvPr>
+          <p:cNvPicPr>
+            <a:picLocks noChangeAspect="1"/>
+          </p:cNvPicPr>
+          <p:nvPr/>
+        </p:nvPicPr>
+        <p:blipFill>
+          <a:blip r:embed="rId1"/>
+          <a:stretch>
+            <a:fillRect/>
+          </a:stretch>
+        </p:blipFill>
+        <p:spPr>
+          <a:xfrm>
+            <a:off x="0" y="658368"/>
+            <a:ext cx="5120640" cy="5833872"/>
+          </a:xfrm>
+          <a:prstGeom prst="rect">
+            <a:avLst/>
+          </a:prstGeom>
+        </p:spPr>
+      </p:pic>
+      <p:sp>
+        <p:nvSpPr>
+          <p:cNvPr id="4" name="Text 1"/>
+          <p:cNvSpPr/>
+          <p:nvPr/>
+        </p:nvSpPr>
+        <p:spPr>
+          <a:xfrm>
+            <a:off x="5349240" y="1005840"/>
+            <a:ext cx="6522415" cy="731520"/>
+          </a:xfrm>
+          <a:prstGeom prst="rect">
+            <a:avLst/>
+          </a:prstGeom>
+          <a:noFill/>
+          <a:ln/>
+        </p:spPr>
+        <p:txBody>
+          <a:bodyPr wrap="square" lIns="0" tIns="0" rIns="0" bIns="0" rtlCol="0" anchor="ctr">
+            <a:normAutofit/>
+          </a:bodyPr>
+          <a:lstStyle/>
+          <a:p>
+            <a:pPr algn="ctr" indent="0" marL="0">
+              <a:buNone/>
+            </a:pPr>
+            <a:r>
+              <a:rPr lang="en-US" sz="3600" b="1" dirty="0">
+                <a:solidFill>
+                  <a:srgbClr val="990011"/>
+                </a:solidFill>
+                <a:latin typeface="Times New Roman" pitchFamily="34" charset="0"/>
+                <a:ea typeface="Times New Roman" pitchFamily="34" charset="-122"/>
+                <a:cs typeface="Times New Roman" pitchFamily="34" charset="-120"/>
+              </a:rPr>
+              <a:t>Expected Answer</a:t>
+            </a:r>
+            <a:endParaRPr lang="en-US" sz="3600" dirty="0"/>
+          </a:p>
+        </p:txBody>
+      </p:sp>
+      <p:sp>
+        <p:nvSpPr>
+          <p:cNvPr id="5" name="Text 2"/>
+          <p:cNvSpPr/>
+          <p:nvPr/>
+        </p:nvSpPr>
+        <p:spPr>
+          <a:xfrm>
+            <a:off x="5349240" y="1783080"/>
+            <a:ext cx="6522415" cy="4663440"/>
+          </a:xfrm>
+          <a:prstGeom prst="rect">
+            <a:avLst/>
+          </a:prstGeom>
+          <a:noFill/>
+          <a:ln/>
+        </p:spPr>
+        <p:txBody>
+          <a:bodyPr wrap="square" lIns="0" tIns="0" rIns="0" bIns="0" rtlCol="0" anchor="t"/>
+          <a:lstStyle/>
+          <a:p>
+            <a:pPr algn="l" indent="0" marL="0">
+              <a:spcAft>
+                <a:spcPts val="800"/>
+              </a:spcAft>
+              <a:buNone/>
+            </a:pPr>
+            <a:r>
+              <a:rPr lang="en-US" sz="4000" dirty="0">
+                <a:solidFill>
+                  <a:srgbClr val="111111"/>
+                </a:solidFill>
+                <a:latin typeface="Times New Roman" pitchFamily="34" charset="0"/>
+                <a:ea typeface="Times New Roman" pitchFamily="34" charset="-122"/>
+                <a:cs typeface="Times New Roman" pitchFamily="34" charset="-120"/>
+              </a:rPr>
+              <a:t>Marble (or slate, gneiss).</a:t>
+            </a:r>
+            <a:endParaRPr lang="en-US" sz="4000" dirty="0"/>
+          </a:p>
+        </p:txBody>
+      </p:sp>
+      <p:sp>
+        <p:nvSpPr>
+          <p:cNvPr id="25" name="Slide Number Placeholder 0"/>
+          <p:cNvSpPr>
+            <a:spLocks noGrp="1"/>
+          </p:cNvSpPr>
+          <p:nvPr>
+            <p:ph type="sldNum" sz="quarter" idx="4294967295"/>
+          </p:nvPr>
+        </p:nvSpPr>
+        <p:spPr>
+          <a:xfrm>
+            <a:off x="27432" y="91440"/>
+            <a:ext cx="585216" cy="475488"/>
+          </a:xfrm>
+          <a:prstGeom prst="rect">
+            <a:avLst/>
+          </a:prstGeom>
+          <a:extLst>
+            <a:ext uri="{C572A759-6A51-4108-AA02-DFA0A04FC94B}">
+              <ma14:wrappingTextBoxFlag xmlns:ma14="http://schemas.microsoft.com/office/mac/drawingml/2011/main" val="0"/>
+            </a:ext>
+          </a:extLst>
+        </p:spPr>
+        <p:txBody>
+          <a:bodyPr/>
+          <a:lstStyle>
+            <a:lvl1pPr>
+              <a:defRPr sz="2000">
+                <a:solidFill>
+                  <a:srgbClr val="FFFFFF"/>
+                </a:solidFill>
+                <a:latin typeface="Calibri"/>
+                <a:ea typeface="Calibri"/>
+                <a:cs typeface="Calibri"/>
+              </a:defRPr>
+            </a:lvl1pPr>
+          </a:lstStyle>
+          <a:p>
+            <a:pPr algn="ctr"/>
+            <a:fld id="{F7021451-1387-4CA6-816F-3879F97B5CBC}" type="slidenum">
+              <a:rPr b="1" lang="en-US"/>
+              <a:t>46</a:t>
+            </a:fld>
+            <a:endParaRPr lang="en-US"/>
+          </a:p>
+        </p:txBody>
+      </p:sp>
+    </p:spTree>
+  </p:cSld>
+  <p:clrMapOvr>
+    <a:masterClrMapping/>
+  </p:clrMapOvr>
+</p:sld>
+</file>
+
+<file path=ppt/slides/slide47.xml><?xml version="1.0" encoding="utf-8"?>
+<p:sld xmlns:a="http://schemas.openxmlformats.org/drawingml/2006/main" xmlns:r="http://schemas.openxmlformats.org/officeDocument/2006/relationships" xmlns:p="http://schemas.openxmlformats.org/presentationml/2006/main">
+  <p:cSld name="Slide 47">
+    <p:spTree>
+      <p:nvGrpSpPr>
+        <p:cNvPr id="1" name=""/>
+        <p:cNvGrpSpPr/>
+        <p:nvPr/>
+      </p:nvGrpSpPr>
+      <p:grpSpPr>
+        <a:xfrm>
+          <a:off x="0" y="0"/>
+          <a:ext cx="0" cy="0"/>
+          <a:chOff x="0" y="0"/>
+          <a:chExt cx="0" cy="0"/>
+        </a:xfrm>
+      </p:grpSpPr>
+      <p:sp>
+        <p:nvSpPr>
+          <p:cNvPr id="2" name="Text 0"/>
+          <p:cNvSpPr/>
+          <p:nvPr/>
+        </p:nvSpPr>
+        <p:spPr>
+          <a:xfrm>
+            <a:off x="457200" y="713232"/>
+            <a:ext cx="11368735" cy="274320"/>
+          </a:xfrm>
+          <a:prstGeom prst="rect">
+            <a:avLst/>
+          </a:prstGeom>
+          <a:noFill/>
+          <a:ln/>
+        </p:spPr>
+        <p:txBody>
+          <a:bodyPr wrap="square" lIns="0" tIns="0" rIns="0" bIns="0" rtlCol="0" anchor="ctr"/>
+          <a:lstStyle/>
+          <a:p>
+            <a:pPr algn="r" indent="0" marL="0">
+              <a:buNone/>
+            </a:pPr>
+            <a:r>
+              <a:rPr lang="en-US" sz="1400" b="1" dirty="0">
+                <a:solidFill>
+                  <a:srgbClr val="1C3F6E"/>
+                </a:solidFill>
+                <a:latin typeface="Calibri" pitchFamily="34" charset="0"/>
+                <a:ea typeface="Calibri" pitchFamily="34" charset="-122"/>
+                <a:cs typeface="Calibri" pitchFamily="34" charset="-120"/>
+              </a:rPr>
+              <a:t>REMEDIATION</a:t>
+            </a:r>
+            <a:endParaRPr lang="en-US" sz="1400" dirty="0"/>
+          </a:p>
+        </p:txBody>
+      </p:sp>
+      <p:pic>
+        <p:nvPicPr>
+          <p:cNvPr id="3" name="Image 0" descr="/home/claude/f4/img/minesec_sheet.png">    </p:cNvPr>
+          <p:cNvPicPr>
+            <a:picLocks noChangeAspect="1"/>
+          </p:cNvPicPr>
+          <p:nvPr/>
+        </p:nvPicPr>
+        <p:blipFill>
+          <a:blip r:embed="rId1"/>
+          <a:stretch>
+            <a:fillRect/>
+          </a:stretch>
+        </p:blipFill>
+        <p:spPr>
+          <a:xfrm>
+            <a:off x="0" y="658368"/>
+            <a:ext cx="5120640" cy="5833872"/>
+          </a:xfrm>
+          <a:prstGeom prst="rect">
+            <a:avLst/>
+          </a:prstGeom>
+        </p:spPr>
+      </p:pic>
+      <p:sp>
+        <p:nvSpPr>
+          <p:cNvPr id="4" name="Text 1"/>
+          <p:cNvSpPr/>
+          <p:nvPr/>
+        </p:nvSpPr>
+        <p:spPr>
+          <a:xfrm>
+            <a:off x="5349240" y="1005840"/>
+            <a:ext cx="6522415" cy="731520"/>
+          </a:xfrm>
+          <a:prstGeom prst="rect">
+            <a:avLst/>
+          </a:prstGeom>
+          <a:noFill/>
+          <a:ln/>
+        </p:spPr>
+        <p:txBody>
+          <a:bodyPr wrap="square" lIns="0" tIns="0" rIns="0" bIns="0" rtlCol="0" anchor="ctr">
+            <a:normAutofit/>
+          </a:bodyPr>
+          <a:lstStyle/>
+          <a:p>
+            <a:pPr algn="ctr" indent="0" marL="0">
+              <a:buNone/>
+            </a:pPr>
+            <a:r>
+              <a:rPr lang="en-US" sz="3600" b="1" dirty="0">
+                <a:solidFill>
+                  <a:srgbClr val="990011"/>
+                </a:solidFill>
+                <a:latin typeface="Times New Roman" pitchFamily="34" charset="0"/>
+                <a:ea typeface="Times New Roman" pitchFamily="34" charset="-122"/>
+                <a:cs typeface="Times New Roman" pitchFamily="34" charset="-120"/>
+              </a:rPr>
+              <a:t>Remediation</a:t>
+            </a:r>
+            <a:endParaRPr lang="en-US" sz="3600" dirty="0"/>
+          </a:p>
+        </p:txBody>
+      </p:sp>
+      <p:sp>
+        <p:nvSpPr>
+          <p:cNvPr id="5" name="Text 2"/>
+          <p:cNvSpPr/>
+          <p:nvPr/>
+        </p:nvSpPr>
+        <p:spPr>
+          <a:xfrm>
+            <a:off x="5349240" y="1783080"/>
+            <a:ext cx="6522415" cy="4663440"/>
+          </a:xfrm>
+          <a:prstGeom prst="rect">
+            <a:avLst/>
+          </a:prstGeom>
+          <a:noFill/>
+          <a:ln/>
+        </p:spPr>
+        <p:txBody>
+          <a:bodyPr wrap="square" lIns="0" tIns="0" rIns="0" bIns="0" rtlCol="0" anchor="t"/>
+          <a:lstStyle/>
+          <a:p>
+            <a:pPr algn="l" indent="0" marL="0">
+              <a:spcAft>
+                <a:spcPts val="800"/>
+              </a:spcAft>
+              <a:buNone/>
+            </a:pPr>
+            <a:r>
+              <a:rPr lang="en-US" sz="4000" b="1" dirty="0">
+                <a:solidFill>
+                  <a:srgbClr val="111111"/>
+                </a:solidFill>
+                <a:latin typeface="Times New Roman" pitchFamily="34" charset="0"/>
+                <a:ea typeface="Times New Roman" pitchFamily="34" charset="-122"/>
+                <a:cs typeface="Times New Roman" pitchFamily="34" charset="-120"/>
+              </a:rPr>
+              <a:t>Fill in the blanks:</a:t>
+            </a:r>
+            <a:endParaRPr lang="en-US" sz="4000" dirty="0"/>
+          </a:p>
+          <a:p>
+            <a:pPr algn="l" marL="342900" indent="-342900">
+              <a:spcAft>
+                <a:spcPts val="800"/>
+              </a:spcAft>
+              <a:buSzPct val="100000"/>
+              <a:buFont typeface="+mj-lt"/>
+              <a:buAutoNum type="arabicPeriod" startAt="1"/>
+            </a:pPr>
+            <a:r>
+              <a:rPr lang="en-US" sz="4000" dirty="0">
+                <a:solidFill>
+                  <a:srgbClr val="111111"/>
+                </a:solidFill>
+                <a:latin typeface="Times New Roman" pitchFamily="34" charset="0"/>
+                <a:ea typeface="Times New Roman" pitchFamily="34" charset="-122"/>
+                <a:cs typeface="Times New Roman" pitchFamily="34" charset="-120"/>
+              </a:rPr>
+              <a:t>Granite is an ______ rock.</a:t>
+            </a:r>
+            <a:endParaRPr lang="en-US" sz="4000" dirty="0"/>
+          </a:p>
+          <a:p>
+            <a:pPr algn="l" marL="342900" indent="-342900">
+              <a:spcAft>
+                <a:spcPts val="800"/>
+              </a:spcAft>
+              <a:buSzPct val="100000"/>
+              <a:buFont typeface="+mj-lt"/>
+              <a:buAutoNum type="arabicPeriod" startAt="1"/>
+            </a:pPr>
+            <a:r>
+              <a:rPr lang="en-US" sz="4000" dirty="0">
+                <a:solidFill>
+                  <a:srgbClr val="111111"/>
+                </a:solidFill>
+                <a:latin typeface="Times New Roman" pitchFamily="34" charset="0"/>
+                <a:ea typeface="Times New Roman" pitchFamily="34" charset="-122"/>
+                <a:cs typeface="Times New Roman" pitchFamily="34" charset="-120"/>
+              </a:rPr>
+              <a:t>Rocks formed from layers are ______ rocks.</a:t>
+            </a:r>
+            <a:endParaRPr lang="en-US" sz="4000" dirty="0"/>
+          </a:p>
+          <a:p>
+            <a:pPr algn="l" marL="342900" indent="-342900">
+              <a:spcAft>
+                <a:spcPts val="800"/>
+              </a:spcAft>
+              <a:buSzPct val="100000"/>
+              <a:buFont typeface="+mj-lt"/>
+              <a:buAutoNum type="arabicPeriod" startAt="1"/>
+            </a:pPr>
+            <a:r>
+              <a:rPr lang="en-US" sz="4000" dirty="0">
+                <a:solidFill>
+                  <a:srgbClr val="111111"/>
+                </a:solidFill>
+                <a:latin typeface="Times New Roman" pitchFamily="34" charset="0"/>
+                <a:ea typeface="Times New Roman" pitchFamily="34" charset="-122"/>
+                <a:cs typeface="Times New Roman" pitchFamily="34" charset="-120"/>
+              </a:rPr>
+              <a:t>Heat and pressure make ______ rocks.</a:t>
+            </a:r>
+            <a:endParaRPr lang="en-US" sz="4000" dirty="0"/>
+          </a:p>
+        </p:txBody>
+      </p:sp>
+      <p:sp>
+        <p:nvSpPr>
+          <p:cNvPr id="25" name="Slide Number Placeholder 0"/>
+          <p:cNvSpPr>
+            <a:spLocks noGrp="1"/>
+          </p:cNvSpPr>
+          <p:nvPr>
+            <p:ph type="sldNum" sz="quarter" idx="4294967295"/>
+          </p:nvPr>
+        </p:nvSpPr>
+        <p:spPr>
+          <a:xfrm>
+            <a:off x="27432" y="91440"/>
+            <a:ext cx="585216" cy="475488"/>
+          </a:xfrm>
+          <a:prstGeom prst="rect">
+            <a:avLst/>
+          </a:prstGeom>
+          <a:extLst>
+            <a:ext uri="{C572A759-6A51-4108-AA02-DFA0A04FC94B}">
+              <ma14:wrappingTextBoxFlag xmlns:ma14="http://schemas.microsoft.com/office/mac/drawingml/2011/main" val="0"/>
+            </a:ext>
+          </a:extLst>
+        </p:spPr>
+        <p:txBody>
+          <a:bodyPr/>
+          <a:lstStyle>
+            <a:lvl1pPr>
+              <a:defRPr sz="2000">
+                <a:solidFill>
+                  <a:srgbClr val="FFFFFF"/>
+                </a:solidFill>
+                <a:latin typeface="Calibri"/>
+                <a:ea typeface="Calibri"/>
+                <a:cs typeface="Calibri"/>
+              </a:defRPr>
+            </a:lvl1pPr>
+          </a:lstStyle>
+          <a:p>
+            <a:pPr algn="ctr"/>
+            <a:fld id="{F7021451-1387-4CA6-816F-3879F97B5CBC}" type="slidenum">
+              <a:rPr b="1" lang="en-US"/>
+              <a:t>47</a:t>
+            </a:fld>
+            <a:endParaRPr lang="en-US"/>
+          </a:p>
+        </p:txBody>
+      </p:sp>
+    </p:spTree>
+  </p:cSld>
+  <p:clrMapOvr>
+    <a:masterClrMapping/>
+  </p:clrMapOvr>
+</p:sld>
+</file>
+
+<file path=ppt/slides/slide48.xml><?xml version="1.0" encoding="utf-8"?>
+<p:sld xmlns:a="http://schemas.openxmlformats.org/drawingml/2006/main" xmlns:r="http://schemas.openxmlformats.org/officeDocument/2006/relationships" xmlns:p="http://schemas.openxmlformats.org/presentationml/2006/main">
+  <p:cSld name="Slide 48">
+    <p:spTree>
+      <p:nvGrpSpPr>
+        <p:cNvPr id="1" name=""/>
+        <p:cNvGrpSpPr/>
+        <p:nvPr/>
+      </p:nvGrpSpPr>
+      <p:grpSpPr>
+        <a:xfrm>
+          <a:off x="0" y="0"/>
+          <a:ext cx="0" cy="0"/>
+          <a:chOff x="0" y="0"/>
+          <a:chExt cx="0" cy="0"/>
+        </a:xfrm>
+      </p:grpSpPr>
+      <p:sp>
+        <p:nvSpPr>
+          <p:cNvPr id="2" name="Text 0"/>
+          <p:cNvSpPr/>
+          <p:nvPr/>
+        </p:nvSpPr>
+        <p:spPr>
+          <a:xfrm>
+            <a:off x="457200" y="713232"/>
+            <a:ext cx="11368735" cy="274320"/>
+          </a:xfrm>
+          <a:prstGeom prst="rect">
+            <a:avLst/>
+          </a:prstGeom>
+          <a:noFill/>
+          <a:ln/>
+        </p:spPr>
+        <p:txBody>
+          <a:bodyPr wrap="square" lIns="0" tIns="0" rIns="0" bIns="0" rtlCol="0" anchor="ctr"/>
+          <a:lstStyle/>
+          <a:p>
+            <a:pPr algn="r" indent="0" marL="0">
+              <a:buNone/>
+            </a:pPr>
+            <a:r>
+              <a:rPr lang="en-US" sz="1400" b="1" dirty="0">
+                <a:solidFill>
+                  <a:srgbClr val="1C3F6E"/>
+                </a:solidFill>
+                <a:latin typeface="Calibri" pitchFamily="34" charset="0"/>
+                <a:ea typeface="Calibri" pitchFamily="34" charset="-122"/>
+                <a:cs typeface="Calibri" pitchFamily="34" charset="-120"/>
+              </a:rPr>
+              <a:t>HOMEWORK</a:t>
+            </a:r>
+            <a:endParaRPr lang="en-US" sz="1400" dirty="0"/>
+          </a:p>
+        </p:txBody>
+      </p:sp>
+      <p:pic>
+        <p:nvPicPr>
+          <p:cNvPr id="3" name="Image 0" descr="/home/claude/f4/img/minesec_sheet.png">    </p:cNvPr>
+          <p:cNvPicPr>
+            <a:picLocks noChangeAspect="1"/>
+          </p:cNvPicPr>
+          <p:nvPr/>
+        </p:nvPicPr>
+        <p:blipFill>
+          <a:blip r:embed="rId1"/>
+          <a:stretch>
+            <a:fillRect/>
+          </a:stretch>
+        </p:blipFill>
+        <p:spPr>
+          <a:xfrm>
+            <a:off x="0" y="658368"/>
+            <a:ext cx="5120640" cy="5833872"/>
+          </a:xfrm>
+          <a:prstGeom prst="rect">
+            <a:avLst/>
+          </a:prstGeom>
+        </p:spPr>
+      </p:pic>
+      <p:sp>
+        <p:nvSpPr>
+          <p:cNvPr id="4" name="Text 1"/>
+          <p:cNvSpPr/>
+          <p:nvPr/>
+        </p:nvSpPr>
+        <p:spPr>
+          <a:xfrm>
+            <a:off x="5349240" y="1005840"/>
+            <a:ext cx="6522415" cy="731520"/>
+          </a:xfrm>
+          <a:prstGeom prst="rect">
+            <a:avLst/>
+          </a:prstGeom>
+          <a:noFill/>
+          <a:ln/>
+        </p:spPr>
+        <p:txBody>
+          <a:bodyPr wrap="square" lIns="0" tIns="0" rIns="0" bIns="0" rtlCol="0" anchor="ctr">
+            <a:normAutofit/>
+          </a:bodyPr>
+          <a:lstStyle/>
+          <a:p>
+            <a:pPr algn="ctr" indent="0" marL="0">
+              <a:buNone/>
+            </a:pPr>
+            <a:r>
+              <a:rPr lang="en-US" sz="3600" b="1" dirty="0">
+                <a:solidFill>
+                  <a:srgbClr val="990011"/>
+                </a:solidFill>
+                <a:latin typeface="Times New Roman" pitchFamily="34" charset="0"/>
+                <a:ea typeface="Times New Roman" pitchFamily="34" charset="-122"/>
+                <a:cs typeface="Times New Roman" pitchFamily="34" charset="-120"/>
+              </a:rPr>
+              <a:t>Homework</a:t>
+            </a:r>
+            <a:endParaRPr lang="en-US" sz="3600" dirty="0"/>
+          </a:p>
+        </p:txBody>
+      </p:sp>
+      <p:sp>
+        <p:nvSpPr>
+          <p:cNvPr id="5" name="Text 2"/>
+          <p:cNvSpPr/>
+          <p:nvPr/>
+        </p:nvSpPr>
+        <p:spPr>
+          <a:xfrm>
+            <a:off x="5349240" y="1783080"/>
+            <a:ext cx="6522415" cy="4663440"/>
+          </a:xfrm>
+          <a:prstGeom prst="rect">
+            <a:avLst/>
+          </a:prstGeom>
+          <a:noFill/>
+          <a:ln/>
+        </p:spPr>
+        <p:txBody>
+          <a:bodyPr wrap="square" lIns="0" tIns="0" rIns="0" bIns="0" rtlCol="0" anchor="t"/>
+          <a:lstStyle/>
+          <a:p>
+            <a:pPr algn="l" indent="0" marL="0">
+              <a:spcAft>
+                <a:spcPts val="800"/>
+              </a:spcAft>
+              <a:buNone/>
+            </a:pPr>
+            <a:r>
+              <a:rPr lang="en-US" sz="4000" dirty="0">
+                <a:solidFill>
+                  <a:srgbClr val="111111"/>
+                </a:solidFill>
+                <a:latin typeface="Times New Roman" pitchFamily="34" charset="0"/>
+                <a:ea typeface="Times New Roman" pitchFamily="34" charset="-122"/>
+                <a:cs typeface="Times New Roman" pitchFamily="34" charset="-120"/>
+              </a:rPr>
+              <a:t>Look at a map of the world. Cut out, or trace, Africa and South America and try to fit their coasts together. Write what you notice.</a:t>
+            </a:r>
+            <a:endParaRPr lang="en-US" sz="4000" dirty="0"/>
+          </a:p>
+        </p:txBody>
+      </p:sp>
+      <p:sp>
+        <p:nvSpPr>
+          <p:cNvPr id="25" name="Slide Number Placeholder 0"/>
+          <p:cNvSpPr>
+            <a:spLocks noGrp="1"/>
+          </p:cNvSpPr>
+          <p:nvPr>
+            <p:ph type="sldNum" sz="quarter" idx="4294967295"/>
+          </p:nvPr>
+        </p:nvSpPr>
+        <p:spPr>
+          <a:xfrm>
+            <a:off x="27432" y="91440"/>
+            <a:ext cx="585216" cy="475488"/>
+          </a:xfrm>
+          <a:prstGeom prst="rect">
+            <a:avLst/>
+          </a:prstGeom>
+          <a:extLst>
+            <a:ext uri="{C572A759-6A51-4108-AA02-DFA0A04FC94B}">
+              <ma14:wrappingTextBoxFlag xmlns:ma14="http://schemas.microsoft.com/office/mac/drawingml/2011/main" val="0"/>
+            </a:ext>
+          </a:extLst>
+        </p:spPr>
+        <p:txBody>
+          <a:bodyPr/>
+          <a:lstStyle>
+            <a:lvl1pPr>
+              <a:defRPr sz="2000">
+                <a:solidFill>
+                  <a:srgbClr val="FFFFFF"/>
+                </a:solidFill>
+                <a:latin typeface="Calibri"/>
+                <a:ea typeface="Calibri"/>
+                <a:cs typeface="Calibri"/>
+              </a:defRPr>
+            </a:lvl1pPr>
+          </a:lstStyle>
+          <a:p>
+            <a:pPr algn="ctr"/>
+            <a:fld id="{F7021451-1387-4CA6-816F-3879F97B5CBC}" type="slidenum">
+              <a:rPr b="1" lang="en-US"/>
+              <a:t>48</a:t>
+            </a:fld>
+            <a:endParaRPr lang="en-US"/>
+          </a:p>
+        </p:txBody>
+      </p:sp>
+    </p:spTree>
+  </p:cSld>
+  <p:clrMapOvr>
+    <a:masterClrMapping/>
+  </p:clrMapOvr>
+</p:sld>
+</file>
+
+<file path=ppt/slides/slide49.xml><?xml version="1.0" encoding="utf-8"?>
+<p:sld xmlns:a="http://schemas.openxmlformats.org/drawingml/2006/main" xmlns:r="http://schemas.openxmlformats.org/officeDocument/2006/relationships" xmlns:p="http://schemas.openxmlformats.org/presentationml/2006/main">
+  <p:cSld name="Slide 49">
+    <p:spTree>
+      <p:nvGrpSpPr>
+        <p:cNvPr id="1" name=""/>
+        <p:cNvGrpSpPr/>
+        <p:nvPr/>
+      </p:nvGrpSpPr>
+      <p:grpSpPr>
+        <a:xfrm>
+          <a:off x="0" y="0"/>
+          <a:ext cx="0" cy="0"/>
+          <a:chOff x="0" y="0"/>
+          <a:chExt cx="0" cy="0"/>
+        </a:xfrm>
+      </p:grpSpPr>
+      <p:sp>
+        <p:nvSpPr>
+          <p:cNvPr id="2" name="Text 0"/>
+          <p:cNvSpPr/>
+          <p:nvPr/>
+        </p:nvSpPr>
+        <p:spPr>
+          <a:xfrm>
+            <a:off x="457200" y="713232"/>
+            <a:ext cx="11368735" cy="274320"/>
+          </a:xfrm>
+          <a:prstGeom prst="rect">
+            <a:avLst/>
+          </a:prstGeom>
+          <a:noFill/>
+          <a:ln/>
+        </p:spPr>
+        <p:txBody>
+          <a:bodyPr wrap="square" lIns="0" tIns="0" rIns="0" bIns="0" rtlCol="0" anchor="ctr"/>
+          <a:lstStyle/>
+          <a:p>
+            <a:pPr algn="r" indent="0" marL="0">
+              <a:buNone/>
+            </a:pPr>
+            <a:r>
+              <a:rPr lang="en-US" sz="1400" b="1" dirty="0">
+                <a:solidFill>
+                  <a:srgbClr val="1C3F6E"/>
+                </a:solidFill>
+                <a:latin typeface="Calibri" pitchFamily="34" charset="0"/>
+                <a:ea typeface="Calibri" pitchFamily="34" charset="-122"/>
+                <a:cs typeface="Calibri" pitchFamily="34" charset="-120"/>
+              </a:rPr>
+              <a:t>NEXT LESSON</a:t>
+            </a:r>
+            <a:endParaRPr lang="en-US" sz="1400" dirty="0"/>
+          </a:p>
+        </p:txBody>
+      </p:sp>
+      <p:pic>
+        <p:nvPicPr>
+          <p:cNvPr id="3" name="Image 0" descr="/home/claude/f4/img/minesec_sheet.png">    </p:cNvPr>
+          <p:cNvPicPr>
+            <a:picLocks noChangeAspect="1"/>
+          </p:cNvPicPr>
+          <p:nvPr/>
+        </p:nvPicPr>
+        <p:blipFill>
+          <a:blip r:embed="rId1"/>
+          <a:stretch>
+            <a:fillRect/>
+          </a:stretch>
+        </p:blipFill>
+        <p:spPr>
+          <a:xfrm>
+            <a:off x="0" y="658368"/>
+            <a:ext cx="5120640" cy="5833872"/>
+          </a:xfrm>
+          <a:prstGeom prst="rect">
+            <a:avLst/>
+          </a:prstGeom>
+        </p:spPr>
+      </p:pic>
+      <p:sp>
+        <p:nvSpPr>
+          <p:cNvPr id="4" name="Text 1"/>
+          <p:cNvSpPr/>
+          <p:nvPr/>
+        </p:nvSpPr>
+        <p:spPr>
+          <a:xfrm>
+            <a:off x="5349240" y="1005840"/>
+            <a:ext cx="6522415" cy="731520"/>
+          </a:xfrm>
+          <a:prstGeom prst="rect">
+            <a:avLst/>
+          </a:prstGeom>
+          <a:noFill/>
+          <a:ln/>
+        </p:spPr>
+        <p:txBody>
+          <a:bodyPr wrap="square" lIns="0" tIns="0" rIns="0" bIns="0" rtlCol="0" anchor="ctr">
+            <a:normAutofit/>
+          </a:bodyPr>
+          <a:lstStyle/>
+          <a:p>
+            <a:pPr algn="ctr" indent="0" marL="0">
+              <a:buNone/>
+            </a:pPr>
+            <a:r>
+              <a:rPr lang="en-US" sz="3600" b="1" dirty="0">
+                <a:solidFill>
+                  <a:srgbClr val="990011"/>
+                </a:solidFill>
+                <a:latin typeface="Times New Roman" pitchFamily="34" charset="0"/>
+                <a:ea typeface="Times New Roman" pitchFamily="34" charset="-122"/>
+                <a:cs typeface="Times New Roman" pitchFamily="34" charset="-120"/>
+              </a:rPr>
+              <a:t>Next Lesson</a:t>
+            </a:r>
+            <a:endParaRPr lang="en-US" sz="3600" dirty="0"/>
+          </a:p>
+        </p:txBody>
+      </p:sp>
+      <p:sp>
+        <p:nvSpPr>
+          <p:cNvPr id="5" name="Text 2"/>
+          <p:cNvSpPr/>
+          <p:nvPr/>
+        </p:nvSpPr>
+        <p:spPr>
+          <a:xfrm>
+            <a:off x="5349240" y="1783080"/>
+            <a:ext cx="6522415" cy="4663440"/>
+          </a:xfrm>
+          <a:prstGeom prst="rect">
+            <a:avLst/>
+          </a:prstGeom>
+          <a:noFill/>
+          <a:ln/>
+        </p:spPr>
+        <p:txBody>
+          <a:bodyPr wrap="square" lIns="0" tIns="0" rIns="0" bIns="0" rtlCol="0" anchor="ctr"/>
+          <a:lstStyle/>
+          <a:p>
+            <a:pPr algn="ctr" indent="0" marL="0">
+              <a:spcAft>
+                <a:spcPts val="800"/>
+              </a:spcAft>
+              <a:buNone/>
+            </a:pPr>
+            <a:r>
+              <a:rPr lang="en-US" sz="4000" b="1" dirty="0">
+                <a:solidFill>
+                  <a:srgbClr val="111111"/>
+                </a:solidFill>
+                <a:latin typeface="Times New Roman" pitchFamily="34" charset="0"/>
+                <a:ea typeface="Times New Roman" pitchFamily="34" charset="-122"/>
+                <a:cs typeface="Times New Roman" pitchFamily="34" charset="-120"/>
+              </a:rPr>
+              <a:t>Our next lesson will be on:</a:t>
+            </a:r>
+            <a:endParaRPr lang="en-US" sz="4000" dirty="0"/>
+          </a:p>
+          <a:p>
+            <a:pPr algn="ctr" indent="0" marL="0">
+              <a:spcAft>
+                <a:spcPts val="800"/>
+              </a:spcAft>
+              <a:buNone/>
+            </a:pPr>
+            <a:r>
+              <a:rPr lang="en-US" sz="4000" b="1" dirty="0">
+                <a:solidFill>
+                  <a:srgbClr val="990011"/>
+                </a:solidFill>
+                <a:latin typeface="Times New Roman" pitchFamily="34" charset="0"/>
+                <a:ea typeface="Times New Roman" pitchFamily="34" charset="-122"/>
+                <a:cs typeface="Times New Roman" pitchFamily="34" charset="-120"/>
+              </a:rPr>
+              <a:t>Lesson 9: The Theories of the Earth's Structure: Continental Drift</a:t>
+            </a:r>
+            <a:endParaRPr lang="en-US" sz="4000" dirty="0"/>
+          </a:p>
+        </p:txBody>
+      </p:sp>
+      <p:sp>
+        <p:nvSpPr>
+          <p:cNvPr id="25" name="Slide Number Placeholder 0"/>
+          <p:cNvSpPr>
+            <a:spLocks noGrp="1"/>
+          </p:cNvSpPr>
+          <p:nvPr>
+            <p:ph type="sldNum" sz="quarter" idx="4294967295"/>
+          </p:nvPr>
+        </p:nvSpPr>
+        <p:spPr>
+          <a:xfrm>
+            <a:off x="27432" y="91440"/>
+            <a:ext cx="585216" cy="475488"/>
+          </a:xfrm>
+          <a:prstGeom prst="rect">
+            <a:avLst/>
+          </a:prstGeom>
+          <a:extLst>
+            <a:ext uri="{C572A759-6A51-4108-AA02-DFA0A04FC94B}">
+              <ma14:wrappingTextBoxFlag xmlns:ma14="http://schemas.microsoft.com/office/mac/drawingml/2011/main" val="0"/>
+            </a:ext>
+          </a:extLst>
+        </p:spPr>
+        <p:txBody>
+          <a:bodyPr/>
+          <a:lstStyle>
+            <a:lvl1pPr>
+              <a:defRPr sz="2000">
+                <a:solidFill>
+                  <a:srgbClr val="FFFFFF"/>
+                </a:solidFill>
+                <a:latin typeface="Calibri"/>
+                <a:ea typeface="Calibri"/>
+                <a:cs typeface="Calibri"/>
+              </a:defRPr>
+            </a:lvl1pPr>
+          </a:lstStyle>
+          <a:p>
+            <a:pPr algn="ctr"/>
+            <a:fld id="{F7021451-1387-4CA6-816F-3879F97B5CBC}" type="slidenum">
+              <a:rPr b="1" lang="en-US"/>
+              <a:t>49</a:t>
+            </a:fld>
+            <a:endParaRPr lang="en-US"/>
+          </a:p>
+        </p:txBody>
+      </p:sp>
+    </p:spTree>
+  </p:cSld>
+  <p:clrMapOvr>
+    <a:masterClrMapping/>
+  </p:clrMapOvr>
+</p:sld>
+</file>
+
+<file path=ppt/slides/slide5.xml><?xml version="1.0" encoding="utf-8"?>
+<p:sld xmlns:a="http://schemas.openxmlformats.org/drawingml/2006/main" xmlns:r="http://schemas.openxmlformats.org/officeDocument/2006/relationships" xmlns:p="http://schemas.openxmlformats.org/presentationml/2006/main">
+  <p:cSld name="Slide 5">
+    <p:spTree>
+      <p:nvGrpSpPr>
+        <p:cNvPr id="1" name=""/>
+        <p:cNvGrpSpPr/>
+        <p:nvPr/>
+      </p:nvGrpSpPr>
+      <p:grpSpPr>
+        <a:xfrm>
+          <a:off x="0" y="0"/>
+          <a:ext cx="0" cy="0"/>
+          <a:chOff x="0" y="0"/>
+          <a:chExt cx="0" cy="0"/>
+        </a:xfrm>
+      </p:grpSpPr>
+      <p:sp>
+        <p:nvSpPr>
+          <p:cNvPr id="2" name="Text 0"/>
+          <p:cNvSpPr/>
+          <p:nvPr/>
+        </p:nvSpPr>
+        <p:spPr>
+          <a:xfrm>
+            <a:off x="457200" y="713232"/>
+            <a:ext cx="11368735" cy="274320"/>
+          </a:xfrm>
+          <a:prstGeom prst="rect">
+            <a:avLst/>
+          </a:prstGeom>
+          <a:noFill/>
+          <a:ln/>
+        </p:spPr>
+        <p:txBody>
+          <a:bodyPr wrap="square" lIns="0" tIns="0" rIns="0" bIns="0" rtlCol="0" anchor="ctr"/>
+          <a:lstStyle/>
+          <a:p>
+            <a:pPr algn="r" indent="0" marL="0">
+              <a:buNone/>
+            </a:pPr>
+            <a:r>
+              <a:rPr lang="en-US" sz="1400" b="1" dirty="0">
+                <a:solidFill>
+                  <a:srgbClr val="1C3F6E"/>
+                </a:solidFill>
+                <a:latin typeface="Calibri" pitchFamily="34" charset="0"/>
+                <a:ea typeface="Calibri" pitchFamily="34" charset="-122"/>
+                <a:cs typeface="Calibri" pitchFamily="34" charset="-120"/>
+              </a:rPr>
+              <a:t>HOMEWORK CORRECTION</a:t>
+            </a:r>
+            <a:endParaRPr lang="en-US" sz="1400" dirty="0"/>
+          </a:p>
+        </p:txBody>
+      </p:sp>
+      <p:pic>
+        <p:nvPicPr>
+          <p:cNvPr id="3" name="Image 0" descr="/home/claude/f4/img/minesec_sheet.png">    </p:cNvPr>
+          <p:cNvPicPr>
+            <a:picLocks noChangeAspect="1"/>
+          </p:cNvPicPr>
+          <p:nvPr/>
+        </p:nvPicPr>
+        <p:blipFill>
+          <a:blip r:embed="rId1"/>
+          <a:stretch>
+            <a:fillRect/>
+          </a:stretch>
+        </p:blipFill>
+        <p:spPr>
+          <a:xfrm>
+            <a:off x="0" y="658368"/>
+            <a:ext cx="5120640" cy="5833872"/>
+          </a:xfrm>
+          <a:prstGeom prst="rect">
+            <a:avLst/>
+          </a:prstGeom>
+        </p:spPr>
+      </p:pic>
+      <p:sp>
+        <p:nvSpPr>
+          <p:cNvPr id="4" name="Text 1"/>
+          <p:cNvSpPr/>
+          <p:nvPr/>
+        </p:nvSpPr>
+        <p:spPr>
+          <a:xfrm>
+            <a:off x="5349240" y="1005840"/>
+            <a:ext cx="6522415" cy="731520"/>
+          </a:xfrm>
+          <a:prstGeom prst="rect">
+            <a:avLst/>
+          </a:prstGeom>
+          <a:noFill/>
+          <a:ln/>
+        </p:spPr>
+        <p:txBody>
+          <a:bodyPr wrap="square" lIns="0" tIns="0" rIns="0" bIns="0" rtlCol="0" anchor="ctr">
+            <a:normAutofit/>
+          </a:bodyPr>
+          <a:lstStyle/>
+          <a:p>
+            <a:pPr algn="ctr" indent="0" marL="0">
+              <a:buNone/>
+            </a:pPr>
+            <a:r>
+              <a:rPr lang="en-US" sz="3600" b="1" dirty="0">
+                <a:solidFill>
+                  <a:srgbClr val="990011"/>
+                </a:solidFill>
+                <a:latin typeface="Times New Roman" pitchFamily="34" charset="0"/>
+                <a:ea typeface="Times New Roman" pitchFamily="34" charset="-122"/>
+                <a:cs typeface="Times New Roman" pitchFamily="34" charset="-120"/>
+              </a:rPr>
+              <a:t>Correction: Possible Answer</a:t>
+            </a:r>
+            <a:endParaRPr lang="en-US" sz="3600" dirty="0"/>
+          </a:p>
+        </p:txBody>
+      </p:sp>
+      <p:sp>
+        <p:nvSpPr>
+          <p:cNvPr id="5" name="Text 2"/>
+          <p:cNvSpPr/>
+          <p:nvPr/>
+        </p:nvSpPr>
+        <p:spPr>
+          <a:xfrm>
+            <a:off x="5349240" y="1783080"/>
+            <a:ext cx="6522415" cy="4663440"/>
+          </a:xfrm>
+          <a:prstGeom prst="rect">
+            <a:avLst/>
+          </a:prstGeom>
+          <a:noFill/>
+          <a:ln/>
+        </p:spPr>
+        <p:txBody>
+          <a:bodyPr wrap="square" lIns="0" tIns="0" rIns="0" bIns="0" rtlCol="0" anchor="t"/>
+          <a:lstStyle/>
+          <a:p>
+            <a:pPr algn="l" indent="0" marL="0">
+              <a:spcAft>
+                <a:spcPts val="800"/>
+              </a:spcAft>
+              <a:buNone/>
+            </a:pPr>
+            <a:r>
+              <a:rPr lang="en-US" sz="4000" dirty="0">
+                <a:solidFill>
+                  <a:srgbClr val="111111"/>
+                </a:solidFill>
+                <a:latin typeface="Times New Roman" pitchFamily="34" charset="0"/>
+                <a:ea typeface="Times New Roman" pitchFamily="34" charset="-122"/>
+                <a:cs typeface="Times New Roman" pitchFamily="34" charset="-120"/>
+              </a:rPr>
+              <a:t>Examples: granite from a hill or a quarry; a sandstone block from a building site; marble tiles from a shop. Each should be named with where it was found.</a:t>
+            </a:r>
+            <a:endParaRPr lang="en-US" sz="4000" dirty="0"/>
+          </a:p>
+        </p:txBody>
+      </p:sp>
+      <p:sp>
+        <p:nvSpPr>
+          <p:cNvPr id="25" name="Slide Number Placeholder 0"/>
+          <p:cNvSpPr>
+            <a:spLocks noGrp="1"/>
+          </p:cNvSpPr>
+          <p:nvPr>
+            <p:ph type="sldNum" sz="quarter" idx="4294967295"/>
+          </p:nvPr>
+        </p:nvSpPr>
+        <p:spPr>
+          <a:xfrm>
+            <a:off x="27432" y="91440"/>
+            <a:ext cx="585216" cy="475488"/>
+          </a:xfrm>
+          <a:prstGeom prst="rect">
+            <a:avLst/>
+          </a:prstGeom>
+          <a:extLst>
+            <a:ext uri="{C572A759-6A51-4108-AA02-DFA0A04FC94B}">
+              <ma14:wrappingTextBoxFlag xmlns:ma14="http://schemas.microsoft.com/office/mac/drawingml/2011/main" val="0"/>
+            </a:ext>
+          </a:extLst>
+        </p:spPr>
+        <p:txBody>
+          <a:bodyPr/>
+          <a:lstStyle>
+            <a:lvl1pPr>
+              <a:defRPr sz="2000">
+                <a:solidFill>
+                  <a:srgbClr val="FFFFFF"/>
+                </a:solidFill>
+                <a:latin typeface="Calibri"/>
+                <a:ea typeface="Calibri"/>
+                <a:cs typeface="Calibri"/>
+              </a:defRPr>
+            </a:lvl1pPr>
+          </a:lstStyle>
+          <a:p>
+            <a:pPr algn="ctr"/>
+            <a:fld id="{F7021451-1387-4CA6-816F-3879F97B5CBC}" type="slidenum">
+              <a:rPr b="1" lang="en-US"/>
+              <a:t>5</a:t>
+            </a:fld>
+            <a:endParaRPr lang="en-US"/>
+          </a:p>
+        </p:txBody>
+      </p:sp>
+    </p:spTree>
+  </p:cSld>
+  <p:clrMapOvr>
+    <a:masterClrMapping/>
+  </p:clrMapOvr>
+</p:sld>
+</file>
+
+<file path=ppt/slides/slide50.xml><?xml version="1.0" encoding="utf-8"?>
+<p:sld xmlns:a="http://schemas.openxmlformats.org/drawingml/2006/main" xmlns:r="http://schemas.openxmlformats.org/officeDocument/2006/relationships" xmlns:p="http://schemas.openxmlformats.org/presentationml/2006/main">
+  <p:cSld name="Slide 50">
+    <p:spTree>
+      <p:nvGrpSpPr>
+        <p:cNvPr id="1" name=""/>
+        <p:cNvGrpSpPr/>
+        <p:nvPr/>
+      </p:nvGrpSpPr>
+      <p:grpSpPr>
+        <a:xfrm>
+          <a:off x="0" y="0"/>
+          <a:ext cx="0" cy="0"/>
+          <a:chOff x="0" y="0"/>
+          <a:chExt cx="0" cy="0"/>
+        </a:xfrm>
+      </p:grpSpPr>
+      <p:sp>
+        <p:nvSpPr>
+          <p:cNvPr id="2" name="Text 0"/>
+          <p:cNvSpPr/>
+          <p:nvPr/>
+        </p:nvSpPr>
+        <p:spPr>
+          <a:xfrm>
+            <a:off x="457200" y="713232"/>
+            <a:ext cx="11368735" cy="274320"/>
+          </a:xfrm>
+          <a:prstGeom prst="rect">
+            <a:avLst/>
+          </a:prstGeom>
+          <a:noFill/>
+          <a:ln/>
+        </p:spPr>
+        <p:txBody>
+          <a:bodyPr wrap="square" lIns="0" tIns="0" rIns="0" bIns="0" rtlCol="0" anchor="ctr"/>
+          <a:lstStyle/>
+          <a:p>
+            <a:pPr algn="r" indent="0" marL="0">
+              <a:buNone/>
+            </a:pPr>
+            <a:r>
+              <a:rPr lang="en-US" sz="1400" b="1" dirty="0">
+                <a:solidFill>
+                  <a:srgbClr val="1C3F6E"/>
+                </a:solidFill>
+                <a:latin typeface="Calibri" pitchFamily="34" charset="0"/>
+                <a:ea typeface="Calibri" pitchFamily="34" charset="-122"/>
+                <a:cs typeface="Calibri" pitchFamily="34" charset="-120"/>
+              </a:rPr>
+              <a:t>BILINGUAL GAME</a:t>
+            </a:r>
+            <a:endParaRPr lang="en-US" sz="1400" dirty="0"/>
+          </a:p>
+        </p:txBody>
+      </p:sp>
+      <p:sp>
+        <p:nvSpPr>
+          <p:cNvPr id="3" name="Text 1"/>
+          <p:cNvSpPr/>
+          <p:nvPr/>
+        </p:nvSpPr>
+        <p:spPr>
+          <a:xfrm>
+            <a:off x="457200" y="1005840"/>
+            <a:ext cx="11277295" cy="731520"/>
+          </a:xfrm>
+          <a:prstGeom prst="rect">
+            <a:avLst/>
+          </a:prstGeom>
+          <a:noFill/>
+          <a:ln/>
+        </p:spPr>
+        <p:txBody>
+          <a:bodyPr wrap="square" lIns="0" tIns="0" rIns="0" bIns="0" rtlCol="0" anchor="ctr"/>
+          <a:lstStyle/>
+          <a:p>
+            <a:pPr algn="ctr" indent="0" marL="0">
+              <a:buNone/>
+            </a:pPr>
+            <a:r>
+              <a:rPr lang="en-US" sz="3600" b="1" dirty="0">
+                <a:solidFill>
+                  <a:srgbClr val="990011"/>
+                </a:solidFill>
+                <a:latin typeface="Times New Roman" pitchFamily="34" charset="0"/>
+                <a:ea typeface="Times New Roman" pitchFamily="34" charset="-122"/>
+                <a:cs typeface="Times New Roman" pitchFamily="34" charset="-120"/>
+              </a:rPr>
               <a:t>Bilingual Game (Jeu Bilingue)</a:t>
             </a:r>
             <a:endParaRPr lang="en-US" sz="3600" dirty="0"/>
@@ -15087,7 +18804,7 @@
       </p:sp>
       <p:graphicFrame>
         <p:nvGraphicFramePr>
-          <p:cNvPr id="43" name="Table 0"/>
+          <p:cNvPr id="51" name="Table 0"/>
           <p:cNvGraphicFramePr>
             <a:graphicFrameLocks noGrp="1"/>
           </p:cNvGraphicFramePr>
@@ -16399,7 +20116,7 @@
             <a:pPr algn="ctr"/>
             <a:fld id="{F7021451-1387-4CA6-816F-3879F97B5CBC}" type="slidenum">
               <a:rPr b="1" lang="en-US"/>
-              <a:t>42</a:t>
+              <a:t>50</a:t>
             </a:fld>
             <a:endParaRPr lang="en-US"/>
           </a:p>
@@ -16413,9 +20130,9 @@
 </p:sld>
 </file>
 
-<file path=ppt/slides/slide43.xml><?xml version="1.0" encoding="utf-8"?>
+<file path=ppt/slides/slide51.xml><?xml version="1.0" encoding="utf-8"?>
 <p:sld xmlns:a="http://schemas.openxmlformats.org/drawingml/2006/main" xmlns:r="http://schemas.openxmlformats.org/officeDocument/2006/relationships" xmlns:p="http://schemas.openxmlformats.org/presentationml/2006/main">
-  <p:cSld name="Slide 43">
+  <p:cSld name="Slide 51">
     <p:spTree>
       <p:nvGrpSpPr>
         <p:cNvPr id="1" name=""/>
@@ -16510,7 +20227,7 @@
       </p:sp>
       <p:graphicFrame>
         <p:nvGraphicFramePr>
-          <p:cNvPr id="44" name="Table 0"/>
+          <p:cNvPr id="52" name="Table 0"/>
           <p:cNvGraphicFramePr>
             <a:graphicFrameLocks noGrp="1"/>
           </p:cNvGraphicFramePr>
@@ -17132,7 +20849,7 @@
             <a:pPr algn="ctr"/>
             <a:fld id="{F7021451-1387-4CA6-816F-3879F97B5CBC}" type="slidenum">
               <a:rPr b="1" lang="en-US"/>
-              <a:t>43</a:t>
+              <a:t>51</a:t>
             </a:fld>
             <a:endParaRPr lang="en-US"/>
           </a:p>
@@ -17146,9 +20863,9 @@
 </p:sld>
 </file>
 
-<file path=ppt/slides/slide44.xml><?xml version="1.0" encoding="utf-8"?>
+<file path=ppt/slides/slide52.xml><?xml version="1.0" encoding="utf-8"?>
 <p:sld xmlns:a="http://schemas.openxmlformats.org/drawingml/2006/main" xmlns:r="http://schemas.openxmlformats.org/officeDocument/2006/relationships" xmlns:p="http://schemas.openxmlformats.org/presentationml/2006/main">
-  <p:cSld name="Slide 44">
+  <p:cSld name="Slide 52">
     <p:spTree>
       <p:nvGrpSpPr>
         <p:cNvPr id="1" name=""/>
@@ -17243,7 +20960,7 @@
       </p:sp>
       <p:graphicFrame>
         <p:nvGraphicFramePr>
-          <p:cNvPr id="45" name="Table 0"/>
+          <p:cNvPr id="53" name="Table 0"/>
           <p:cNvGraphicFramePr>
             <a:graphicFrameLocks noGrp="1"/>
           </p:cNvGraphicFramePr>
@@ -17353,7 +21070,7 @@
                           <a:ea typeface="Calibri" pitchFamily="34" charset="-122"/>
                           <a:cs typeface="Calibri" pitchFamily="34" charset="-120"/>
                         </a:rPr>
-                        <a:t>DEFINITIONS; Classification of Rocks; The Rock Cycle.</a:t>
+                        <a:t>DEFINITIONS; Igneous Rocks; Sedimentary Rocks; Metamorphic Rocks; The Rock Cycle.</a:t>
                       </a:r>
                       <a:endParaRPr lang="en-US" sz="1600" dirty="0">
                         <a:latin typeface="Calibri" charset="0"/>
@@ -18003,7 +21720,7 @@
             <a:pPr algn="ctr"/>
             <a:fld id="{F7021451-1387-4CA6-816F-3879F97B5CBC}" type="slidenum">
               <a:rPr b="1" lang="en-US"/>
-              <a:t>44</a:t>
+              <a:t>52</a:t>
             </a:fld>
             <a:endParaRPr lang="en-US"/>
           </a:p>
@@ -18017,9 +21734,9 @@
 </p:sld>
 </file>
 
-<file path=ppt/slides/slide45.xml><?xml version="1.0" encoding="utf-8"?>
+<file path=ppt/slides/slide53.xml><?xml version="1.0" encoding="utf-8"?>
 <p:sld xmlns:a="http://schemas.openxmlformats.org/drawingml/2006/main" xmlns:r="http://schemas.openxmlformats.org/officeDocument/2006/relationships" xmlns:p="http://schemas.openxmlformats.org/presentationml/2006/main">
-  <p:cSld name="Slide 45">
+  <p:cSld name="Slide 53">
     <p:spTree>
       <p:nvGrpSpPr>
         <p:cNvPr id="1" name=""/>
@@ -18286,7 +22003,7 @@
             <a:pPr algn="ctr"/>
             <a:fld id="{F7021451-1387-4CA6-816F-3879F97B5CBC}" type="slidenum">
               <a:rPr b="1" lang="en-US"/>
-              <a:t>45</a:t>
+              <a:t>53</a:t>
             </a:fld>
             <a:endParaRPr lang="en-US"/>
           </a:p>
@@ -18300,9 +22017,9 @@
 </p:sld>
 </file>
 
-<file path=ppt/slides/slide46.xml><?xml version="1.0" encoding="utf-8"?>
+<file path=ppt/slides/slide54.xml><?xml version="1.0" encoding="utf-8"?>
 <p:sld xmlns:a="http://schemas.openxmlformats.org/drawingml/2006/main" xmlns:r="http://schemas.openxmlformats.org/officeDocument/2006/relationships" xmlns:p="http://schemas.openxmlformats.org/presentationml/2006/main">
-  <p:cSld name="Slide 46">
+  <p:cSld name="Slide 54">
     <p:spTree>
       <p:nvGrpSpPr>
         <p:cNvPr id="1" name=""/>
@@ -18373,7 +22090,7 @@
         <p:spPr>
           <a:xfrm>
             <a:off x="0" y="658368"/>
-            <a:ext cx="3840480" cy="5833872"/>
+            <a:ext cx="2468880" cy="5833872"/>
           </a:xfrm>
           <a:prstGeom prst="rect">
             <a:avLst/>
@@ -18388,8 +22105,8 @@
         </p:nvSpPr>
         <p:spPr>
           <a:xfrm>
-            <a:off x="4069080" y="1005840"/>
-            <a:ext cx="7802575" cy="731520"/>
+            <a:off x="2697480" y="1005840"/>
+            <a:ext cx="9174175" cy="731520"/>
           </a:xfrm>
           <a:prstGeom prst="rect">
             <a:avLst/>
@@ -18429,8 +22146,8 @@
         </p:nvSpPr>
         <p:spPr>
           <a:xfrm>
-            <a:off x="4069080" y="1783080"/>
-            <a:ext cx="7802575" cy="4663440"/>
+            <a:off x="2697480" y="1783080"/>
+            <a:ext cx="9174175" cy="4663440"/>
           </a:xfrm>
           <a:prstGeom prst="rect">
             <a:avLst/>
@@ -18563,7 +22280,28 @@
                 <a:ea typeface="Calibri" pitchFamily="34" charset="-122"/>
                 <a:cs typeface="Calibri" pitchFamily="34" charset="-120"/>
               </a:rPr>
-              <a:t>Diagrams and animations: drawn for this lesson (Geography Department).</a:t>
+              <a:t>Photo, board summary (Extrusive examples): “Snapshot, Daguoye Columnar Basalt, Penghu, Taiwan, 隨拍, 池東大菓葉玄武岩, 大菓葉柱狀” by bryan..., CC BY-SA 2.0, via Flickr (https://www.flickr.com/photos/91049143@N00/52316527525)</a:t>
+            </a:r>
+            <a:endParaRPr lang="en-US" sz="1800" dirty="0"/>
+          </a:p>
+          <a:p>
+            <a:pPr algn="l" marL="342900" indent="-342900">
+              <a:spcAft>
+                <a:spcPts val="800"/>
+              </a:spcAft>
+              <a:buSzPct val="100000"/>
+              <a:buChar char="•"/>
+            </a:pPr>
+            <a:r>
+              <a:rPr lang="en-US" sz="1800" dirty="0">
+                <a:solidFill>
+                  <a:srgbClr val="111111"/>
+                </a:solidFill>
+                <a:latin typeface="Calibri" pitchFamily="34" charset="0"/>
+                <a:ea typeface="Calibri" pitchFamily="34" charset="-122"/>
+                <a:cs typeface="Calibri" pitchFamily="34" charset="-120"/>
+              </a:rPr>
+              <a:t>Photo, board summary (Fossils): “Marble Skin Fish Fossil” by Bold Frontiers, CC BY 2.0, via Flickr (https://www.flickr.com/photos/82955120@N05/14091612527)</a:t>
             </a:r>
             <a:endParaRPr lang="en-US" sz="1800" dirty="0"/>
           </a:p>
@@ -18611,7 +22349,7 @@
             <a:pPr algn="ctr"/>
             <a:fld id="{F7021451-1387-4CA6-816F-3879F97B5CBC}" type="slidenum">
               <a:rPr b="1" lang="en-US"/>
-              <a:t>46</a:t>
+              <a:t>54</a:t>
             </a:fld>
             <a:endParaRPr lang="en-US"/>
           </a:p>
@@ -18625,9 +22363,9 @@
 </p:sld>
 </file>
 
-<file path=ppt/slides/slide5.xml><?xml version="1.0" encoding="utf-8"?>
+<file path=ppt/slides/slide55.xml><?xml version="1.0" encoding="utf-8"?>
 <p:sld xmlns:a="http://schemas.openxmlformats.org/drawingml/2006/main" xmlns:r="http://schemas.openxmlformats.org/officeDocument/2006/relationships" xmlns:p="http://schemas.openxmlformats.org/presentationml/2006/main">
-  <p:cSld name="Slide 5">
+  <p:cSld name="Slide 55">
     <p:spTree>
       <p:nvGrpSpPr>
         <p:cNvPr id="1" name=""/>
@@ -18675,7 +22413,7 @@
                 <a:ea typeface="Calibri" pitchFamily="34" charset="-122"/>
                 <a:cs typeface="Calibri" pitchFamily="34" charset="-120"/>
               </a:rPr>
-              <a:t>HOMEWORK CORRECTION</a:t>
+              <a:t>REFERENCES</a:t>
             </a:r>
             <a:endParaRPr lang="en-US" sz="1400" dirty="0"/>
           </a:p>
@@ -18740,7 +22478,7 @@
                 <a:ea typeface="Times New Roman" pitchFamily="34" charset="-122"/>
                 <a:cs typeface="Times New Roman" pitchFamily="34" charset="-120"/>
               </a:rPr>
-              <a:t>Correction: Possible Answer</a:t>
+              <a:t>References (continued)</a:t>
             </a:r>
             <a:endParaRPr lang="en-US" sz="3600" dirty="0"/>
           </a:p>
@@ -18767,24 +22505,25 @@
           <a:bodyPr wrap="square" lIns="0" tIns="0" rIns="0" bIns="0" rtlCol="0" anchor="t"/>
           <a:lstStyle/>
           <a:p>
-            <a:pPr algn="l" indent="0" marL="0">
+            <a:pPr algn="l" marL="342900" indent="-342900">
               <a:spcAft>
                 <a:spcPts val="800"/>
               </a:spcAft>
-              <a:buNone/>
-            </a:pPr>
-            <a:r>
-              <a:rPr lang="en-US" sz="4000" dirty="0">
+              <a:buSzPct val="100000"/>
+              <a:buChar char="•"/>
+            </a:pPr>
+            <a:r>
+              <a:rPr lang="en-US" sz="1800" dirty="0">
                 <a:solidFill>
                   <a:srgbClr val="111111"/>
                 </a:solidFill>
-                <a:latin typeface="Times New Roman" pitchFamily="34" charset="0"/>
-                <a:ea typeface="Times New Roman" pitchFamily="34" charset="-122"/>
-                <a:cs typeface="Times New Roman" pitchFamily="34" charset="-120"/>
-              </a:rPr>
-              <a:t>Examples: granite from a hill or a quarry; a sandstone block from a building site; marble tiles from a shop. Each should be named with where it was found.</a:t>
-            </a:r>
-            <a:endParaRPr lang="en-US" sz="4000" dirty="0"/>
+                <a:latin typeface="Calibri" pitchFamily="34" charset="0"/>
+                <a:ea typeface="Calibri" pitchFamily="34" charset="-122"/>
+                <a:cs typeface="Calibri" pitchFamily="34" charset="-120"/>
+              </a:rPr>
+              <a:t>Diagrams and animations: drawn for this lesson (Geography Department).</a:t>
+            </a:r>
+            <a:endParaRPr lang="en-US" sz="1800" dirty="0"/>
           </a:p>
         </p:txBody>
       </p:sp>
@@ -18830,7 +22569,7 @@
             <a:pPr algn="ctr"/>
             <a:fld id="{F7021451-1387-4CA6-816F-3879F97B5CBC}" type="slidenum">
               <a:rPr b="1" lang="en-US"/>
-              <a:t>5</a:t>
+              <a:t>55</a:t>
             </a:fld>
             <a:endParaRPr lang="en-US"/>
           </a:p>

--- a/lecons/F3/11_FORM4_LESSON08_Rocks.pptx
+++ b/lecons/F3/11_FORM4_LESSON08_Rocks.pptx
@@ -11286,7 +11286,7 @@
               <a:buNone/>
             </a:pPr>
             <a:r>
-              <a:rPr lang="en-US" sz="4000" b="1" dirty="0">
+              <a:rPr lang="en-US" sz="3200" b="1" dirty="0">
                 <a:solidFill>
                   <a:srgbClr val="111111"/>
                 </a:solidFill>
@@ -11296,7 +11296,7 @@
               </a:rPr>
               <a:t>Topic: The Structure of the Earth: Building Processes and Impacts on Man</a:t>
             </a:r>
-            <a:endParaRPr lang="en-US" sz="4000" dirty="0"/>
+            <a:endParaRPr lang="en-US" sz="3200" dirty="0"/>
           </a:p>
           <a:p>
             <a:pPr algn="l" indent="0" marL="0">
@@ -11306,7 +11306,7 @@
               <a:buNone/>
             </a:pPr>
             <a:r>
-              <a:rPr lang="en-US" sz="4000" b="1" dirty="0">
+              <a:rPr lang="en-US" sz="3200" b="1" dirty="0">
                 <a:solidFill>
                   <a:srgbClr val="111111"/>
                 </a:solidFill>
@@ -11316,7 +11316,7 @@
               </a:rPr>
               <a:t>Sub-topic: Internal Structure of the Earth</a:t>
             </a:r>
-            <a:endParaRPr lang="en-US" sz="4000" dirty="0"/>
+            <a:endParaRPr lang="en-US" sz="3200" dirty="0"/>
           </a:p>
           <a:p>
             <a:pPr algn="l" indent="0" marL="0">
@@ -11326,7 +11326,7 @@
               <a:buNone/>
             </a:pPr>
             <a:r>
-              <a:rPr lang="en-US" sz="4000" b="1" dirty="0">
+              <a:rPr lang="en-US" sz="3200" b="1" dirty="0">
                 <a:solidFill>
                   <a:srgbClr val="990011"/>
                 </a:solidFill>
@@ -11336,7 +11336,7 @@
               </a:rPr>
               <a:t>Lesson 8: Rocks</a:t>
             </a:r>
-            <a:endParaRPr lang="en-US" sz="4000" dirty="0"/>
+            <a:endParaRPr lang="en-US" sz="3200" dirty="0"/>
           </a:p>
         </p:txBody>
       </p:sp>

--- a/lecons/F3/11_FORM4_LESSON08_Rocks.pptx
+++ b/lecons/F3/11_FORM4_LESSON08_Rocks.pptx
@@ -2668,7 +2668,7 @@
           <a:p>
             <a:r>
               <a:rPr lang="en-US" dirty="0"/>
-              <a:t>Let us copy Igneous Rocks. Igneous rocks have the following characteristics and examples. Copy the point on Formation on the left, then draw the diagram on the right: granite, an igneous rock. Give it a title and label it clearly.</a:t>
+              <a:t>Let us copy Igneous Rocks. The formation, characteristics and examples of igneous rocks are the following. Copy the point on Formation on the left, then draw the diagram on the right: granite, an igneous rock. Give it a title and label it clearly.</a:t>
             </a:r>
             <a:endParaRPr lang="en-US" dirty="0"/>
           </a:p>
@@ -3020,7 +3020,7 @@
           <a:p>
             <a:r>
               <a:rPr lang="en-US" dirty="0"/>
-              <a:t>Let us copy Sedimentary Rocks. Sedimentary rocks have the following characteristics and examples. Copy the point on Formation on the left, then draw the diagram on the right: sandstone, a sedimentary rock. Give it a title and label it clearly.</a:t>
+              <a:t>Let us copy Sedimentary Rocks. The formation, characteristics and examples of sedimentary rocks are the following. Copy the point on Formation on the left, then draw the diagram on the right: sandstone, a sedimentary rock. Give it a title and label it clearly.</a:t>
             </a:r>
             <a:endParaRPr lang="en-US" dirty="0"/>
           </a:p>
@@ -3372,7 +3372,7 @@
           <a:p>
             <a:r>
               <a:rPr lang="en-US" dirty="0"/>
-              <a:t>Let us copy Metamorphic Rocks. Metamorphic rocks have the following characteristics and examples. Copy the point on Formation on the left, then draw the diagram on the right: marble, a metamorphic rock. Give it a title and label it clearly.</a:t>
+              <a:t>Let us copy Metamorphic Rocks. The formation, characteristics and examples of metamorphic rocks are the following. Copy the point on Formation on the left, then draw the diagram on the right: marble, a metamorphic rock. Give it a title and label it clearly.</a:t>
             </a:r>
             <a:endParaRPr lang="en-US" dirty="0"/>
           </a:p>
@@ -13100,7 +13100,7 @@
               <a:buNone/>
             </a:pPr>
             <a:r>
-              <a:rPr lang="en-US" sz="3600" i="1" dirty="0">
+              <a:rPr lang="en-US" sz="3400" i="1" dirty="0">
                 <a:solidFill>
                   <a:srgbClr val="111111"/>
                 </a:solidFill>
@@ -13108,9 +13108,9 @@
                 <a:ea typeface="Times New Roman" pitchFamily="34" charset="-122"/>
                 <a:cs typeface="Times New Roman" pitchFamily="34" charset="-120"/>
               </a:rPr>
-              <a:t>Igneous rocks have the following characteristics and examples:</a:t>
-            </a:r>
-            <a:endParaRPr lang="en-US" sz="3600" dirty="0"/>
+              <a:t>The formation, characteristics and examples of igneous rocks are the following:</a:t>
+            </a:r>
+            <a:endParaRPr lang="en-US" sz="3400" dirty="0"/>
           </a:p>
           <a:p>
             <a:pPr algn="l" indent="0" marL="0">
@@ -13120,7 +13120,7 @@
               <a:buNone/>
             </a:pPr>
             <a:r>
-              <a:rPr lang="en-US" sz="3600" b="1" dirty="0">
+              <a:rPr lang="en-US" sz="3400" b="1" dirty="0">
                 <a:solidFill>
                   <a:srgbClr val="111111"/>
                 </a:solidFill>
@@ -13137,7 +13137,7 @@
               <a:buNone/>
             </a:pPr>
             <a:r>
-              <a:rPr lang="en-US" sz="3600" dirty="0">
+              <a:rPr lang="en-US" sz="3400" dirty="0">
                 <a:solidFill>
                   <a:srgbClr val="111111"/>
                 </a:solidFill>
@@ -13147,7 +13147,7 @@
               </a:rPr>
               <a:t>They are formed when magma or lava cools and hardens.</a:t>
             </a:r>
-            <a:endParaRPr lang="en-US" sz="3600" dirty="0"/>
+            <a:endParaRPr lang="en-US" sz="3400" dirty="0"/>
           </a:p>
         </p:txBody>
       </p:sp>
@@ -14347,7 +14347,7 @@
                 <a:ea typeface="Times New Roman" pitchFamily="34" charset="-122"/>
                 <a:cs typeface="Times New Roman" pitchFamily="34" charset="-120"/>
               </a:rPr>
-              <a:t>Sedimentary rocks have the following characteristics and examples:</a:t>
+              <a:t>The formation, characteristics and examples of sedimentary rocks are the following:</a:t>
             </a:r>
             <a:endParaRPr lang="en-US" sz="3200" dirty="0"/>
           </a:p>
@@ -15578,7 +15578,7 @@
               <a:buNone/>
             </a:pPr>
             <a:r>
-              <a:rPr lang="en-US" sz="3200" i="1" dirty="0">
+              <a:rPr lang="en-US" sz="3000" i="1" dirty="0">
                 <a:solidFill>
                   <a:srgbClr val="111111"/>
                 </a:solidFill>
@@ -15586,9 +15586,9 @@
                 <a:ea typeface="Times New Roman" pitchFamily="34" charset="-122"/>
                 <a:cs typeface="Times New Roman" pitchFamily="34" charset="-120"/>
               </a:rPr>
-              <a:t>Metamorphic rocks have the following characteristics and examples:</a:t>
-            </a:r>
-            <a:endParaRPr lang="en-US" sz="3200" dirty="0"/>
+              <a:t>The formation, characteristics and examples of metamorphic rocks are the following:</a:t>
+            </a:r>
+            <a:endParaRPr lang="en-US" sz="3000" dirty="0"/>
           </a:p>
           <a:p>
             <a:pPr algn="l" indent="0" marL="0">
@@ -15598,7 +15598,7 @@
               <a:buNone/>
             </a:pPr>
             <a:r>
-              <a:rPr lang="en-US" sz="3200" b="1" dirty="0">
+              <a:rPr lang="en-US" sz="3000" b="1" dirty="0">
                 <a:solidFill>
                   <a:srgbClr val="111111"/>
                 </a:solidFill>
@@ -15615,7 +15615,7 @@
               <a:buNone/>
             </a:pPr>
             <a:r>
-              <a:rPr lang="en-US" sz="3200" dirty="0">
+              <a:rPr lang="en-US" sz="3000" dirty="0">
                 <a:solidFill>
                   <a:srgbClr val="111111"/>
                 </a:solidFill>
@@ -15625,7 +15625,7 @@
               </a:rPr>
               <a:t>They are formed when igneous or sedimentary rocks are changed by great heat and pressure.</a:t>
             </a:r>
-            <a:endParaRPr lang="en-US" sz="3200" dirty="0"/>
+            <a:endParaRPr lang="en-US" sz="3000" dirty="0"/>
           </a:p>
         </p:txBody>
       </p:sp>

--- a/lecons/F3/11_FORM4_LESSON08_Rocks.pptx
+++ b/lecons/F3/11_FORM4_LESSON08_Rocks.pptx
@@ -3460,7 +3460,7 @@
           <a:p>
             <a:r>
               <a:rPr lang="en-US" dirty="0"/>
-              <a:t>Before we start the new lesson, let us correct the homework I gave you at the end of Lesson 7: The Internal Structure of the Earth. The question was: Collect three different stones or building materials (for example a piece of granite, a sandstone block and a piece of marble or tile). Write where you found each one. Take out your exercise books.</a:t>
+              <a:t>Before we start the new lesson, let us correct the homework I gave you at the end of Lesson 7: The Internal Structure of the Earth. The question was: Name the three types of rocks. Take out your exercise books.</a:t>
             </a:r>
             <a:endParaRPr lang="en-US" dirty="0"/>
           </a:p>
@@ -4252,7 +4252,7 @@
           <a:p>
             <a:r>
               <a:rPr lang="en-US" dirty="0"/>
-              <a:t>For your homework: Look at a map of the world. Cut out, or trace, Africa and South America and try to fit their coasts together. Write what you notice. We shall correct it at the beginning of our next lesson.</a:t>
+              <a:t>For your homework: Name the single continent of long ago. We shall correct it at the beginning of our next lesson.</a:t>
             </a:r>
             <a:endParaRPr lang="en-US" dirty="0"/>
           </a:p>
@@ -4428,7 +4428,7 @@
           <a:p>
             <a:r>
               <a:rPr lang="en-US" dirty="0"/>
-              <a:t>Here is a good answer. Examples: granite from a hill or a quarry; a sandstone block from a building site; marble tiles from a shop. Each should be named with where it was found. Compare it with your own answer and correct your work in red.</a:t>
+              <a:t>Here is a good answer. Igneous, sedimentary and metamorphic rocks. Compare it with your own answer and correct your work in red.</a:t>
             </a:r>
             <a:endParaRPr lang="en-US" dirty="0"/>
           </a:p>
@@ -15821,7 +15821,7 @@
         <p:spPr>
           <a:xfrm>
             <a:off x="0" y="658368"/>
-            <a:ext cx="2468880" cy="5833872"/>
+            <a:ext cx="5120640" cy="5833872"/>
           </a:xfrm>
           <a:prstGeom prst="rect">
             <a:avLst/>
@@ -15836,8 +15836,8 @@
         </p:nvSpPr>
         <p:spPr>
           <a:xfrm>
-            <a:off x="2697480" y="1005840"/>
-            <a:ext cx="9174175" cy="731520"/>
+            <a:off x="5349240" y="1005840"/>
+            <a:ext cx="6522415" cy="731520"/>
           </a:xfrm>
           <a:prstGeom prst="rect">
             <a:avLst/>
@@ -15877,8 +15877,8 @@
         </p:nvSpPr>
         <p:spPr>
           <a:xfrm>
-            <a:off x="2697480" y="1783080"/>
-            <a:ext cx="9174175" cy="4663440"/>
+            <a:off x="5349240" y="1783080"/>
+            <a:ext cx="6522415" cy="4663440"/>
           </a:xfrm>
           <a:prstGeom prst="rect">
             <a:avLst/>
@@ -15925,7 +15925,7 @@
                 <a:ea typeface="Times New Roman" pitchFamily="34" charset="-122"/>
                 <a:cs typeface="Times New Roman" pitchFamily="34" charset="-120"/>
               </a:rPr>
-              <a:t>Collect three different stones or building materials (for example a piece of granite, a sandstone block and a piece of marble or tile). Write where you found each one.</a:t>
+              <a:t>Name the three types of rocks.</a:t>
             </a:r>
             <a:endParaRPr lang="en-US" sz="4000" dirty="0"/>
           </a:p>
@@ -18187,7 +18187,7 @@
                 <a:ea typeface="Times New Roman" pitchFamily="34" charset="-122"/>
                 <a:cs typeface="Times New Roman" pitchFamily="34" charset="-120"/>
               </a:rPr>
-              <a:t>Look at a map of the world. Cut out, or trace, Africa and South America and try to fit their coasts together. Write what you notice.</a:t>
+              <a:t>Name the single continent of long ago.</a:t>
             </a:r>
             <a:endParaRPr lang="en-US" sz="4000" dirty="0"/>
           </a:p>
@@ -18645,7 +18645,7 @@
                 <a:ea typeface="Times New Roman" pitchFamily="34" charset="-122"/>
                 <a:cs typeface="Times New Roman" pitchFamily="34" charset="-120"/>
               </a:rPr>
-              <a:t>Examples: granite from a hill or a quarry; a sandstone block from a building site; marble tiles from a shop. Each should be named with where it was found.</a:t>
+              <a:t>Igneous, sedimentary and metamorphic rocks.</a:t>
             </a:r>
             <a:endParaRPr lang="en-US" sz="4000" dirty="0"/>
           </a:p>
@@ -21346,7 +21346,7 @@
                           <a:ea typeface="Calibri" pitchFamily="34" charset="-122"/>
                           <a:cs typeface="Calibri" pitchFamily="34" charset="-120"/>
                         </a:rPr>
-                        <a:t>Look at a map of the world. Cut out, or trace, Africa and South America and try to fit their coasts together. Write what you notice.</a:t>
+                        <a:t>Name the single continent of long ago.</a:t>
                       </a:r>
                       <a:endParaRPr lang="en-US" sz="1600" dirty="0">
                         <a:latin typeface="Calibri" charset="0"/>
